--- a/Variational Autoencoders.pptx
+++ b/Variational Autoencoders.pptx
@@ -5,10 +5,10 @@
     <p:sldMasterId id="2147483660" r:id="rId1"/>
   </p:sldMasterIdLst>
   <p:notesMasterIdLst>
-    <p:notesMasterId r:id="rId23"/>
+    <p:notesMasterId r:id="rId32"/>
   </p:notesMasterIdLst>
   <p:handoutMasterIdLst>
-    <p:handoutMasterId r:id="rId24"/>
+    <p:handoutMasterId r:id="rId33"/>
   </p:handoutMasterIdLst>
   <p:sldIdLst>
     <p:sldId id="256" r:id="rId2"/>
@@ -17,21 +17,30 @@
     <p:sldId id="1370" r:id="rId5"/>
     <p:sldId id="1368" r:id="rId6"/>
     <p:sldId id="1369" r:id="rId7"/>
-    <p:sldId id="1361" r:id="rId8"/>
-    <p:sldId id="1352" r:id="rId9"/>
-    <p:sldId id="1353" r:id="rId10"/>
-    <p:sldId id="1348" r:id="rId11"/>
-    <p:sldId id="1350" r:id="rId12"/>
-    <p:sldId id="1363" r:id="rId13"/>
-    <p:sldId id="1364" r:id="rId14"/>
-    <p:sldId id="1355" r:id="rId15"/>
-    <p:sldId id="1360" r:id="rId16"/>
-    <p:sldId id="1349" r:id="rId17"/>
-    <p:sldId id="1351" r:id="rId18"/>
-    <p:sldId id="1365" r:id="rId19"/>
-    <p:sldId id="1358" r:id="rId20"/>
-    <p:sldId id="1357" r:id="rId21"/>
-    <p:sldId id="1366" r:id="rId22"/>
+    <p:sldId id="1371" r:id="rId8"/>
+    <p:sldId id="1372" r:id="rId9"/>
+    <p:sldId id="1374" r:id="rId10"/>
+    <p:sldId id="940" r:id="rId11"/>
+    <p:sldId id="939" r:id="rId12"/>
+    <p:sldId id="1375" r:id="rId13"/>
+    <p:sldId id="935" r:id="rId14"/>
+    <p:sldId id="296" r:id="rId15"/>
+    <p:sldId id="1361" r:id="rId16"/>
+    <p:sldId id="1352" r:id="rId17"/>
+    <p:sldId id="1353" r:id="rId18"/>
+    <p:sldId id="1348" r:id="rId19"/>
+    <p:sldId id="1350" r:id="rId20"/>
+    <p:sldId id="1363" r:id="rId21"/>
+    <p:sldId id="1364" r:id="rId22"/>
+    <p:sldId id="1355" r:id="rId23"/>
+    <p:sldId id="1360" r:id="rId24"/>
+    <p:sldId id="1349" r:id="rId25"/>
+    <p:sldId id="1351" r:id="rId26"/>
+    <p:sldId id="1365" r:id="rId27"/>
+    <p:sldId id="1358" r:id="rId28"/>
+    <p:sldId id="1357" r:id="rId29"/>
+    <p:sldId id="1366" r:id="rId30"/>
+    <p:sldId id="1376" r:id="rId31"/>
   </p:sldIdLst>
   <p:sldSz cx="12192000" cy="6858000"/>
   <p:notesSz cx="6858000" cy="9144000"/>
@@ -145,6 +154,14 @@
             <p14:sldId id="1370"/>
             <p14:sldId id="1368"/>
             <p14:sldId id="1369"/>
+            <p14:sldId id="1371"/>
+            <p14:sldId id="1372"/>
+            <p14:sldId id="1374"/>
+            <p14:sldId id="940"/>
+            <p14:sldId id="939"/>
+            <p14:sldId id="1375"/>
+            <p14:sldId id="935"/>
+            <p14:sldId id="296"/>
             <p14:sldId id="1361"/>
             <p14:sldId id="1352"/>
             <p14:sldId id="1353"/>
@@ -160,6 +177,7 @@
             <p14:sldId id="1358"/>
             <p14:sldId id="1357"/>
             <p14:sldId id="1366"/>
+            <p14:sldId id="1376"/>
           </p14:sldIdLst>
         </p14:section>
         <p14:section name="자세한 정보" id="{2CC34DB2-6590-42C0-AD4B-A04C6060184E}">
@@ -982,6 +1000,602 @@
         <p:cNvPr id="1" name="">
           <a:extLst>
             <a:ext uri="{FF2B5EF4-FFF2-40B4-BE49-F238E27FC236}">
+              <a16:creationId xmlns:a16="http://schemas.microsoft.com/office/drawing/2014/main" id="{C858FF2D-ED84-4609-F49F-C7737B70C863}"/>
+            </a:ext>
+          </a:extLst>
+        </p:cNvPr>
+        <p:cNvGrpSpPr/>
+        <p:nvPr/>
+      </p:nvGrpSpPr>
+      <p:grpSpPr>
+        <a:xfrm>
+          <a:off x="0" y="0"/>
+          <a:ext cx="0" cy="0"/>
+          <a:chOff x="0" y="0"/>
+          <a:chExt cx="0" cy="0"/>
+        </a:xfrm>
+      </p:grpSpPr>
+      <p:sp>
+        <p:nvSpPr>
+          <p:cNvPr id="2" name="슬라이드 이미지 개체 틀 1">
+            <a:extLst>
+              <a:ext uri="{FF2B5EF4-FFF2-40B4-BE49-F238E27FC236}">
+                <a16:creationId xmlns:a16="http://schemas.microsoft.com/office/drawing/2014/main" id="{71D0AA1A-D7BB-1D92-FF6A-19C0319B92A6}"/>
+              </a:ext>
+            </a:extLst>
+          </p:cNvPr>
+          <p:cNvSpPr>
+            <a:spLocks noGrp="1" noRot="1" noChangeAspect="1"/>
+          </p:cNvSpPr>
+          <p:nvPr>
+            <p:ph type="sldImg"/>
+          </p:nvPr>
+        </p:nvSpPr>
+        <p:spPr>
+          <a:xfrm>
+            <a:off x="685800" y="1143000"/>
+            <a:ext cx="5486400" cy="3086100"/>
+          </a:xfrm>
+        </p:spPr>
+      </p:sp>
+      <p:sp>
+        <p:nvSpPr>
+          <p:cNvPr id="3" name="슬라이드 노트 개체 틀 2">
+            <a:extLst>
+              <a:ext uri="{FF2B5EF4-FFF2-40B4-BE49-F238E27FC236}">
+                <a16:creationId xmlns:a16="http://schemas.microsoft.com/office/drawing/2014/main" id="{B36400CB-03FB-E51D-43A0-1E89DC930338}"/>
+              </a:ext>
+            </a:extLst>
+          </p:cNvPr>
+          <p:cNvSpPr>
+            <a:spLocks noGrp="1"/>
+          </p:cNvSpPr>
+          <p:nvPr>
+            <p:ph type="body" idx="1"/>
+          </p:nvPr>
+        </p:nvSpPr>
+        <p:spPr/>
+        <p:txBody>
+          <a:bodyPr rtlCol="0"/>
+          <a:lstStyle/>
+          <a:p>
+            <a:pPr rtl="0"/>
+            <a:endParaRPr lang="ko-KR" altLang="en-US">
+              <a:latin typeface="맑은 고딕" panose="020B0503020000020004" pitchFamily="50" charset="-127"/>
+              <a:ea typeface="맑은 고딕" panose="020B0503020000020004" pitchFamily="50" charset="-127"/>
+            </a:endParaRPr>
+          </a:p>
+        </p:txBody>
+      </p:sp>
+      <p:sp>
+        <p:nvSpPr>
+          <p:cNvPr id="4" name="슬라이드 번호 개체 틀 3">
+            <a:extLst>
+              <a:ext uri="{FF2B5EF4-FFF2-40B4-BE49-F238E27FC236}">
+                <a16:creationId xmlns:a16="http://schemas.microsoft.com/office/drawing/2014/main" id="{352EC20B-F944-FA71-6C49-3464C5D105D5}"/>
+              </a:ext>
+            </a:extLst>
+          </p:cNvPr>
+          <p:cNvSpPr>
+            <a:spLocks noGrp="1"/>
+          </p:cNvSpPr>
+          <p:nvPr>
+            <p:ph type="sldNum" sz="quarter" idx="10"/>
+          </p:nvPr>
+        </p:nvSpPr>
+        <p:spPr/>
+        <p:txBody>
+          <a:bodyPr rtlCol="0"/>
+          <a:lstStyle/>
+          <a:p>
+            <a:pPr rtl="0"/>
+            <a:fld id="{DF61EA0F-A667-4B49-8422-0062BC55E249}" type="slidenum">
+              <a:rPr lang="en-US" altLang="ko-KR" smtClean="0">
+                <a:latin typeface="맑은 고딕" panose="020B0503020000020004" pitchFamily="50" charset="-127"/>
+                <a:ea typeface="맑은 고딕" panose="020B0503020000020004" pitchFamily="50" charset="-127"/>
+              </a:rPr>
+              <a:t>7</a:t>
+            </a:fld>
+            <a:endParaRPr lang="ko-KR" altLang="en-US">
+              <a:latin typeface="맑은 고딕" panose="020B0503020000020004" pitchFamily="50" charset="-127"/>
+              <a:ea typeface="맑은 고딕" panose="020B0503020000020004" pitchFamily="50" charset="-127"/>
+            </a:endParaRPr>
+          </a:p>
+        </p:txBody>
+      </p:sp>
+    </p:spTree>
+    <p:extLst>
+      <p:ext uri="{BB962C8B-B14F-4D97-AF65-F5344CB8AC3E}">
+        <p14:creationId xmlns:p14="http://schemas.microsoft.com/office/powerpoint/2010/main" val="395763573"/>
+      </p:ext>
+    </p:extLst>
+  </p:cSld>
+  <p:clrMapOvr>
+    <a:masterClrMapping/>
+  </p:clrMapOvr>
+</p:notes>
+</file>
+
+<file path=ppt/notesSlides/notesSlide4.xml><?xml version="1.0" encoding="utf-8"?>
+<p:notes xmlns:a="http://schemas.openxmlformats.org/drawingml/2006/main" xmlns:r="http://schemas.openxmlformats.org/officeDocument/2006/relationships" xmlns:p="http://schemas.openxmlformats.org/presentationml/2006/main">
+  <p:cSld>
+    <p:spTree>
+      <p:nvGrpSpPr>
+        <p:cNvPr id="1" name="">
+          <a:extLst>
+            <a:ext uri="{FF2B5EF4-FFF2-40B4-BE49-F238E27FC236}">
+              <a16:creationId xmlns:a16="http://schemas.microsoft.com/office/drawing/2014/main" id="{2D272862-1A4B-6638-993F-A73E43F1FC7F}"/>
+            </a:ext>
+          </a:extLst>
+        </p:cNvPr>
+        <p:cNvGrpSpPr/>
+        <p:nvPr/>
+      </p:nvGrpSpPr>
+      <p:grpSpPr>
+        <a:xfrm>
+          <a:off x="0" y="0"/>
+          <a:ext cx="0" cy="0"/>
+          <a:chOff x="0" y="0"/>
+          <a:chExt cx="0" cy="0"/>
+        </a:xfrm>
+      </p:grpSpPr>
+      <p:sp>
+        <p:nvSpPr>
+          <p:cNvPr id="2" name="슬라이드 이미지 개체 틀 1">
+            <a:extLst>
+              <a:ext uri="{FF2B5EF4-FFF2-40B4-BE49-F238E27FC236}">
+                <a16:creationId xmlns:a16="http://schemas.microsoft.com/office/drawing/2014/main" id="{0E5BAB6C-AACF-CC7E-6FD7-3AFC1F995C66}"/>
+              </a:ext>
+            </a:extLst>
+          </p:cNvPr>
+          <p:cNvSpPr>
+            <a:spLocks noGrp="1" noRot="1" noChangeAspect="1"/>
+          </p:cNvSpPr>
+          <p:nvPr>
+            <p:ph type="sldImg"/>
+          </p:nvPr>
+        </p:nvSpPr>
+        <p:spPr/>
+      </p:sp>
+      <p:sp>
+        <p:nvSpPr>
+          <p:cNvPr id="3" name="슬라이드 노트 개체 틀 2">
+            <a:extLst>
+              <a:ext uri="{FF2B5EF4-FFF2-40B4-BE49-F238E27FC236}">
+                <a16:creationId xmlns:a16="http://schemas.microsoft.com/office/drawing/2014/main" id="{E7C40492-4359-487E-09E0-50D494910808}"/>
+              </a:ext>
+            </a:extLst>
+          </p:cNvPr>
+          <p:cNvSpPr>
+            <a:spLocks noGrp="1"/>
+          </p:cNvSpPr>
+          <p:nvPr>
+            <p:ph type="body" idx="1"/>
+          </p:nvPr>
+        </p:nvSpPr>
+        <p:spPr/>
+        <p:txBody>
+          <a:bodyPr/>
+          <a:lstStyle/>
+          <a:p>
+            <a:endParaRPr lang="ko-KR" altLang="en-US">
+              <a:latin typeface="맑은 고딕" panose="020B0503020000020004" pitchFamily="50" charset="-127"/>
+              <a:ea typeface="맑은 고딕" panose="020B0503020000020004" pitchFamily="50" charset="-127"/>
+            </a:endParaRPr>
+          </a:p>
+        </p:txBody>
+      </p:sp>
+      <p:sp>
+        <p:nvSpPr>
+          <p:cNvPr id="4" name="슬라이드 번호 개체 틀 3">
+            <a:extLst>
+              <a:ext uri="{FF2B5EF4-FFF2-40B4-BE49-F238E27FC236}">
+                <a16:creationId xmlns:a16="http://schemas.microsoft.com/office/drawing/2014/main" id="{027D5469-4301-F37A-C47B-C09F7641B5F9}"/>
+              </a:ext>
+            </a:extLst>
+          </p:cNvPr>
+          <p:cNvSpPr>
+            <a:spLocks noGrp="1"/>
+          </p:cNvSpPr>
+          <p:nvPr>
+            <p:ph type="sldNum" sz="quarter" idx="5"/>
+          </p:nvPr>
+        </p:nvSpPr>
+        <p:spPr/>
+        <p:txBody>
+          <a:bodyPr/>
+          <a:lstStyle/>
+          <a:p>
+            <a:pPr rtl="0"/>
+            <a:fld id="{DF61EA0F-A667-4B49-8422-0062BC55E249}" type="slidenum">
+              <a:rPr lang="en-US" altLang="ko-KR" smtClean="0">
+                <a:latin typeface="맑은 고딕" panose="020B0503020000020004" pitchFamily="50" charset="-127"/>
+                <a:ea typeface="맑은 고딕" panose="020B0503020000020004" pitchFamily="50" charset="-127"/>
+              </a:rPr>
+              <a:t>11</a:t>
+            </a:fld>
+            <a:endParaRPr lang="ko-KR" altLang="en-US">
+              <a:latin typeface="맑은 고딕" panose="020B0503020000020004" pitchFamily="50" charset="-127"/>
+              <a:ea typeface="맑은 고딕" panose="020B0503020000020004" pitchFamily="50" charset="-127"/>
+            </a:endParaRPr>
+          </a:p>
+        </p:txBody>
+      </p:sp>
+    </p:spTree>
+    <p:extLst>
+      <p:ext uri="{BB962C8B-B14F-4D97-AF65-F5344CB8AC3E}">
+        <p14:creationId xmlns:p14="http://schemas.microsoft.com/office/powerpoint/2010/main" val="4207089266"/>
+      </p:ext>
+    </p:extLst>
+  </p:cSld>
+  <p:clrMapOvr>
+    <a:masterClrMapping/>
+  </p:clrMapOvr>
+</p:notes>
+</file>
+
+<file path=ppt/notesSlides/notesSlide5.xml><?xml version="1.0" encoding="utf-8"?>
+<p:notes xmlns:a="http://schemas.openxmlformats.org/drawingml/2006/main" xmlns:r="http://schemas.openxmlformats.org/officeDocument/2006/relationships" xmlns:p="http://schemas.openxmlformats.org/presentationml/2006/main">
+  <p:cSld>
+    <p:spTree>
+      <p:nvGrpSpPr>
+        <p:cNvPr id="1" name="">
+          <a:extLst>
+            <a:ext uri="{FF2B5EF4-FFF2-40B4-BE49-F238E27FC236}">
+              <a16:creationId xmlns:a16="http://schemas.microsoft.com/office/drawing/2014/main" id="{8E0B6E9C-298D-1C21-FFCB-59F150E3C077}"/>
+            </a:ext>
+          </a:extLst>
+        </p:cNvPr>
+        <p:cNvGrpSpPr/>
+        <p:nvPr/>
+      </p:nvGrpSpPr>
+      <p:grpSpPr>
+        <a:xfrm>
+          <a:off x="0" y="0"/>
+          <a:ext cx="0" cy="0"/>
+          <a:chOff x="0" y="0"/>
+          <a:chExt cx="0" cy="0"/>
+        </a:xfrm>
+      </p:grpSpPr>
+      <p:sp>
+        <p:nvSpPr>
+          <p:cNvPr id="2" name="슬라이드 이미지 개체 틀 1">
+            <a:extLst>
+              <a:ext uri="{FF2B5EF4-FFF2-40B4-BE49-F238E27FC236}">
+                <a16:creationId xmlns:a16="http://schemas.microsoft.com/office/drawing/2014/main" id="{640258BF-50F4-8940-FC2C-5D9817A42E35}"/>
+              </a:ext>
+            </a:extLst>
+          </p:cNvPr>
+          <p:cNvSpPr>
+            <a:spLocks noGrp="1" noRot="1" noChangeAspect="1"/>
+          </p:cNvSpPr>
+          <p:nvPr>
+            <p:ph type="sldImg"/>
+          </p:nvPr>
+        </p:nvSpPr>
+        <p:spPr/>
+      </p:sp>
+      <p:sp>
+        <p:nvSpPr>
+          <p:cNvPr id="3" name="슬라이드 노트 개체 틀 2">
+            <a:extLst>
+              <a:ext uri="{FF2B5EF4-FFF2-40B4-BE49-F238E27FC236}">
+                <a16:creationId xmlns:a16="http://schemas.microsoft.com/office/drawing/2014/main" id="{E16BB5E7-CE10-0917-3EE7-C326E7AEBE95}"/>
+              </a:ext>
+            </a:extLst>
+          </p:cNvPr>
+          <p:cNvSpPr>
+            <a:spLocks noGrp="1"/>
+          </p:cNvSpPr>
+          <p:nvPr>
+            <p:ph type="body" idx="1"/>
+          </p:nvPr>
+        </p:nvSpPr>
+        <p:spPr/>
+        <p:txBody>
+          <a:bodyPr/>
+          <a:lstStyle/>
+          <a:p>
+            <a:endParaRPr lang="ko-KR" altLang="en-US">
+              <a:latin typeface="맑은 고딕" panose="020B0503020000020004" pitchFamily="50" charset="-127"/>
+              <a:ea typeface="맑은 고딕" panose="020B0503020000020004" pitchFamily="50" charset="-127"/>
+            </a:endParaRPr>
+          </a:p>
+        </p:txBody>
+      </p:sp>
+      <p:sp>
+        <p:nvSpPr>
+          <p:cNvPr id="4" name="슬라이드 번호 개체 틀 3">
+            <a:extLst>
+              <a:ext uri="{FF2B5EF4-FFF2-40B4-BE49-F238E27FC236}">
+                <a16:creationId xmlns:a16="http://schemas.microsoft.com/office/drawing/2014/main" id="{E889CEAA-B5DD-5A80-EEDD-584BC294B0C4}"/>
+              </a:ext>
+            </a:extLst>
+          </p:cNvPr>
+          <p:cNvSpPr>
+            <a:spLocks noGrp="1"/>
+          </p:cNvSpPr>
+          <p:nvPr>
+            <p:ph type="sldNum" sz="quarter" idx="5"/>
+          </p:nvPr>
+        </p:nvSpPr>
+        <p:spPr/>
+        <p:txBody>
+          <a:bodyPr/>
+          <a:lstStyle/>
+          <a:p>
+            <a:pPr rtl="0"/>
+            <a:fld id="{DF61EA0F-A667-4B49-8422-0062BC55E249}" type="slidenum">
+              <a:rPr lang="en-US" altLang="ko-KR" smtClean="0">
+                <a:latin typeface="맑은 고딕" panose="020B0503020000020004" pitchFamily="50" charset="-127"/>
+                <a:ea typeface="맑은 고딕" panose="020B0503020000020004" pitchFamily="50" charset="-127"/>
+              </a:rPr>
+              <a:t>12</a:t>
+            </a:fld>
+            <a:endParaRPr lang="ko-KR" altLang="en-US">
+              <a:latin typeface="맑은 고딕" panose="020B0503020000020004" pitchFamily="50" charset="-127"/>
+              <a:ea typeface="맑은 고딕" panose="020B0503020000020004" pitchFamily="50" charset="-127"/>
+            </a:endParaRPr>
+          </a:p>
+        </p:txBody>
+      </p:sp>
+    </p:spTree>
+    <p:extLst>
+      <p:ext uri="{BB962C8B-B14F-4D97-AF65-F5344CB8AC3E}">
+        <p14:creationId xmlns:p14="http://schemas.microsoft.com/office/powerpoint/2010/main" val="3958799413"/>
+      </p:ext>
+    </p:extLst>
+  </p:cSld>
+  <p:clrMapOvr>
+    <a:masterClrMapping/>
+  </p:clrMapOvr>
+</p:notes>
+</file>
+
+<file path=ppt/notesSlides/notesSlide6.xml><?xml version="1.0" encoding="utf-8"?>
+<p:notes xmlns:a="http://schemas.openxmlformats.org/drawingml/2006/main" xmlns:r="http://schemas.openxmlformats.org/officeDocument/2006/relationships" xmlns:p="http://schemas.openxmlformats.org/presentationml/2006/main">
+  <p:cSld>
+    <p:spTree>
+      <p:nvGrpSpPr>
+        <p:cNvPr id="1" name="">
+          <a:extLst>
+            <a:ext uri="{FF2B5EF4-FFF2-40B4-BE49-F238E27FC236}">
+              <a16:creationId xmlns:a16="http://schemas.microsoft.com/office/drawing/2014/main" id="{E16A1DFF-B1CB-D074-2A32-2BEB0E50777A}"/>
+            </a:ext>
+          </a:extLst>
+        </p:cNvPr>
+        <p:cNvGrpSpPr/>
+        <p:nvPr/>
+      </p:nvGrpSpPr>
+      <p:grpSpPr>
+        <a:xfrm>
+          <a:off x="0" y="0"/>
+          <a:ext cx="0" cy="0"/>
+          <a:chOff x="0" y="0"/>
+          <a:chExt cx="0" cy="0"/>
+        </a:xfrm>
+      </p:grpSpPr>
+      <p:sp>
+        <p:nvSpPr>
+          <p:cNvPr id="2" name="슬라이드 이미지 개체 틀 1">
+            <a:extLst>
+              <a:ext uri="{FF2B5EF4-FFF2-40B4-BE49-F238E27FC236}">
+                <a16:creationId xmlns:a16="http://schemas.microsoft.com/office/drawing/2014/main" id="{8242E236-F301-84AA-346A-C49A97B645A7}"/>
+              </a:ext>
+            </a:extLst>
+          </p:cNvPr>
+          <p:cNvSpPr>
+            <a:spLocks noGrp="1" noRot="1" noChangeAspect="1"/>
+          </p:cNvSpPr>
+          <p:nvPr>
+            <p:ph type="sldImg"/>
+          </p:nvPr>
+        </p:nvSpPr>
+        <p:spPr/>
+      </p:sp>
+      <p:sp>
+        <p:nvSpPr>
+          <p:cNvPr id="3" name="슬라이드 노트 개체 틀 2">
+            <a:extLst>
+              <a:ext uri="{FF2B5EF4-FFF2-40B4-BE49-F238E27FC236}">
+                <a16:creationId xmlns:a16="http://schemas.microsoft.com/office/drawing/2014/main" id="{5C1BCC40-A8D7-89AD-154A-41A945C23551}"/>
+              </a:ext>
+            </a:extLst>
+          </p:cNvPr>
+          <p:cNvSpPr>
+            <a:spLocks noGrp="1"/>
+          </p:cNvSpPr>
+          <p:nvPr>
+            <p:ph type="body" idx="1"/>
+          </p:nvPr>
+        </p:nvSpPr>
+        <p:spPr/>
+        <p:txBody>
+          <a:bodyPr/>
+          <a:lstStyle/>
+          <a:p>
+            <a:endParaRPr lang="ko-KR" altLang="en-US">
+              <a:latin typeface="맑은 고딕" panose="020B0503020000020004" pitchFamily="50" charset="-127"/>
+              <a:ea typeface="맑은 고딕" panose="020B0503020000020004" pitchFamily="50" charset="-127"/>
+            </a:endParaRPr>
+          </a:p>
+        </p:txBody>
+      </p:sp>
+      <p:sp>
+        <p:nvSpPr>
+          <p:cNvPr id="4" name="슬라이드 번호 개체 틀 3">
+            <a:extLst>
+              <a:ext uri="{FF2B5EF4-FFF2-40B4-BE49-F238E27FC236}">
+                <a16:creationId xmlns:a16="http://schemas.microsoft.com/office/drawing/2014/main" id="{F3CE1682-0203-80CE-6796-B834EA3B129B}"/>
+              </a:ext>
+            </a:extLst>
+          </p:cNvPr>
+          <p:cNvSpPr>
+            <a:spLocks noGrp="1"/>
+          </p:cNvSpPr>
+          <p:nvPr>
+            <p:ph type="sldNum" sz="quarter" idx="5"/>
+          </p:nvPr>
+        </p:nvSpPr>
+        <p:spPr/>
+        <p:txBody>
+          <a:bodyPr/>
+          <a:lstStyle/>
+          <a:p>
+            <a:pPr rtl="0"/>
+            <a:fld id="{DF61EA0F-A667-4B49-8422-0062BC55E249}" type="slidenum">
+              <a:rPr lang="en-US" altLang="ko-KR" smtClean="0">
+                <a:latin typeface="맑은 고딕" panose="020B0503020000020004" pitchFamily="50" charset="-127"/>
+                <a:ea typeface="맑은 고딕" panose="020B0503020000020004" pitchFamily="50" charset="-127"/>
+              </a:rPr>
+              <a:t>13</a:t>
+            </a:fld>
+            <a:endParaRPr lang="ko-KR" altLang="en-US">
+              <a:latin typeface="맑은 고딕" panose="020B0503020000020004" pitchFamily="50" charset="-127"/>
+              <a:ea typeface="맑은 고딕" panose="020B0503020000020004" pitchFamily="50" charset="-127"/>
+            </a:endParaRPr>
+          </a:p>
+        </p:txBody>
+      </p:sp>
+    </p:spTree>
+    <p:extLst>
+      <p:ext uri="{BB962C8B-B14F-4D97-AF65-F5344CB8AC3E}">
+        <p14:creationId xmlns:p14="http://schemas.microsoft.com/office/powerpoint/2010/main" val="4051036205"/>
+      </p:ext>
+    </p:extLst>
+  </p:cSld>
+  <p:clrMapOvr>
+    <a:masterClrMapping/>
+  </p:clrMapOvr>
+</p:notes>
+</file>
+
+<file path=ppt/notesSlides/notesSlide7.xml><?xml version="1.0" encoding="utf-8"?>
+<p:notes xmlns:a="http://schemas.openxmlformats.org/drawingml/2006/main" xmlns:r="http://schemas.openxmlformats.org/officeDocument/2006/relationships" xmlns:p="http://schemas.openxmlformats.org/presentationml/2006/main">
+  <p:cSld>
+    <p:spTree>
+      <p:nvGrpSpPr>
+        <p:cNvPr id="1" name="">
+          <a:extLst>
+            <a:ext uri="{FF2B5EF4-FFF2-40B4-BE49-F238E27FC236}">
+              <a16:creationId xmlns:a16="http://schemas.microsoft.com/office/drawing/2014/main" id="{6E6E415E-8B44-1DBF-87D1-383CE6FF6EA6}"/>
+            </a:ext>
+          </a:extLst>
+        </p:cNvPr>
+        <p:cNvGrpSpPr/>
+        <p:nvPr/>
+      </p:nvGrpSpPr>
+      <p:grpSpPr>
+        <a:xfrm>
+          <a:off x="0" y="0"/>
+          <a:ext cx="0" cy="0"/>
+          <a:chOff x="0" y="0"/>
+          <a:chExt cx="0" cy="0"/>
+        </a:xfrm>
+      </p:grpSpPr>
+      <p:sp>
+        <p:nvSpPr>
+          <p:cNvPr id="2" name="슬라이드 이미지 개체 틀 1">
+            <a:extLst>
+              <a:ext uri="{FF2B5EF4-FFF2-40B4-BE49-F238E27FC236}">
+                <a16:creationId xmlns:a16="http://schemas.microsoft.com/office/drawing/2014/main" id="{751726C8-A4CA-4791-A278-2B3BDC1EF95F}"/>
+              </a:ext>
+            </a:extLst>
+          </p:cNvPr>
+          <p:cNvSpPr>
+            <a:spLocks noGrp="1" noRot="1" noChangeAspect="1"/>
+          </p:cNvSpPr>
+          <p:nvPr>
+            <p:ph type="sldImg"/>
+          </p:nvPr>
+        </p:nvSpPr>
+        <p:spPr/>
+      </p:sp>
+      <p:sp>
+        <p:nvSpPr>
+          <p:cNvPr id="3" name="슬라이드 노트 개체 틀 2">
+            <a:extLst>
+              <a:ext uri="{FF2B5EF4-FFF2-40B4-BE49-F238E27FC236}">
+                <a16:creationId xmlns:a16="http://schemas.microsoft.com/office/drawing/2014/main" id="{DC3E6F32-BACA-53F1-947F-3723994FD927}"/>
+              </a:ext>
+            </a:extLst>
+          </p:cNvPr>
+          <p:cNvSpPr>
+            <a:spLocks noGrp="1"/>
+          </p:cNvSpPr>
+          <p:nvPr>
+            <p:ph type="body" idx="1"/>
+          </p:nvPr>
+        </p:nvSpPr>
+        <p:spPr/>
+        <p:txBody>
+          <a:bodyPr/>
+          <a:lstStyle/>
+          <a:p>
+            <a:endParaRPr lang="ko-KR" altLang="en-US">
+              <a:latin typeface="맑은 고딕" panose="020B0503020000020004" pitchFamily="50" charset="-127"/>
+              <a:ea typeface="맑은 고딕" panose="020B0503020000020004" pitchFamily="50" charset="-127"/>
+            </a:endParaRPr>
+          </a:p>
+        </p:txBody>
+      </p:sp>
+      <p:sp>
+        <p:nvSpPr>
+          <p:cNvPr id="4" name="슬라이드 번호 개체 틀 3">
+            <a:extLst>
+              <a:ext uri="{FF2B5EF4-FFF2-40B4-BE49-F238E27FC236}">
+                <a16:creationId xmlns:a16="http://schemas.microsoft.com/office/drawing/2014/main" id="{7D5F70F2-B462-852F-2EAA-C77B092D5E5C}"/>
+              </a:ext>
+            </a:extLst>
+          </p:cNvPr>
+          <p:cNvSpPr>
+            <a:spLocks noGrp="1"/>
+          </p:cNvSpPr>
+          <p:nvPr>
+            <p:ph type="sldNum" sz="quarter" idx="5"/>
+          </p:nvPr>
+        </p:nvSpPr>
+        <p:spPr/>
+        <p:txBody>
+          <a:bodyPr/>
+          <a:lstStyle/>
+          <a:p>
+            <a:pPr rtl="0"/>
+            <a:fld id="{DF61EA0F-A667-4B49-8422-0062BC55E249}" type="slidenum">
+              <a:rPr lang="en-US" altLang="ko-KR" smtClean="0">
+                <a:latin typeface="맑은 고딕" panose="020B0503020000020004" pitchFamily="50" charset="-127"/>
+                <a:ea typeface="맑은 고딕" panose="020B0503020000020004" pitchFamily="50" charset="-127"/>
+              </a:rPr>
+              <a:t>14</a:t>
+            </a:fld>
+            <a:endParaRPr lang="ko-KR" altLang="en-US">
+              <a:latin typeface="맑은 고딕" panose="020B0503020000020004" pitchFamily="50" charset="-127"/>
+              <a:ea typeface="맑은 고딕" panose="020B0503020000020004" pitchFamily="50" charset="-127"/>
+            </a:endParaRPr>
+          </a:p>
+        </p:txBody>
+      </p:sp>
+    </p:spTree>
+    <p:extLst>
+      <p:ext uri="{BB962C8B-B14F-4D97-AF65-F5344CB8AC3E}">
+        <p14:creationId xmlns:p14="http://schemas.microsoft.com/office/powerpoint/2010/main" val="3333046899"/>
+      </p:ext>
+    </p:extLst>
+  </p:cSld>
+  <p:clrMapOvr>
+    <a:masterClrMapping/>
+  </p:clrMapOvr>
+</p:notes>
+</file>
+
+<file path=ppt/notesSlides/notesSlide8.xml><?xml version="1.0" encoding="utf-8"?>
+<p:notes xmlns:a="http://schemas.openxmlformats.org/drawingml/2006/main" xmlns:r="http://schemas.openxmlformats.org/officeDocument/2006/relationships" xmlns:p="http://schemas.openxmlformats.org/presentationml/2006/main">
+  <p:cSld>
+    <p:spTree>
+      <p:nvGrpSpPr>
+        <p:cNvPr id="1" name="">
+          <a:extLst>
+            <a:ext uri="{FF2B5EF4-FFF2-40B4-BE49-F238E27FC236}">
               <a16:creationId xmlns:a16="http://schemas.microsoft.com/office/drawing/2014/main" id="{E8E717C5-BD86-E7FB-D920-0A8D4B59830A}"/>
             </a:ext>
           </a:extLst>
@@ -1076,7 +1690,7 @@
                 <a:latin typeface="맑은 고딕" panose="020B0503020000020004" pitchFamily="50" charset="-127"/>
                 <a:ea typeface="맑은 고딕" panose="020B0503020000020004" pitchFamily="50" charset="-127"/>
               </a:rPr>
-              <a:t>7</a:t>
+              <a:t>15</a:t>
             </a:fld>
             <a:endParaRPr lang="ko-KR" altLang="en-US">
               <a:latin typeface="맑은 고딕" panose="020B0503020000020004" pitchFamily="50" charset="-127"/>
@@ -1098,7 +1712,7 @@
 </p:notes>
 </file>
 
-<file path=ppt/notesSlides/notesSlide4.xml><?xml version="1.0" encoding="utf-8"?>
+<file path=ppt/notesSlides/notesSlide9.xml><?xml version="1.0" encoding="utf-8"?>
 <p:notes xmlns:a="http://schemas.openxmlformats.org/drawingml/2006/main" xmlns:r="http://schemas.openxmlformats.org/officeDocument/2006/relationships" xmlns:p="http://schemas.openxmlformats.org/presentationml/2006/main">
   <p:cSld>
     <p:spTree>
@@ -1200,7 +1814,7 @@
                 <a:latin typeface="맑은 고딕" panose="020B0503020000020004" pitchFamily="50" charset="-127"/>
                 <a:ea typeface="맑은 고딕" panose="020B0503020000020004" pitchFamily="50" charset="-127"/>
               </a:rPr>
-              <a:t>12</a:t>
+              <a:t>20</a:t>
             </a:fld>
             <a:endParaRPr lang="ko-KR" altLang="en-US">
               <a:latin typeface="맑은 고딕" panose="020B0503020000020004" pitchFamily="50" charset="-127"/>
@@ -3446,6 +4060,1982 @@
         <p:cNvPr id="1" name="">
           <a:extLst>
             <a:ext uri="{FF2B5EF4-FFF2-40B4-BE49-F238E27FC236}">
+              <a16:creationId xmlns:a16="http://schemas.microsoft.com/office/drawing/2014/main" id="{BF94D45F-9959-C2FE-BCFE-D047BCAF299A}"/>
+            </a:ext>
+          </a:extLst>
+        </p:cNvPr>
+        <p:cNvGrpSpPr/>
+        <p:nvPr/>
+      </p:nvGrpSpPr>
+      <p:grpSpPr>
+        <a:xfrm>
+          <a:off x="0" y="0"/>
+          <a:ext cx="0" cy="0"/>
+          <a:chOff x="0" y="0"/>
+          <a:chExt cx="0" cy="0"/>
+        </a:xfrm>
+      </p:grpSpPr>
+      <p:sp>
+        <p:nvSpPr>
+          <p:cNvPr id="4" name="슬라이드 번호 개체 틀 3">
+            <a:extLst>
+              <a:ext uri="{FF2B5EF4-FFF2-40B4-BE49-F238E27FC236}">
+                <a16:creationId xmlns:a16="http://schemas.microsoft.com/office/drawing/2014/main" id="{FC5AFD0A-085C-5BB2-80E4-F468D2675C4E}"/>
+              </a:ext>
+            </a:extLst>
+          </p:cNvPr>
+          <p:cNvSpPr>
+            <a:spLocks noGrp="1"/>
+          </p:cNvSpPr>
+          <p:nvPr>
+            <p:ph type="sldNum" sz="quarter" idx="12"/>
+          </p:nvPr>
+        </p:nvSpPr>
+        <p:spPr>
+          <a:xfrm>
+            <a:off x="10514011" y="6036261"/>
+            <a:ext cx="753545" cy="365125"/>
+          </a:xfrm>
+        </p:spPr>
+        <p:txBody>
+          <a:bodyPr/>
+          <a:lstStyle/>
+          <a:p>
+            <a:fld id="{D57F1E4F-1CFF-5643-939E-217C01CDF565}" type="slidenum">
+              <a:rPr lang="en-US" smtClean="0"/>
+              <a:pPr/>
+              <a:t>10</a:t>
+            </a:fld>
+            <a:endParaRPr lang="en-US" dirty="0"/>
+          </a:p>
+        </p:txBody>
+      </p:sp>
+      <p:pic>
+        <p:nvPicPr>
+          <p:cNvPr id="2052" name="Picture 4">
+            <a:extLst>
+              <a:ext uri="{FF2B5EF4-FFF2-40B4-BE49-F238E27FC236}">
+                <a16:creationId xmlns:a16="http://schemas.microsoft.com/office/drawing/2014/main" id="{81BE5526-2A5D-5F05-FCBF-F9280260B2A6}"/>
+              </a:ext>
+            </a:extLst>
+          </p:cNvPr>
+          <p:cNvPicPr>
+            <a:picLocks noChangeAspect="1" noChangeArrowheads="1"/>
+          </p:cNvPicPr>
+          <p:nvPr/>
+        </p:nvPicPr>
+        <p:blipFill>
+          <a:blip r:embed="rId2">
+            <a:extLst>
+              <a:ext uri="{28A0092B-C50C-407E-A947-70E740481C1C}">
+                <a14:useLocalDpi xmlns:a14="http://schemas.microsoft.com/office/drawing/2010/main" val="0"/>
+              </a:ext>
+            </a:extLst>
+          </a:blip>
+          <a:srcRect/>
+          <a:stretch>
+            <a:fillRect/>
+          </a:stretch>
+        </p:blipFill>
+        <p:spPr bwMode="auto">
+          <a:xfrm>
+            <a:off x="1372554" y="1788322"/>
+            <a:ext cx="4544238" cy="4511467"/>
+          </a:xfrm>
+          <a:prstGeom prst="rect">
+            <a:avLst/>
+          </a:prstGeom>
+          <a:noFill/>
+          <a:extLst>
+            <a:ext uri="{909E8E84-426E-40DD-AFC4-6F175D3DCCD1}">
+              <a14:hiddenFill xmlns:a14="http://schemas.microsoft.com/office/drawing/2010/main">
+                <a:solidFill>
+                  <a:srgbClr val="FFFFFF"/>
+                </a:solidFill>
+              </a14:hiddenFill>
+            </a:ext>
+          </a:extLst>
+        </p:spPr>
+      </p:pic>
+      <p:grpSp>
+        <p:nvGrpSpPr>
+          <p:cNvPr id="12" name="그룹 11">
+            <a:extLst>
+              <a:ext uri="{FF2B5EF4-FFF2-40B4-BE49-F238E27FC236}">
+                <a16:creationId xmlns:a16="http://schemas.microsoft.com/office/drawing/2014/main" id="{5F853161-803E-81DB-419B-7773E6EAF298}"/>
+              </a:ext>
+            </a:extLst>
+          </p:cNvPr>
+          <p:cNvGrpSpPr/>
+          <p:nvPr/>
+        </p:nvGrpSpPr>
+        <p:grpSpPr>
+          <a:xfrm>
+            <a:off x="6827926" y="1788321"/>
+            <a:ext cx="3020924" cy="4247939"/>
+            <a:chOff x="9628030" y="2838154"/>
+            <a:chExt cx="2246046" cy="3638827"/>
+          </a:xfrm>
+        </p:grpSpPr>
+        <p:pic>
+          <p:nvPicPr>
+            <p:cNvPr id="7" name="그림 6">
+              <a:extLst>
+                <a:ext uri="{FF2B5EF4-FFF2-40B4-BE49-F238E27FC236}">
+                  <a16:creationId xmlns:a16="http://schemas.microsoft.com/office/drawing/2014/main" id="{BF7B7470-53A3-F586-A9A7-B3DFB8ADC6CD}"/>
+                </a:ext>
+              </a:extLst>
+            </p:cNvPr>
+            <p:cNvPicPr>
+              <a:picLocks noChangeAspect="1"/>
+            </p:cNvPicPr>
+            <p:nvPr/>
+          </p:nvPicPr>
+          <p:blipFill>
+            <a:blip r:embed="rId3"/>
+            <a:stretch>
+              <a:fillRect/>
+            </a:stretch>
+          </p:blipFill>
+          <p:spPr>
+            <a:xfrm>
+              <a:off x="9628030" y="2838154"/>
+              <a:ext cx="2246046" cy="1225431"/>
+            </a:xfrm>
+            <a:prstGeom prst="rect">
+              <a:avLst/>
+            </a:prstGeom>
+          </p:spPr>
+        </p:pic>
+        <p:pic>
+          <p:nvPicPr>
+            <p:cNvPr id="9" name="그림 8">
+              <a:extLst>
+                <a:ext uri="{FF2B5EF4-FFF2-40B4-BE49-F238E27FC236}">
+                  <a16:creationId xmlns:a16="http://schemas.microsoft.com/office/drawing/2014/main" id="{CA28C5B0-4392-9343-2622-9256EF1DEBBB}"/>
+                </a:ext>
+              </a:extLst>
+            </p:cNvPr>
+            <p:cNvPicPr>
+              <a:picLocks noChangeAspect="1"/>
+            </p:cNvPicPr>
+            <p:nvPr/>
+          </p:nvPicPr>
+          <p:blipFill>
+            <a:blip r:embed="rId4"/>
+            <a:stretch>
+              <a:fillRect/>
+            </a:stretch>
+          </p:blipFill>
+          <p:spPr>
+            <a:xfrm>
+              <a:off x="9628031" y="4060451"/>
+              <a:ext cx="2240700" cy="1204969"/>
+            </a:xfrm>
+            <a:prstGeom prst="rect">
+              <a:avLst/>
+            </a:prstGeom>
+          </p:spPr>
+        </p:pic>
+        <p:pic>
+          <p:nvPicPr>
+            <p:cNvPr id="11" name="그림 10">
+              <a:extLst>
+                <a:ext uri="{FF2B5EF4-FFF2-40B4-BE49-F238E27FC236}">
+                  <a16:creationId xmlns:a16="http://schemas.microsoft.com/office/drawing/2014/main" id="{1EB1DDEF-D8F2-AB6A-FF39-537D658F4DAC}"/>
+                </a:ext>
+              </a:extLst>
+            </p:cNvPr>
+            <p:cNvPicPr>
+              <a:picLocks noChangeAspect="1"/>
+            </p:cNvPicPr>
+            <p:nvPr/>
+          </p:nvPicPr>
+          <p:blipFill>
+            <a:blip r:embed="rId5"/>
+            <a:stretch>
+              <a:fillRect/>
+            </a:stretch>
+          </p:blipFill>
+          <p:spPr>
+            <a:xfrm>
+              <a:off x="9628782" y="5265420"/>
+              <a:ext cx="2240701" cy="1211561"/>
+            </a:xfrm>
+            <a:prstGeom prst="rect">
+              <a:avLst/>
+            </a:prstGeom>
+          </p:spPr>
+        </p:pic>
+      </p:grpSp>
+      <p:sp>
+        <p:nvSpPr>
+          <p:cNvPr id="8" name="제목 1">
+            <a:extLst>
+              <a:ext uri="{FF2B5EF4-FFF2-40B4-BE49-F238E27FC236}">
+                <a16:creationId xmlns:a16="http://schemas.microsoft.com/office/drawing/2014/main" id="{CF4A01C3-9D37-C424-A393-4795DCE2A307}"/>
+              </a:ext>
+            </a:extLst>
+          </p:cNvPr>
+          <p:cNvSpPr txBox="1">
+            <a:spLocks/>
+          </p:cNvSpPr>
+          <p:nvPr/>
+        </p:nvSpPr>
+        <p:spPr>
+          <a:xfrm>
+            <a:off x="475645" y="481983"/>
+            <a:ext cx="10353762" cy="766439"/>
+          </a:xfrm>
+          <a:prstGeom prst="rect">
+            <a:avLst/>
+          </a:prstGeom>
+        </p:spPr>
+        <p:txBody>
+          <a:bodyPr vert="horz" lIns="91440" tIns="45720" rIns="91440" bIns="45720" rtlCol="0" anchor="ctr">
+            <a:normAutofit/>
+          </a:bodyPr>
+          <a:lstStyle>
+            <a:lvl1pPr algn="ctr" defTabSz="914400" rtl="0" eaLnBrk="1" latinLnBrk="1" hangingPunct="1">
+              <a:lnSpc>
+                <a:spcPct val="90000"/>
+              </a:lnSpc>
+              <a:spcBef>
+                <a:spcPct val="0"/>
+              </a:spcBef>
+              <a:buNone/>
+              <a:defRPr sz="3200" kern="1200" cap="all" baseline="0">
+                <a:solidFill>
+                  <a:schemeClr val="tx1"/>
+                </a:solidFill>
+                <a:effectLst/>
+                <a:latin typeface="Batang" panose="02030600000101010101" pitchFamily="18" charset="-127"/>
+                <a:ea typeface="Batang" panose="02030600000101010101" pitchFamily="18" charset="-127"/>
+                <a:cs typeface="+mj-cs"/>
+              </a:defRPr>
+            </a:lvl1pPr>
+          </a:lstStyle>
+          <a:p>
+            <a:pPr algn="l"/>
+            <a:r>
+              <a:rPr lang="en-US" altLang="ko-KR" sz="2800" cap="none" dirty="0">
+                <a:solidFill>
+                  <a:schemeClr val="bg2">
+                    <a:lumMod val="25000"/>
+                  </a:schemeClr>
+                </a:solidFill>
+                <a:latin typeface="D2Coding" panose="020B0609020101020101" pitchFamily="49" charset="-127"/>
+                <a:ea typeface="D2Coding" panose="020B0609020101020101" pitchFamily="49" charset="-127"/>
+                <a:cs typeface="Segoe UI Light" panose="020B0502040204020203" pitchFamily="34" charset="0"/>
+              </a:rPr>
+              <a:t>Dimensionality Reduction</a:t>
+            </a:r>
+            <a:endParaRPr lang="ko-KR" altLang="en-US" sz="2800" cap="none" dirty="0">
+              <a:solidFill>
+                <a:schemeClr val="bg2">
+                  <a:lumMod val="25000"/>
+                </a:schemeClr>
+              </a:solidFill>
+              <a:latin typeface="D2Coding" panose="020B0609020101020101" pitchFamily="49" charset="-127"/>
+              <a:ea typeface="D2Coding" panose="020B0609020101020101" pitchFamily="49" charset="-127"/>
+              <a:cs typeface="Segoe UI Light" panose="020B0502040204020203" pitchFamily="34" charset="0"/>
+            </a:endParaRPr>
+          </a:p>
+        </p:txBody>
+      </p:sp>
+    </p:spTree>
+    <p:extLst>
+      <p:ext uri="{BB962C8B-B14F-4D97-AF65-F5344CB8AC3E}">
+        <p14:creationId xmlns:p14="http://schemas.microsoft.com/office/powerpoint/2010/main" val="2569447867"/>
+      </p:ext>
+    </p:extLst>
+  </p:cSld>
+  <p:clrMapOvr>
+    <a:masterClrMapping/>
+  </p:clrMapOvr>
+</p:sld>
+</file>
+
+<file path=ppt/slides/slide11.xml><?xml version="1.0" encoding="utf-8"?>
+<p:sld xmlns:a="http://schemas.openxmlformats.org/drawingml/2006/main" xmlns:r="http://schemas.openxmlformats.org/officeDocument/2006/relationships" xmlns:p="http://schemas.openxmlformats.org/presentationml/2006/main">
+  <p:cSld>
+    <p:spTree>
+      <p:nvGrpSpPr>
+        <p:cNvPr id="1" name="">
+          <a:extLst>
+            <a:ext uri="{FF2B5EF4-FFF2-40B4-BE49-F238E27FC236}">
+              <a16:creationId xmlns:a16="http://schemas.microsoft.com/office/drawing/2014/main" id="{B9CC6058-BCAC-5973-88B3-9937643CDF7E}"/>
+            </a:ext>
+          </a:extLst>
+        </p:cNvPr>
+        <p:cNvGrpSpPr/>
+        <p:nvPr/>
+      </p:nvGrpSpPr>
+      <p:grpSpPr>
+        <a:xfrm>
+          <a:off x="0" y="0"/>
+          <a:ext cx="0" cy="0"/>
+          <a:chOff x="0" y="0"/>
+          <a:chExt cx="0" cy="0"/>
+        </a:xfrm>
+      </p:grpSpPr>
+      <p:sp>
+        <p:nvSpPr>
+          <p:cNvPr id="4" name="제목 3">
+            <a:extLst>
+              <a:ext uri="{FF2B5EF4-FFF2-40B4-BE49-F238E27FC236}">
+                <a16:creationId xmlns:a16="http://schemas.microsoft.com/office/drawing/2014/main" id="{F1D1540C-C9B8-D40C-73EE-259E91537193}"/>
+              </a:ext>
+            </a:extLst>
+          </p:cNvPr>
+          <p:cNvSpPr>
+            <a:spLocks noGrp="1"/>
+          </p:cNvSpPr>
+          <p:nvPr>
+            <p:ph type="title"/>
+          </p:nvPr>
+        </p:nvSpPr>
+        <p:spPr>
+          <a:xfrm>
+            <a:off x="521207" y="448056"/>
+            <a:ext cx="9070468" cy="640080"/>
+          </a:xfrm>
+        </p:spPr>
+        <p:txBody>
+          <a:bodyPr rtlCol="0">
+            <a:normAutofit/>
+          </a:bodyPr>
+          <a:lstStyle/>
+          <a:p>
+            <a:r>
+              <a:rPr lang="en-US" altLang="ko-KR" dirty="0">
+                <a:latin typeface="D2Coding" panose="020B0609020101020101" pitchFamily="49" charset="-127"/>
+                <a:ea typeface="D2Coding" panose="020B0609020101020101" pitchFamily="49" charset="-127"/>
+                <a:cs typeface="Segoe UI Light" panose="020B0502040204020203" pitchFamily="34" charset="0"/>
+              </a:rPr>
+              <a:t>Principal component analysis (PCA) </a:t>
+            </a:r>
+            <a:endParaRPr lang="ko" altLang="en-US" dirty="0">
+              <a:latin typeface="D2Coding" panose="020B0609020101020101" pitchFamily="49" charset="-127"/>
+              <a:ea typeface="D2Coding" panose="020B0609020101020101" pitchFamily="49" charset="-127"/>
+              <a:cs typeface="Segoe UI Light" panose="020B0502040204020203" pitchFamily="34" charset="0"/>
+            </a:endParaRPr>
+          </a:p>
+        </p:txBody>
+      </p:sp>
+      <p:sp>
+        <p:nvSpPr>
+          <p:cNvPr id="2" name="슬라이드 번호 개체 틀 1">
+            <a:extLst>
+              <a:ext uri="{FF2B5EF4-FFF2-40B4-BE49-F238E27FC236}">
+                <a16:creationId xmlns:a16="http://schemas.microsoft.com/office/drawing/2014/main" id="{6D43EB65-3E9B-ECE8-23C1-24B298B14606}"/>
+              </a:ext>
+            </a:extLst>
+          </p:cNvPr>
+          <p:cNvSpPr>
+            <a:spLocks noGrp="1"/>
+          </p:cNvSpPr>
+          <p:nvPr>
+            <p:ph type="sldNum" sz="quarter" idx="4"/>
+          </p:nvPr>
+        </p:nvSpPr>
+        <p:spPr/>
+        <p:txBody>
+          <a:bodyPr/>
+          <a:lstStyle/>
+          <a:p>
+            <a:fld id="{9860EDB8-5305-433F-BE41-D7A86D811DB3}" type="slidenum">
+              <a:rPr lang="en-US" altLang="ko-KR" noProof="0" smtClean="0"/>
+              <a:pPr/>
+              <a:t>11</a:t>
+            </a:fld>
+            <a:endParaRPr lang="ko-KR" altLang="en-US" noProof="0"/>
+          </a:p>
+        </p:txBody>
+      </p:sp>
+      <p:pic>
+        <p:nvPicPr>
+          <p:cNvPr id="1026" name="Picture 2" descr="The original 3-dimensional data set. The red, blue, green arrows are the direction of the first, second, and third principal components, respectively. Image by the author.">
+            <a:extLst>
+              <a:ext uri="{FF2B5EF4-FFF2-40B4-BE49-F238E27FC236}">
+                <a16:creationId xmlns:a16="http://schemas.microsoft.com/office/drawing/2014/main" id="{FD5454AF-9D9D-C1F8-13C5-FB50F1510918}"/>
+              </a:ext>
+            </a:extLst>
+          </p:cNvPr>
+          <p:cNvPicPr>
+            <a:picLocks noChangeAspect="1" noChangeArrowheads="1"/>
+          </p:cNvPicPr>
+          <p:nvPr/>
+        </p:nvPicPr>
+        <p:blipFill>
+          <a:blip r:embed="rId3">
+            <a:extLst>
+              <a:ext uri="{28A0092B-C50C-407E-A947-70E740481C1C}">
+                <a14:useLocalDpi xmlns:a14="http://schemas.microsoft.com/office/drawing/2010/main" val="0"/>
+              </a:ext>
+            </a:extLst>
+          </a:blip>
+          <a:srcRect/>
+          <a:stretch>
+            <a:fillRect/>
+          </a:stretch>
+        </p:blipFill>
+        <p:spPr bwMode="auto">
+          <a:xfrm>
+            <a:off x="1152525" y="2730092"/>
+            <a:ext cx="4371975" cy="3264310"/>
+          </a:xfrm>
+          <a:prstGeom prst="rect">
+            <a:avLst/>
+          </a:prstGeom>
+          <a:noFill/>
+          <a:extLst>
+            <a:ext uri="{909E8E84-426E-40DD-AFC4-6F175D3DCCD1}">
+              <a14:hiddenFill xmlns:a14="http://schemas.microsoft.com/office/drawing/2010/main">
+                <a:solidFill>
+                  <a:srgbClr val="FFFFFF"/>
+                </a:solidFill>
+              </a14:hiddenFill>
+            </a:ext>
+          </a:extLst>
+        </p:spPr>
+      </p:pic>
+      <p:pic>
+        <p:nvPicPr>
+          <p:cNvPr id="1028" name="Picture 4" descr="Scatterplot after PCA reduced from 3-dimensions to 2-dimensions. Image by the author.">
+            <a:extLst>
+              <a:ext uri="{FF2B5EF4-FFF2-40B4-BE49-F238E27FC236}">
+                <a16:creationId xmlns:a16="http://schemas.microsoft.com/office/drawing/2014/main" id="{FD1F97AF-8F47-3913-BD7E-049B0A55E8DB}"/>
+              </a:ext>
+            </a:extLst>
+          </p:cNvPr>
+          <p:cNvPicPr>
+            <a:picLocks noChangeAspect="1" noChangeArrowheads="1"/>
+          </p:cNvPicPr>
+          <p:nvPr/>
+        </p:nvPicPr>
+        <p:blipFill>
+          <a:blip r:embed="rId4">
+            <a:extLst>
+              <a:ext uri="{28A0092B-C50C-407E-A947-70E740481C1C}">
+                <a14:useLocalDpi xmlns:a14="http://schemas.microsoft.com/office/drawing/2010/main" val="0"/>
+              </a:ext>
+            </a:extLst>
+          </a:blip>
+          <a:srcRect/>
+          <a:stretch>
+            <a:fillRect/>
+          </a:stretch>
+        </p:blipFill>
+        <p:spPr bwMode="auto">
+          <a:xfrm>
+            <a:off x="5934074" y="2730093"/>
+            <a:ext cx="5230069" cy="3264309"/>
+          </a:xfrm>
+          <a:prstGeom prst="rect">
+            <a:avLst/>
+          </a:prstGeom>
+          <a:noFill/>
+          <a:extLst>
+            <a:ext uri="{909E8E84-426E-40DD-AFC4-6F175D3DCCD1}">
+              <a14:hiddenFill xmlns:a14="http://schemas.microsoft.com/office/drawing/2010/main">
+                <a:solidFill>
+                  <a:srgbClr val="FFFFFF"/>
+                </a:solidFill>
+              </a14:hiddenFill>
+            </a:ext>
+          </a:extLst>
+        </p:spPr>
+      </p:pic>
+      <p:sp>
+        <p:nvSpPr>
+          <p:cNvPr id="11" name="TextBox 10">
+            <a:extLst>
+              <a:ext uri="{FF2B5EF4-FFF2-40B4-BE49-F238E27FC236}">
+                <a16:creationId xmlns:a16="http://schemas.microsoft.com/office/drawing/2014/main" id="{9FC5D7F7-968B-3650-11E3-08E33038F536}"/>
+              </a:ext>
+            </a:extLst>
+          </p:cNvPr>
+          <p:cNvSpPr txBox="1"/>
+          <p:nvPr/>
+        </p:nvSpPr>
+        <p:spPr>
+          <a:xfrm>
+            <a:off x="521206" y="1219111"/>
+            <a:ext cx="10976311" cy="793166"/>
+          </a:xfrm>
+          <a:prstGeom prst="rect">
+            <a:avLst/>
+          </a:prstGeom>
+          <a:noFill/>
+        </p:spPr>
+        <p:txBody>
+          <a:bodyPr wrap="square">
+            <a:spAutoFit/>
+          </a:bodyPr>
+          <a:lstStyle/>
+          <a:p>
+            <a:pPr>
+              <a:lnSpc>
+                <a:spcPct val="150000"/>
+              </a:lnSpc>
+            </a:pPr>
+            <a:r>
+              <a:rPr lang="en-US" altLang="ko-KR" sz="1600" b="0" i="0" dirty="0">
+                <a:solidFill>
+                  <a:srgbClr val="2A2A2A"/>
+                </a:solidFill>
+                <a:effectLst/>
+                <a:latin typeface="D2Coding" panose="020B0609020101020101" pitchFamily="49" charset="-127"/>
+                <a:ea typeface="D2Coding" panose="020B0609020101020101" pitchFamily="49" charset="-127"/>
+                <a:cs typeface="맑은 고딕 Semilight" panose="020B0502040204020203" pitchFamily="50" charset="-127"/>
+              </a:rPr>
+              <a:t>The technique that transforms high-dimensions data into lower-dimensions while retaining as much information as possible.(</a:t>
+            </a:r>
+            <a:r>
+              <a:rPr lang="en-US" altLang="ko-KR" sz="1600" b="0" i="0" dirty="0">
+                <a:solidFill>
+                  <a:srgbClr val="2A2A2A"/>
+                </a:solidFill>
+                <a:effectLst/>
+                <a:latin typeface="D2Coding" panose="020B0609020101020101" pitchFamily="49" charset="-127"/>
+                <a:ea typeface="D2Coding" panose="020B0609020101020101" pitchFamily="49" charset="-127"/>
+                <a:cs typeface="맑은 고딕 Semilight" panose="020B0502040204020203" pitchFamily="50" charset="-127"/>
+                <a:hlinkClick r:id="rId5"/>
+              </a:rPr>
+              <a:t>principal-component-analysis</a:t>
+            </a:r>
+            <a:r>
+              <a:rPr lang="en-US" altLang="ko-KR" sz="1600" b="0" i="0" dirty="0">
+                <a:solidFill>
+                  <a:srgbClr val="2A2A2A"/>
+                </a:solidFill>
+                <a:effectLst/>
+                <a:latin typeface="D2Coding" panose="020B0609020101020101" pitchFamily="49" charset="-127"/>
+                <a:ea typeface="D2Coding" panose="020B0609020101020101" pitchFamily="49" charset="-127"/>
+                <a:cs typeface="맑은 고딕 Semilight" panose="020B0502040204020203" pitchFamily="50" charset="-127"/>
+              </a:rPr>
+              <a:t>, </a:t>
+            </a:r>
+            <a:r>
+              <a:rPr lang="en-US" altLang="ko-KR" sz="1600" dirty="0">
+                <a:latin typeface="D2Coding" panose="020B0609020101020101" pitchFamily="49" charset="-127"/>
+                <a:ea typeface="D2Coding" panose="020B0609020101020101" pitchFamily="49" charset="-127"/>
+              </a:rPr>
+              <a:t>(Data</a:t>
+            </a:r>
+            <a:r>
+              <a:rPr lang="ko-KR" altLang="en-US" sz="1600" dirty="0">
+                <a:latin typeface="D2Coding" panose="020B0609020101020101" pitchFamily="49" charset="-127"/>
+                <a:ea typeface="D2Coding" panose="020B0609020101020101" pitchFamily="49" charset="-127"/>
+              </a:rPr>
+              <a:t> </a:t>
+            </a:r>
+            <a:r>
+              <a:rPr lang="en-US" altLang="ko-KR" sz="1600" dirty="0">
+                <a:latin typeface="D2Coding" panose="020B0609020101020101" pitchFamily="49" charset="-127"/>
+                <a:ea typeface="D2Coding" panose="020B0609020101020101" pitchFamily="49" charset="-127"/>
+              </a:rPr>
+              <a:t>Science</a:t>
+            </a:r>
+            <a:r>
+              <a:rPr lang="ko-KR" altLang="en-US" sz="1600" dirty="0">
+                <a:latin typeface="D2Coding" panose="020B0609020101020101" pitchFamily="49" charset="-127"/>
+                <a:ea typeface="D2Coding" panose="020B0609020101020101" pitchFamily="49" charset="-127"/>
+              </a:rPr>
+              <a:t> </a:t>
+            </a:r>
+            <a:r>
+              <a:rPr lang="en-US" altLang="ko-KR" sz="1600" dirty="0">
+                <a:latin typeface="D2Coding" panose="020B0609020101020101" pitchFamily="49" charset="-127"/>
+                <a:ea typeface="D2Coding" panose="020B0609020101020101" pitchFamily="49" charset="-127"/>
+              </a:rPr>
+              <a:t>Handbook)</a:t>
+            </a:r>
+            <a:r>
+              <a:rPr lang="en-US" altLang="ko-KR" sz="1600" b="0" i="0" dirty="0">
+                <a:solidFill>
+                  <a:srgbClr val="2A2A2A"/>
+                </a:solidFill>
+                <a:effectLst/>
+                <a:latin typeface="D2Coding" panose="020B0609020101020101" pitchFamily="49" charset="-127"/>
+                <a:ea typeface="D2Coding" panose="020B0609020101020101" pitchFamily="49" charset="-127"/>
+                <a:cs typeface="맑은 고딕 Semilight" panose="020B0502040204020203" pitchFamily="50" charset="-127"/>
+              </a:rPr>
+              <a:t>)</a:t>
+            </a:r>
+            <a:endParaRPr lang="ko-KR" altLang="en-US" sz="1600" dirty="0">
+              <a:latin typeface="D2Coding" panose="020B0609020101020101" pitchFamily="49" charset="-127"/>
+              <a:ea typeface="D2Coding" panose="020B0609020101020101" pitchFamily="49" charset="-127"/>
+              <a:cs typeface="맑은 고딕 Semilight" panose="020B0502040204020203" pitchFamily="50" charset="-127"/>
+            </a:endParaRPr>
+          </a:p>
+        </p:txBody>
+      </p:sp>
+    </p:spTree>
+    <p:extLst>
+      <p:ext uri="{BB962C8B-B14F-4D97-AF65-F5344CB8AC3E}">
+        <p14:creationId xmlns:p14="http://schemas.microsoft.com/office/powerpoint/2010/main" val="2605897601"/>
+      </p:ext>
+    </p:extLst>
+  </p:cSld>
+  <p:clrMapOvr>
+    <a:masterClrMapping/>
+  </p:clrMapOvr>
+  <mc:AlternateContent xmlns:mc="http://schemas.openxmlformats.org/markup-compatibility/2006" xmlns:p14="http://schemas.microsoft.com/office/powerpoint/2010/main">
+    <mc:Choice Requires="p14">
+      <p:transition p14:dur="10"/>
+    </mc:Choice>
+    <mc:Fallback xmlns="">
+      <p:transition/>
+    </mc:Fallback>
+  </mc:AlternateContent>
+</p:sld>
+</file>
+
+<file path=ppt/slides/slide12.xml><?xml version="1.0" encoding="utf-8"?>
+<p:sld xmlns:a="http://schemas.openxmlformats.org/drawingml/2006/main" xmlns:r="http://schemas.openxmlformats.org/officeDocument/2006/relationships" xmlns:p="http://schemas.openxmlformats.org/presentationml/2006/main">
+  <p:cSld>
+    <p:spTree>
+      <p:nvGrpSpPr>
+        <p:cNvPr id="1" name="">
+          <a:extLst>
+            <a:ext uri="{FF2B5EF4-FFF2-40B4-BE49-F238E27FC236}">
+              <a16:creationId xmlns:a16="http://schemas.microsoft.com/office/drawing/2014/main" id="{6EE64FB8-06CD-73F2-EE18-4EB790B54191}"/>
+            </a:ext>
+          </a:extLst>
+        </p:cNvPr>
+        <p:cNvGrpSpPr/>
+        <p:nvPr/>
+      </p:nvGrpSpPr>
+      <p:grpSpPr>
+        <a:xfrm>
+          <a:off x="0" y="0"/>
+          <a:ext cx="0" cy="0"/>
+          <a:chOff x="0" y="0"/>
+          <a:chExt cx="0" cy="0"/>
+        </a:xfrm>
+      </p:grpSpPr>
+      <p:sp>
+        <p:nvSpPr>
+          <p:cNvPr id="4" name="제목 3">
+            <a:extLst>
+              <a:ext uri="{FF2B5EF4-FFF2-40B4-BE49-F238E27FC236}">
+                <a16:creationId xmlns:a16="http://schemas.microsoft.com/office/drawing/2014/main" id="{B9F695C8-63E7-901C-D60E-7603F7243624}"/>
+              </a:ext>
+            </a:extLst>
+          </p:cNvPr>
+          <p:cNvSpPr>
+            <a:spLocks noGrp="1"/>
+          </p:cNvSpPr>
+          <p:nvPr>
+            <p:ph type="title"/>
+          </p:nvPr>
+        </p:nvSpPr>
+        <p:spPr>
+          <a:xfrm>
+            <a:off x="521207" y="448056"/>
+            <a:ext cx="9070468" cy="640080"/>
+          </a:xfrm>
+        </p:spPr>
+        <p:txBody>
+          <a:bodyPr rtlCol="0">
+            <a:normAutofit/>
+          </a:bodyPr>
+          <a:lstStyle/>
+          <a:p>
+            <a:r>
+              <a:rPr lang="en-US" altLang="ko-KR" dirty="0">
+                <a:latin typeface="D2Coding" panose="020B0609020101020101" pitchFamily="49" charset="-127"/>
+                <a:ea typeface="D2Coding" panose="020B0609020101020101" pitchFamily="49" charset="-127"/>
+                <a:cs typeface="Segoe UI Light" panose="020B0502040204020203" pitchFamily="34" charset="0"/>
+              </a:rPr>
+              <a:t>Manifold Learning</a:t>
+            </a:r>
+            <a:endParaRPr lang="ko" altLang="en-US" dirty="0">
+              <a:latin typeface="D2Coding" panose="020B0609020101020101" pitchFamily="49" charset="-127"/>
+              <a:ea typeface="D2Coding" panose="020B0609020101020101" pitchFamily="49" charset="-127"/>
+              <a:cs typeface="Segoe UI Light" panose="020B0502040204020203" pitchFamily="34" charset="0"/>
+            </a:endParaRPr>
+          </a:p>
+        </p:txBody>
+      </p:sp>
+      <p:sp>
+        <p:nvSpPr>
+          <p:cNvPr id="2" name="슬라이드 번호 개체 틀 1">
+            <a:extLst>
+              <a:ext uri="{FF2B5EF4-FFF2-40B4-BE49-F238E27FC236}">
+                <a16:creationId xmlns:a16="http://schemas.microsoft.com/office/drawing/2014/main" id="{7FA446DE-BDBE-AEA7-C88C-26A4B5495DE8}"/>
+              </a:ext>
+            </a:extLst>
+          </p:cNvPr>
+          <p:cNvSpPr>
+            <a:spLocks noGrp="1"/>
+          </p:cNvSpPr>
+          <p:nvPr>
+            <p:ph type="sldNum" sz="quarter" idx="4"/>
+          </p:nvPr>
+        </p:nvSpPr>
+        <p:spPr/>
+        <p:txBody>
+          <a:bodyPr/>
+          <a:lstStyle/>
+          <a:p>
+            <a:fld id="{9860EDB8-5305-433F-BE41-D7A86D811DB3}" type="slidenum">
+              <a:rPr lang="en-US" altLang="ko-KR" noProof="0" smtClean="0"/>
+              <a:pPr/>
+              <a:t>12</a:t>
+            </a:fld>
+            <a:endParaRPr lang="ko-KR" altLang="en-US" noProof="0"/>
+          </a:p>
+        </p:txBody>
+      </p:sp>
+      <p:sp>
+        <p:nvSpPr>
+          <p:cNvPr id="3" name="AutoShape 2">
+            <a:extLst>
+              <a:ext uri="{FF2B5EF4-FFF2-40B4-BE49-F238E27FC236}">
+                <a16:creationId xmlns:a16="http://schemas.microsoft.com/office/drawing/2014/main" id="{3CD1ED1A-A8F4-98FA-6CB3-498DB0946CFD}"/>
+              </a:ext>
+            </a:extLst>
+          </p:cNvPr>
+          <p:cNvSpPr>
+            <a:spLocks noChangeAspect="1" noChangeArrowheads="1"/>
+          </p:cNvSpPr>
+          <p:nvPr/>
+        </p:nvSpPr>
+        <p:spPr bwMode="auto">
+          <a:xfrm>
+            <a:off x="5943600" y="3276600"/>
+            <a:ext cx="304800" cy="304800"/>
+          </a:xfrm>
+          <a:prstGeom prst="rect">
+            <a:avLst/>
+          </a:prstGeom>
+          <a:noFill/>
+          <a:extLst>
+            <a:ext uri="{909E8E84-426E-40DD-AFC4-6F175D3DCCD1}">
+              <a14:hiddenFill xmlns:a14="http://schemas.microsoft.com/office/drawing/2010/main">
+                <a:solidFill>
+                  <a:srgbClr val="FFFFFF"/>
+                </a:solidFill>
+              </a14:hiddenFill>
+            </a:ext>
+          </a:extLst>
+        </p:spPr>
+        <p:txBody>
+          <a:bodyPr vert="horz" wrap="square" lIns="91440" tIns="45720" rIns="91440" bIns="45720" numCol="1" anchor="t" anchorCtr="0" compatLnSpc="1">
+            <a:prstTxWarp prst="textNoShape">
+              <a:avLst/>
+            </a:prstTxWarp>
+          </a:bodyPr>
+          <a:lstStyle/>
+          <a:p>
+            <a:endParaRPr lang="ko-KR" altLang="en-US"/>
+          </a:p>
+        </p:txBody>
+      </p:sp>
+      <p:pic>
+        <p:nvPicPr>
+          <p:cNvPr id="7" name="그림 6">
+            <a:extLst>
+              <a:ext uri="{FF2B5EF4-FFF2-40B4-BE49-F238E27FC236}">
+                <a16:creationId xmlns:a16="http://schemas.microsoft.com/office/drawing/2014/main" id="{F36EBF0C-BEE1-1B68-10DE-567E58988AE2}"/>
+              </a:ext>
+            </a:extLst>
+          </p:cNvPr>
+          <p:cNvPicPr>
+            <a:picLocks noChangeAspect="1"/>
+          </p:cNvPicPr>
+          <p:nvPr/>
+        </p:nvPicPr>
+        <p:blipFill>
+          <a:blip r:embed="rId3"/>
+          <a:stretch>
+            <a:fillRect/>
+          </a:stretch>
+        </p:blipFill>
+        <p:spPr>
+          <a:xfrm>
+            <a:off x="3076327" y="1700432"/>
+            <a:ext cx="5191843" cy="4894178"/>
+          </a:xfrm>
+          <a:prstGeom prst="rect">
+            <a:avLst/>
+          </a:prstGeom>
+        </p:spPr>
+      </p:pic>
+      <p:sp>
+        <p:nvSpPr>
+          <p:cNvPr id="8" name="TextBox 7">
+            <a:extLst>
+              <a:ext uri="{FF2B5EF4-FFF2-40B4-BE49-F238E27FC236}">
+                <a16:creationId xmlns:a16="http://schemas.microsoft.com/office/drawing/2014/main" id="{8F8A9347-2C1F-279B-77B4-3E8257F3AD5E}"/>
+              </a:ext>
+            </a:extLst>
+          </p:cNvPr>
+          <p:cNvSpPr txBox="1"/>
+          <p:nvPr/>
+        </p:nvSpPr>
+        <p:spPr>
+          <a:xfrm>
+            <a:off x="628650" y="1331100"/>
+            <a:ext cx="4916731" cy="369332"/>
+          </a:xfrm>
+          <a:prstGeom prst="rect">
+            <a:avLst/>
+          </a:prstGeom>
+          <a:noFill/>
+        </p:spPr>
+        <p:txBody>
+          <a:bodyPr wrap="none" rtlCol="0">
+            <a:spAutoFit/>
+          </a:bodyPr>
+          <a:lstStyle/>
+          <a:p>
+            <a:r>
+              <a:rPr lang="en-US" altLang="ko-KR" dirty="0">
+                <a:latin typeface="D2Coding" panose="020B0609020101020101" pitchFamily="49" charset="-127"/>
+                <a:ea typeface="D2Coding" panose="020B0609020101020101" pitchFamily="49" charset="-127"/>
+                <a:hlinkClick r:id="rId4"/>
+              </a:rPr>
+              <a:t>manifold-learning</a:t>
+            </a:r>
+            <a:r>
+              <a:rPr lang="en-US" altLang="ko-KR" dirty="0">
+                <a:latin typeface="D2Coding" panose="020B0609020101020101" pitchFamily="49" charset="-127"/>
+                <a:ea typeface="D2Coding" panose="020B0609020101020101" pitchFamily="49" charset="-127"/>
+              </a:rPr>
+              <a:t> (Data</a:t>
+            </a:r>
+            <a:r>
+              <a:rPr lang="ko-KR" altLang="en-US" dirty="0">
+                <a:latin typeface="D2Coding" panose="020B0609020101020101" pitchFamily="49" charset="-127"/>
+                <a:ea typeface="D2Coding" panose="020B0609020101020101" pitchFamily="49" charset="-127"/>
+              </a:rPr>
+              <a:t> </a:t>
+            </a:r>
+            <a:r>
+              <a:rPr lang="en-US" altLang="ko-KR" dirty="0">
+                <a:latin typeface="D2Coding" panose="020B0609020101020101" pitchFamily="49" charset="-127"/>
+                <a:ea typeface="D2Coding" panose="020B0609020101020101" pitchFamily="49" charset="-127"/>
+              </a:rPr>
+              <a:t>Science</a:t>
+            </a:r>
+            <a:r>
+              <a:rPr lang="ko-KR" altLang="en-US" dirty="0">
+                <a:latin typeface="D2Coding" panose="020B0609020101020101" pitchFamily="49" charset="-127"/>
+                <a:ea typeface="D2Coding" panose="020B0609020101020101" pitchFamily="49" charset="-127"/>
+              </a:rPr>
+              <a:t> </a:t>
+            </a:r>
+            <a:r>
+              <a:rPr lang="en-US" altLang="ko-KR" dirty="0">
+                <a:latin typeface="D2Coding" panose="020B0609020101020101" pitchFamily="49" charset="-127"/>
+                <a:ea typeface="D2Coding" panose="020B0609020101020101" pitchFamily="49" charset="-127"/>
+              </a:rPr>
+              <a:t>Handbook)</a:t>
+            </a:r>
+            <a:endParaRPr lang="ko-KR" altLang="en-US" dirty="0">
+              <a:latin typeface="D2Coding" panose="020B0609020101020101" pitchFamily="49" charset="-127"/>
+              <a:ea typeface="D2Coding" panose="020B0609020101020101" pitchFamily="49" charset="-127"/>
+            </a:endParaRPr>
+          </a:p>
+        </p:txBody>
+      </p:sp>
+    </p:spTree>
+    <p:extLst>
+      <p:ext uri="{BB962C8B-B14F-4D97-AF65-F5344CB8AC3E}">
+        <p14:creationId xmlns:p14="http://schemas.microsoft.com/office/powerpoint/2010/main" val="1857012415"/>
+      </p:ext>
+    </p:extLst>
+  </p:cSld>
+  <p:clrMapOvr>
+    <a:masterClrMapping/>
+  </p:clrMapOvr>
+  <mc:AlternateContent xmlns:mc="http://schemas.openxmlformats.org/markup-compatibility/2006" xmlns:p14="http://schemas.microsoft.com/office/powerpoint/2010/main">
+    <mc:Choice Requires="p14">
+      <p:transition p14:dur="10"/>
+    </mc:Choice>
+    <mc:Fallback xmlns="">
+      <p:transition/>
+    </mc:Fallback>
+  </mc:AlternateContent>
+</p:sld>
+</file>
+
+<file path=ppt/slides/slide13.xml><?xml version="1.0" encoding="utf-8"?>
+<p:sld xmlns:a="http://schemas.openxmlformats.org/drawingml/2006/main" xmlns:r="http://schemas.openxmlformats.org/officeDocument/2006/relationships" xmlns:p="http://schemas.openxmlformats.org/presentationml/2006/main">
+  <p:cSld>
+    <p:spTree>
+      <p:nvGrpSpPr>
+        <p:cNvPr id="1" name="">
+          <a:extLst>
+            <a:ext uri="{FF2B5EF4-FFF2-40B4-BE49-F238E27FC236}">
+              <a16:creationId xmlns:a16="http://schemas.microsoft.com/office/drawing/2014/main" id="{82531E9B-DC1C-C687-ACF2-C837C2EB09AB}"/>
+            </a:ext>
+          </a:extLst>
+        </p:cNvPr>
+        <p:cNvGrpSpPr/>
+        <p:nvPr/>
+      </p:nvGrpSpPr>
+      <p:grpSpPr>
+        <a:xfrm>
+          <a:off x="0" y="0"/>
+          <a:ext cx="0" cy="0"/>
+          <a:chOff x="0" y="0"/>
+          <a:chExt cx="0" cy="0"/>
+        </a:xfrm>
+      </p:grpSpPr>
+      <p:sp>
+        <p:nvSpPr>
+          <p:cNvPr id="4" name="제목 3">
+            <a:extLst>
+              <a:ext uri="{FF2B5EF4-FFF2-40B4-BE49-F238E27FC236}">
+                <a16:creationId xmlns:a16="http://schemas.microsoft.com/office/drawing/2014/main" id="{B352C18C-02FC-DB44-6C9C-E85E74559BAF}"/>
+              </a:ext>
+            </a:extLst>
+          </p:cNvPr>
+          <p:cNvSpPr>
+            <a:spLocks noGrp="1"/>
+          </p:cNvSpPr>
+          <p:nvPr>
+            <p:ph type="title"/>
+          </p:nvPr>
+        </p:nvSpPr>
+        <p:spPr>
+          <a:xfrm>
+            <a:off x="521207" y="448056"/>
+            <a:ext cx="11394568" cy="640080"/>
+          </a:xfrm>
+        </p:spPr>
+        <p:txBody>
+          <a:bodyPr rtlCol="0">
+            <a:noAutofit/>
+          </a:bodyPr>
+          <a:lstStyle/>
+          <a:p>
+            <a:pPr algn="l"/>
+            <a:r>
+              <a:rPr lang="en-US" altLang="ko-KR" dirty="0">
+                <a:latin typeface="D2Coding" panose="020B0609020101020101" pitchFamily="49" charset="-127"/>
+                <a:ea typeface="D2Coding" panose="020B0609020101020101" pitchFamily="49" charset="-127"/>
+                <a:cs typeface="Segoe UI Light" panose="020B0502040204020203" pitchFamily="34" charset="0"/>
+              </a:rPr>
+              <a:t>Compressing</a:t>
+            </a:r>
+            <a:r>
+              <a:rPr lang="ko-KR" altLang="en-US" dirty="0">
+                <a:latin typeface="D2Coding" panose="020B0609020101020101" pitchFamily="49" charset="-127"/>
+                <a:ea typeface="D2Coding" panose="020B0609020101020101" pitchFamily="49" charset="-127"/>
+                <a:cs typeface="Segoe UI Light" panose="020B0502040204020203" pitchFamily="34" charset="0"/>
+              </a:rPr>
+              <a:t> </a:t>
+            </a:r>
+            <a:r>
+              <a:rPr lang="en-US" altLang="ko-KR" dirty="0">
+                <a:latin typeface="D2Coding" panose="020B0609020101020101" pitchFamily="49" charset="-127"/>
+                <a:ea typeface="D2Coding" panose="020B0609020101020101" pitchFamily="49" charset="-127"/>
+                <a:cs typeface="Segoe UI Light" panose="020B0502040204020203" pitchFamily="34" charset="0"/>
+              </a:rPr>
+              <a:t>Images </a:t>
+            </a:r>
+            <a:r>
+              <a:rPr lang="en-US" altLang="ko-KR" sz="1800" dirty="0">
+                <a:latin typeface="D2Coding" panose="020B0609020101020101" pitchFamily="49" charset="-127"/>
+                <a:ea typeface="D2Coding" panose="020B0609020101020101" pitchFamily="49" charset="-127"/>
+                <a:cs typeface="Segoe UI Light" panose="020B0502040204020203" pitchFamily="34" charset="0"/>
+              </a:rPr>
+              <a:t>–</a:t>
+            </a:r>
+            <a:r>
+              <a:rPr lang="en-US" altLang="ko-KR" sz="1200" dirty="0">
+                <a:latin typeface="D2Coding" panose="020B0609020101020101" pitchFamily="49" charset="-127"/>
+                <a:ea typeface="D2Coding" panose="020B0609020101020101" pitchFamily="49" charset="-127"/>
+                <a:cs typeface="Segoe UI Light" panose="020B0502040204020203" pitchFamily="34" charset="0"/>
+              </a:rPr>
+              <a:t> </a:t>
+            </a:r>
+            <a:r>
+              <a:rPr lang="en-US" altLang="ko-KR" sz="1800" dirty="0">
+                <a:latin typeface="D2Coding" panose="020B0609020101020101" pitchFamily="49" charset="-127"/>
+                <a:ea typeface="D2Coding" panose="020B0609020101020101" pitchFamily="49" charset="-127"/>
+                <a:cs typeface="Segoe UI Light" panose="020B0502040204020203" pitchFamily="34" charset="0"/>
+              </a:rPr>
+              <a:t>Reducing rank by random choice of features</a:t>
+            </a:r>
+            <a:endParaRPr lang="ko" altLang="en-US" dirty="0">
+              <a:latin typeface="D2Coding" panose="020B0609020101020101" pitchFamily="49" charset="-127"/>
+              <a:ea typeface="D2Coding" panose="020B0609020101020101" pitchFamily="49" charset="-127"/>
+              <a:cs typeface="Segoe UI Light" panose="020B0502040204020203" pitchFamily="34" charset="0"/>
+            </a:endParaRPr>
+          </a:p>
+        </p:txBody>
+      </p:sp>
+      <p:sp>
+        <p:nvSpPr>
+          <p:cNvPr id="2" name="슬라이드 번호 개체 틀 1">
+            <a:extLst>
+              <a:ext uri="{FF2B5EF4-FFF2-40B4-BE49-F238E27FC236}">
+                <a16:creationId xmlns:a16="http://schemas.microsoft.com/office/drawing/2014/main" id="{D613EB8A-BEA6-A6CD-7C7A-09A826670BBD}"/>
+              </a:ext>
+            </a:extLst>
+          </p:cNvPr>
+          <p:cNvSpPr>
+            <a:spLocks noGrp="1"/>
+          </p:cNvSpPr>
+          <p:nvPr>
+            <p:ph type="sldNum" sz="quarter" idx="4"/>
+          </p:nvPr>
+        </p:nvSpPr>
+        <p:spPr/>
+        <p:txBody>
+          <a:bodyPr/>
+          <a:lstStyle/>
+          <a:p>
+            <a:fld id="{9860EDB8-5305-433F-BE41-D7A86D811DB3}" type="slidenum">
+              <a:rPr lang="en-US" altLang="ko-KR" noProof="0" smtClean="0"/>
+              <a:pPr/>
+              <a:t>13</a:t>
+            </a:fld>
+            <a:endParaRPr lang="ko-KR" altLang="en-US" noProof="0"/>
+          </a:p>
+        </p:txBody>
+      </p:sp>
+      <p:sp>
+        <p:nvSpPr>
+          <p:cNvPr id="6" name="TextBox 5">
+            <a:extLst>
+              <a:ext uri="{FF2B5EF4-FFF2-40B4-BE49-F238E27FC236}">
+                <a16:creationId xmlns:a16="http://schemas.microsoft.com/office/drawing/2014/main" id="{21188EFB-4524-4DD2-6EFA-8D2AC221E9D7}"/>
+              </a:ext>
+            </a:extLst>
+          </p:cNvPr>
+          <p:cNvSpPr txBox="1"/>
+          <p:nvPr/>
+        </p:nvSpPr>
+        <p:spPr>
+          <a:xfrm>
+            <a:off x="609600" y="1304243"/>
+            <a:ext cx="5486400" cy="279757"/>
+          </a:xfrm>
+          <a:prstGeom prst="rect">
+            <a:avLst/>
+          </a:prstGeom>
+          <a:noFill/>
+        </p:spPr>
+        <p:txBody>
+          <a:bodyPr wrap="square">
+            <a:spAutoFit/>
+          </a:bodyPr>
+          <a:lstStyle/>
+          <a:p>
+            <a:pPr>
+              <a:lnSpc>
+                <a:spcPts val="1575"/>
+              </a:lnSpc>
+              <a:buNone/>
+            </a:pPr>
+            <a:r>
+              <a:rPr lang="en-US" altLang="ko-KR" sz="1200" b="0" dirty="0" err="1">
+                <a:effectLst/>
+                <a:latin typeface="맑은 고딕 Semilight" panose="020B0502040204020203" pitchFamily="50" charset="-127"/>
+                <a:ea typeface="맑은 고딕 Semilight" panose="020B0502040204020203" pitchFamily="50" charset="-127"/>
+                <a:cs typeface="맑은 고딕 Semilight" panose="020B0502040204020203" pitchFamily="50" charset="-127"/>
+              </a:rPr>
+              <a:t>url</a:t>
+            </a:r>
+            <a:r>
+              <a:rPr lang="en-US" altLang="ko-KR" sz="1200" b="0" dirty="0">
+                <a:effectLst/>
+                <a:latin typeface="맑은 고딕 Semilight" panose="020B0502040204020203" pitchFamily="50" charset="-127"/>
+                <a:ea typeface="맑은 고딕 Semilight" panose="020B0502040204020203" pitchFamily="50" charset="-127"/>
+                <a:cs typeface="맑은 고딕 Semilight" panose="020B0502040204020203" pitchFamily="50" charset="-127"/>
+              </a:rPr>
+              <a:t> = "https://img.tf.co.kr/article/home/2025/07/22/202598011753169335.jpg"</a:t>
+            </a:r>
+          </a:p>
+        </p:txBody>
+      </p:sp>
+      <p:pic>
+        <p:nvPicPr>
+          <p:cNvPr id="11268" name="Picture 4">
+            <a:extLst>
+              <a:ext uri="{FF2B5EF4-FFF2-40B4-BE49-F238E27FC236}">
+                <a16:creationId xmlns:a16="http://schemas.microsoft.com/office/drawing/2014/main" id="{3173D52B-4178-8B02-04E4-68AA1DAE0D60}"/>
+              </a:ext>
+            </a:extLst>
+          </p:cNvPr>
+          <p:cNvPicPr>
+            <a:picLocks noChangeAspect="1" noChangeArrowheads="1"/>
+          </p:cNvPicPr>
+          <p:nvPr/>
+        </p:nvPicPr>
+        <p:blipFill>
+          <a:blip r:embed="rId3">
+            <a:extLst>
+              <a:ext uri="{28A0092B-C50C-407E-A947-70E740481C1C}">
+                <a14:useLocalDpi xmlns:a14="http://schemas.microsoft.com/office/drawing/2010/main" val="0"/>
+              </a:ext>
+            </a:extLst>
+          </a:blip>
+          <a:srcRect/>
+          <a:stretch>
+            <a:fillRect/>
+          </a:stretch>
+        </p:blipFill>
+        <p:spPr bwMode="auto">
+          <a:xfrm>
+            <a:off x="1228436" y="1800107"/>
+            <a:ext cx="8986982" cy="4869118"/>
+          </a:xfrm>
+          <a:prstGeom prst="rect">
+            <a:avLst/>
+          </a:prstGeom>
+          <a:noFill/>
+          <a:extLst>
+            <a:ext uri="{909E8E84-426E-40DD-AFC4-6F175D3DCCD1}">
+              <a14:hiddenFill xmlns:a14="http://schemas.microsoft.com/office/drawing/2010/main">
+                <a:solidFill>
+                  <a:srgbClr val="FFFFFF"/>
+                </a:solidFill>
+              </a14:hiddenFill>
+            </a:ext>
+          </a:extLst>
+        </p:spPr>
+      </p:pic>
+    </p:spTree>
+    <p:extLst>
+      <p:ext uri="{BB962C8B-B14F-4D97-AF65-F5344CB8AC3E}">
+        <p14:creationId xmlns:p14="http://schemas.microsoft.com/office/powerpoint/2010/main" val="2581876580"/>
+      </p:ext>
+    </p:extLst>
+  </p:cSld>
+  <p:clrMapOvr>
+    <a:masterClrMapping/>
+  </p:clrMapOvr>
+  <mc:AlternateContent xmlns:mc="http://schemas.openxmlformats.org/markup-compatibility/2006" xmlns:p14="http://schemas.microsoft.com/office/powerpoint/2010/main">
+    <mc:Choice Requires="p14">
+      <p:transition p14:dur="10"/>
+    </mc:Choice>
+    <mc:Fallback xmlns="">
+      <p:transition/>
+    </mc:Fallback>
+  </mc:AlternateContent>
+</p:sld>
+</file>
+
+<file path=ppt/slides/slide14.xml><?xml version="1.0" encoding="utf-8"?>
+<p:sld xmlns:a="http://schemas.openxmlformats.org/drawingml/2006/main" xmlns:r="http://schemas.openxmlformats.org/officeDocument/2006/relationships" xmlns:p="http://schemas.openxmlformats.org/presentationml/2006/main">
+  <p:cSld>
+    <p:spTree>
+      <p:nvGrpSpPr>
+        <p:cNvPr id="1" name="">
+          <a:extLst>
+            <a:ext uri="{FF2B5EF4-FFF2-40B4-BE49-F238E27FC236}">
+              <a16:creationId xmlns:a16="http://schemas.microsoft.com/office/drawing/2014/main" id="{5E1D481C-56DE-A303-2D4C-E12ED6DB109D}"/>
+            </a:ext>
+          </a:extLst>
+        </p:cNvPr>
+        <p:cNvGrpSpPr/>
+        <p:nvPr/>
+      </p:nvGrpSpPr>
+      <p:grpSpPr>
+        <a:xfrm>
+          <a:off x="0" y="0"/>
+          <a:ext cx="0" cy="0"/>
+          <a:chOff x="0" y="0"/>
+          <a:chExt cx="0" cy="0"/>
+        </a:xfrm>
+      </p:grpSpPr>
+      <p:sp>
+        <p:nvSpPr>
+          <p:cNvPr id="4" name="제목 3">
+            <a:extLst>
+              <a:ext uri="{FF2B5EF4-FFF2-40B4-BE49-F238E27FC236}">
+                <a16:creationId xmlns:a16="http://schemas.microsoft.com/office/drawing/2014/main" id="{EB6562AF-EDD3-7FD9-789C-A59F62BFA709}"/>
+              </a:ext>
+            </a:extLst>
+          </p:cNvPr>
+          <p:cNvSpPr>
+            <a:spLocks noGrp="1"/>
+          </p:cNvSpPr>
+          <p:nvPr>
+            <p:ph type="title"/>
+          </p:nvPr>
+        </p:nvSpPr>
+        <p:spPr>
+          <a:xfrm>
+            <a:off x="521207" y="448056"/>
+            <a:ext cx="9070468" cy="640080"/>
+          </a:xfrm>
+        </p:spPr>
+        <p:txBody>
+          <a:bodyPr rtlCol="0">
+            <a:normAutofit/>
+          </a:bodyPr>
+          <a:lstStyle/>
+          <a:p>
+            <a:pPr algn="l"/>
+            <a:r>
+              <a:rPr lang="en-US" altLang="ko-KR" cap="none" dirty="0">
+                <a:latin typeface="D2Coding" panose="020B0609020101020101" pitchFamily="49" charset="-127"/>
+                <a:ea typeface="D2Coding" panose="020B0609020101020101" pitchFamily="49" charset="-127"/>
+                <a:cs typeface="Segoe UI Light" panose="020B0502040204020203" pitchFamily="34" charset="0"/>
+              </a:rPr>
+              <a:t>Compressing</a:t>
+            </a:r>
+            <a:r>
+              <a:rPr lang="ko-KR" altLang="en-US" cap="none" dirty="0">
+                <a:latin typeface="D2Coding" panose="020B0609020101020101" pitchFamily="49" charset="-127"/>
+                <a:ea typeface="D2Coding" panose="020B0609020101020101" pitchFamily="49" charset="-127"/>
+                <a:cs typeface="Segoe UI Light" panose="020B0502040204020203" pitchFamily="34" charset="0"/>
+              </a:rPr>
+              <a:t> </a:t>
+            </a:r>
+            <a:r>
+              <a:rPr lang="en-US" altLang="ko-KR" cap="none" dirty="0">
+                <a:latin typeface="D2Coding" panose="020B0609020101020101" pitchFamily="49" charset="-127"/>
+                <a:ea typeface="D2Coding" panose="020B0609020101020101" pitchFamily="49" charset="-127"/>
+                <a:cs typeface="Segoe UI Light" panose="020B0502040204020203" pitchFamily="34" charset="0"/>
+              </a:rPr>
+              <a:t>Images </a:t>
+            </a:r>
+            <a:r>
+              <a:rPr lang="en-US" altLang="ko-KR" sz="1800" cap="none" dirty="0">
+                <a:latin typeface="D2Coding" panose="020B0609020101020101" pitchFamily="49" charset="-127"/>
+                <a:ea typeface="D2Coding" panose="020B0609020101020101" pitchFamily="49" charset="-127"/>
+                <a:cs typeface="Segoe UI Light" panose="020B0502040204020203" pitchFamily="34" charset="0"/>
+              </a:rPr>
+              <a:t>– Reducing rank by SVD, PCA</a:t>
+            </a:r>
+            <a:endParaRPr lang="ko" cap="none" dirty="0">
+              <a:latin typeface="D2Coding" panose="020B0609020101020101" pitchFamily="49" charset="-127"/>
+              <a:ea typeface="D2Coding" panose="020B0609020101020101" pitchFamily="49" charset="-127"/>
+              <a:cs typeface="Segoe UI Light" panose="020B0502040204020203" pitchFamily="34" charset="0"/>
+            </a:endParaRPr>
+          </a:p>
+        </p:txBody>
+      </p:sp>
+      <p:sp>
+        <p:nvSpPr>
+          <p:cNvPr id="2" name="슬라이드 번호 개체 틀 1">
+            <a:extLst>
+              <a:ext uri="{FF2B5EF4-FFF2-40B4-BE49-F238E27FC236}">
+                <a16:creationId xmlns:a16="http://schemas.microsoft.com/office/drawing/2014/main" id="{60C72ECB-26ED-AC43-69FC-B181EE6AD3E6}"/>
+              </a:ext>
+            </a:extLst>
+          </p:cNvPr>
+          <p:cNvSpPr>
+            <a:spLocks noGrp="1"/>
+          </p:cNvSpPr>
+          <p:nvPr>
+            <p:ph type="sldNum" sz="quarter" idx="4"/>
+          </p:nvPr>
+        </p:nvSpPr>
+        <p:spPr/>
+        <p:txBody>
+          <a:bodyPr/>
+          <a:lstStyle/>
+          <a:p>
+            <a:fld id="{9860EDB8-5305-433F-BE41-D7A86D811DB3}" type="slidenum">
+              <a:rPr lang="en-US" altLang="ko-KR" noProof="0" smtClean="0"/>
+              <a:pPr/>
+              <a:t>14</a:t>
+            </a:fld>
+            <a:endParaRPr lang="ko-KR" altLang="en-US" noProof="0"/>
+          </a:p>
+        </p:txBody>
+      </p:sp>
+      <p:pic>
+        <p:nvPicPr>
+          <p:cNvPr id="3" name="Picture 2">
+            <a:extLst>
+              <a:ext uri="{FF2B5EF4-FFF2-40B4-BE49-F238E27FC236}">
+                <a16:creationId xmlns:a16="http://schemas.microsoft.com/office/drawing/2014/main" id="{BC1EDBD8-B293-7B46-746E-84D1944B03A9}"/>
+              </a:ext>
+            </a:extLst>
+          </p:cNvPr>
+          <p:cNvPicPr>
+            <a:picLocks noChangeAspect="1" noChangeArrowheads="1"/>
+          </p:cNvPicPr>
+          <p:nvPr/>
+        </p:nvPicPr>
+        <p:blipFill>
+          <a:blip r:embed="rId3">
+            <a:extLst>
+              <a:ext uri="{28A0092B-C50C-407E-A947-70E740481C1C}">
+                <a14:useLocalDpi xmlns:a14="http://schemas.microsoft.com/office/drawing/2010/main" val="0"/>
+              </a:ext>
+            </a:extLst>
+          </a:blip>
+          <a:srcRect/>
+          <a:stretch>
+            <a:fillRect/>
+          </a:stretch>
+        </p:blipFill>
+        <p:spPr bwMode="auto">
+          <a:xfrm>
+            <a:off x="1348508" y="1820059"/>
+            <a:ext cx="8765310" cy="4749018"/>
+          </a:xfrm>
+          <a:prstGeom prst="rect">
+            <a:avLst/>
+          </a:prstGeom>
+          <a:noFill/>
+          <a:extLst>
+            <a:ext uri="{909E8E84-426E-40DD-AFC4-6F175D3DCCD1}">
+              <a14:hiddenFill xmlns:a14="http://schemas.microsoft.com/office/drawing/2010/main">
+                <a:solidFill>
+                  <a:srgbClr val="FFFFFF"/>
+                </a:solidFill>
+              </a14:hiddenFill>
+            </a:ext>
+          </a:extLst>
+        </p:spPr>
+      </p:pic>
+      <p:sp>
+        <p:nvSpPr>
+          <p:cNvPr id="5" name="TextBox 4">
+            <a:extLst>
+              <a:ext uri="{FF2B5EF4-FFF2-40B4-BE49-F238E27FC236}">
+                <a16:creationId xmlns:a16="http://schemas.microsoft.com/office/drawing/2014/main" id="{451210D5-7927-EB22-F5B4-C0811943D190}"/>
+              </a:ext>
+            </a:extLst>
+          </p:cNvPr>
+          <p:cNvSpPr txBox="1"/>
+          <p:nvPr/>
+        </p:nvSpPr>
+        <p:spPr>
+          <a:xfrm>
+            <a:off x="604333" y="1358737"/>
+            <a:ext cx="5724644" cy="369332"/>
+          </a:xfrm>
+          <a:prstGeom prst="rect">
+            <a:avLst/>
+          </a:prstGeom>
+          <a:noFill/>
+        </p:spPr>
+        <p:txBody>
+          <a:bodyPr wrap="none" rtlCol="0">
+            <a:spAutoFit/>
+          </a:bodyPr>
+          <a:lstStyle/>
+          <a:p>
+            <a:r>
+              <a:rPr lang="en-US" altLang="ko-KR" dirty="0">
+                <a:latin typeface="D2Coding" panose="020B0609020101020101" pitchFamily="49" charset="-127"/>
+                <a:ea typeface="D2Coding" panose="020B0609020101020101" pitchFamily="49" charset="-127"/>
+              </a:rPr>
+              <a:t>Rank </a:t>
+            </a:r>
+            <a:r>
+              <a:rPr lang="ko-KR" altLang="en-US" dirty="0">
+                <a:latin typeface="D2Coding" panose="020B0609020101020101" pitchFamily="49" charset="-127"/>
+                <a:ea typeface="D2Coding" panose="020B0609020101020101" pitchFamily="49" charset="-127"/>
+              </a:rPr>
+              <a:t>가 </a:t>
+            </a:r>
+            <a:r>
+              <a:rPr lang="en-US" altLang="ko-KR" dirty="0">
+                <a:latin typeface="D2Coding" panose="020B0609020101020101" pitchFamily="49" charset="-127"/>
+                <a:ea typeface="D2Coding" panose="020B0609020101020101" pitchFamily="49" charset="-127"/>
+              </a:rPr>
+              <a:t>30, 10, 5</a:t>
+            </a:r>
+            <a:r>
+              <a:rPr lang="ko-KR" altLang="en-US" dirty="0">
+                <a:latin typeface="D2Coding" panose="020B0609020101020101" pitchFamily="49" charset="-127"/>
+                <a:ea typeface="D2Coding" panose="020B0609020101020101" pitchFamily="49" charset="-127"/>
+              </a:rPr>
+              <a:t>인데도 </a:t>
+            </a:r>
+            <a:r>
+              <a:rPr lang="en-US" altLang="ko-KR" dirty="0">
+                <a:latin typeface="D2Coding" panose="020B0609020101020101" pitchFamily="49" charset="-127"/>
+                <a:ea typeface="D2Coding" panose="020B0609020101020101" pitchFamily="49" charset="-127"/>
+              </a:rPr>
+              <a:t>face </a:t>
+            </a:r>
+            <a:r>
+              <a:rPr lang="ko-KR" altLang="en-US" dirty="0">
+                <a:latin typeface="D2Coding" panose="020B0609020101020101" pitchFamily="49" charset="-127"/>
+                <a:ea typeface="D2Coding" panose="020B0609020101020101" pitchFamily="49" charset="-127"/>
+              </a:rPr>
+              <a:t>식별이 가능한 이유</a:t>
+            </a:r>
+            <a:r>
+              <a:rPr lang="en-US" altLang="ko-KR" dirty="0">
+                <a:latin typeface="D2Coding" panose="020B0609020101020101" pitchFamily="49" charset="-127"/>
+                <a:ea typeface="D2Coding" panose="020B0609020101020101" pitchFamily="49" charset="-127"/>
+              </a:rPr>
+              <a:t>?</a:t>
+            </a:r>
+            <a:endParaRPr lang="ko-KR" altLang="en-US" dirty="0">
+              <a:latin typeface="D2Coding" panose="020B0609020101020101" pitchFamily="49" charset="-127"/>
+              <a:ea typeface="D2Coding" panose="020B0609020101020101" pitchFamily="49" charset="-127"/>
+            </a:endParaRPr>
+          </a:p>
+        </p:txBody>
+      </p:sp>
+    </p:spTree>
+    <p:extLst>
+      <p:ext uri="{BB962C8B-B14F-4D97-AF65-F5344CB8AC3E}">
+        <p14:creationId xmlns:p14="http://schemas.microsoft.com/office/powerpoint/2010/main" val="1656759156"/>
+      </p:ext>
+    </p:extLst>
+  </p:cSld>
+  <p:clrMapOvr>
+    <a:masterClrMapping/>
+  </p:clrMapOvr>
+  <mc:AlternateContent xmlns:mc="http://schemas.openxmlformats.org/markup-compatibility/2006" xmlns:p14="http://schemas.microsoft.com/office/powerpoint/2010/main">
+    <mc:Choice Requires="p14">
+      <p:transition p14:dur="10"/>
+    </mc:Choice>
+    <mc:Fallback xmlns="">
+      <p:transition/>
+    </mc:Fallback>
+  </mc:AlternateContent>
+</p:sld>
+</file>
+
+<file path=ppt/slides/slide15.xml><?xml version="1.0" encoding="utf-8"?>
+<p:sld xmlns:a="http://schemas.openxmlformats.org/drawingml/2006/main" xmlns:r="http://schemas.openxmlformats.org/officeDocument/2006/relationships" xmlns:p="http://schemas.openxmlformats.org/presentationml/2006/main">
+  <p:cSld>
+    <p:spTree>
+      <p:nvGrpSpPr>
+        <p:cNvPr id="1" name="">
+          <a:extLst>
+            <a:ext uri="{FF2B5EF4-FFF2-40B4-BE49-F238E27FC236}">
+              <a16:creationId xmlns:a16="http://schemas.microsoft.com/office/drawing/2014/main" id="{448AE45B-DED7-1C98-3C49-D10799CCA495}"/>
+            </a:ext>
+          </a:extLst>
+        </p:cNvPr>
+        <p:cNvGrpSpPr/>
+        <p:nvPr/>
+      </p:nvGrpSpPr>
+      <p:grpSpPr>
+        <a:xfrm>
+          <a:off x="0" y="0"/>
+          <a:ext cx="0" cy="0"/>
+          <a:chOff x="0" y="0"/>
+          <a:chExt cx="0" cy="0"/>
+        </a:xfrm>
+      </p:grpSpPr>
+      <p:sp>
+        <p:nvSpPr>
+          <p:cNvPr id="2" name="제목 1">
+            <a:extLst>
+              <a:ext uri="{FF2B5EF4-FFF2-40B4-BE49-F238E27FC236}">
+                <a16:creationId xmlns:a16="http://schemas.microsoft.com/office/drawing/2014/main" id="{95E92FD1-6FA2-73C5-E656-2734EE17C2AF}"/>
+              </a:ext>
+            </a:extLst>
+          </p:cNvPr>
+          <p:cNvSpPr>
+            <a:spLocks noGrp="1"/>
+          </p:cNvSpPr>
+          <p:nvPr>
+            <p:ph type="ctrTitle"/>
+          </p:nvPr>
+        </p:nvSpPr>
+        <p:spPr>
+          <a:xfrm>
+            <a:off x="838199" y="1164324"/>
+            <a:ext cx="10934701" cy="2387600"/>
+          </a:xfrm>
+        </p:spPr>
+        <p:txBody>
+          <a:bodyPr rtlCol="0" anchor="ctr" anchorCtr="0">
+            <a:normAutofit/>
+          </a:bodyPr>
+          <a:lstStyle/>
+          <a:p>
+            <a:pPr>
+              <a:lnSpc>
+                <a:spcPct val="150000"/>
+              </a:lnSpc>
+            </a:pPr>
+            <a:r>
+              <a:rPr lang="en-US" altLang="ko-KR" sz="5400" dirty="0" err="1">
+                <a:solidFill>
+                  <a:schemeClr val="bg1"/>
+                </a:solidFill>
+                <a:latin typeface="D2Coding" panose="020B0609020101020101" pitchFamily="49" charset="-127"/>
+                <a:ea typeface="D2Coding" panose="020B0609020101020101" pitchFamily="49" charset="-127"/>
+              </a:rPr>
+              <a:t>AutoEncoder</a:t>
+            </a:r>
+            <a:endParaRPr lang="ko-KR" altLang="en-US" sz="4400" dirty="0">
+              <a:solidFill>
+                <a:schemeClr val="bg1"/>
+              </a:solidFill>
+              <a:latin typeface="D2Coding" panose="020B0609020101020101" pitchFamily="49" charset="-127"/>
+              <a:ea typeface="D2Coding" panose="020B0609020101020101" pitchFamily="49" charset="-127"/>
+            </a:endParaRPr>
+          </a:p>
+        </p:txBody>
+      </p:sp>
+    </p:spTree>
+    <p:extLst>
+      <p:ext uri="{BB962C8B-B14F-4D97-AF65-F5344CB8AC3E}">
+        <p14:creationId xmlns:p14="http://schemas.microsoft.com/office/powerpoint/2010/main" val="2375128833"/>
+      </p:ext>
+    </p:extLst>
+  </p:cSld>
+  <p:clrMapOvr>
+    <a:masterClrMapping/>
+  </p:clrMapOvr>
+</p:sld>
+</file>
+
+<file path=ppt/slides/slide16.xml><?xml version="1.0" encoding="utf-8"?>
+<p:sld xmlns:a="http://schemas.openxmlformats.org/drawingml/2006/main" xmlns:r="http://schemas.openxmlformats.org/officeDocument/2006/relationships" xmlns:p="http://schemas.openxmlformats.org/presentationml/2006/main">
+  <p:cSld>
+    <p:spTree>
+      <p:nvGrpSpPr>
+        <p:cNvPr id="1" name="">
+          <a:extLst>
+            <a:ext uri="{FF2B5EF4-FFF2-40B4-BE49-F238E27FC236}">
+              <a16:creationId xmlns:a16="http://schemas.microsoft.com/office/drawing/2014/main" id="{A5606F2B-CE90-D579-2B88-0A5E99C04A73}"/>
+            </a:ext>
+          </a:extLst>
+        </p:cNvPr>
+        <p:cNvGrpSpPr/>
+        <p:nvPr/>
+      </p:nvGrpSpPr>
+      <p:grpSpPr>
+        <a:xfrm>
+          <a:off x="0" y="0"/>
+          <a:ext cx="0" cy="0"/>
+          <a:chOff x="0" y="0"/>
+          <a:chExt cx="0" cy="0"/>
+        </a:xfrm>
+      </p:grpSpPr>
+      <p:sp>
+        <p:nvSpPr>
+          <p:cNvPr id="3" name="제목 1">
+            <a:extLst>
+              <a:ext uri="{FF2B5EF4-FFF2-40B4-BE49-F238E27FC236}">
+                <a16:creationId xmlns:a16="http://schemas.microsoft.com/office/drawing/2014/main" id="{9F8CA659-6149-EDE3-2FD5-523267A87FFD}"/>
+              </a:ext>
+            </a:extLst>
+          </p:cNvPr>
+          <p:cNvSpPr txBox="1">
+            <a:spLocks/>
+          </p:cNvSpPr>
+          <p:nvPr/>
+        </p:nvSpPr>
+        <p:spPr>
+          <a:xfrm>
+            <a:off x="475645" y="481983"/>
+            <a:ext cx="10353762" cy="766439"/>
+          </a:xfrm>
+          <a:prstGeom prst="rect">
+            <a:avLst/>
+          </a:prstGeom>
+        </p:spPr>
+        <p:txBody>
+          <a:bodyPr vert="horz" lIns="91440" tIns="45720" rIns="91440" bIns="45720" rtlCol="0" anchor="ctr">
+            <a:normAutofit/>
+          </a:bodyPr>
+          <a:lstStyle>
+            <a:lvl1pPr algn="ctr" defTabSz="914400" rtl="0" eaLnBrk="1" latinLnBrk="1" hangingPunct="1">
+              <a:lnSpc>
+                <a:spcPct val="90000"/>
+              </a:lnSpc>
+              <a:spcBef>
+                <a:spcPct val="0"/>
+              </a:spcBef>
+              <a:buNone/>
+              <a:defRPr sz="3200" kern="1200" cap="all" baseline="0">
+                <a:solidFill>
+                  <a:schemeClr val="tx1"/>
+                </a:solidFill>
+                <a:effectLst/>
+                <a:latin typeface="Batang" panose="02030600000101010101" pitchFamily="18" charset="-127"/>
+                <a:ea typeface="Batang" panose="02030600000101010101" pitchFamily="18" charset="-127"/>
+                <a:cs typeface="+mj-cs"/>
+              </a:defRPr>
+            </a:lvl1pPr>
+          </a:lstStyle>
+          <a:p>
+            <a:pPr algn="l"/>
+            <a:r>
+              <a:rPr lang="en-US" altLang="ko-KR" sz="2800" cap="none" dirty="0">
+                <a:solidFill>
+                  <a:schemeClr val="bg2">
+                    <a:lumMod val="25000"/>
+                  </a:schemeClr>
+                </a:solidFill>
+                <a:latin typeface="D2Coding" panose="020B0609020101020101" pitchFamily="49" charset="-127"/>
+                <a:ea typeface="D2Coding" panose="020B0609020101020101" pitchFamily="49" charset="-127"/>
+                <a:cs typeface="Segoe UI Light" panose="020B0502040204020203" pitchFamily="34" charset="0"/>
+              </a:rPr>
+              <a:t>Autoencoders </a:t>
+            </a:r>
+            <a:endParaRPr lang="ko-KR" altLang="en-US" sz="2800" cap="none" dirty="0">
+              <a:solidFill>
+                <a:schemeClr val="bg2">
+                  <a:lumMod val="25000"/>
+                </a:schemeClr>
+              </a:solidFill>
+              <a:latin typeface="D2Coding" panose="020B0609020101020101" pitchFamily="49" charset="-127"/>
+              <a:ea typeface="D2Coding" panose="020B0609020101020101" pitchFamily="49" charset="-127"/>
+              <a:cs typeface="Segoe UI Light" panose="020B0502040204020203" pitchFamily="34" charset="0"/>
+            </a:endParaRPr>
+          </a:p>
+        </p:txBody>
+      </p:sp>
+      <p:pic>
+        <p:nvPicPr>
+          <p:cNvPr id="2050" name="Picture 2">
+            <a:extLst>
+              <a:ext uri="{FF2B5EF4-FFF2-40B4-BE49-F238E27FC236}">
+                <a16:creationId xmlns:a16="http://schemas.microsoft.com/office/drawing/2014/main" id="{5EFE7053-F270-ACA7-0EE4-A7134C61EAAD}"/>
+              </a:ext>
+            </a:extLst>
+          </p:cNvPr>
+          <p:cNvPicPr>
+            <a:picLocks noChangeAspect="1" noChangeArrowheads="1"/>
+          </p:cNvPicPr>
+          <p:nvPr/>
+        </p:nvPicPr>
+        <p:blipFill>
+          <a:blip r:embed="rId2">
+            <a:extLst>
+              <a:ext uri="{28A0092B-C50C-407E-A947-70E740481C1C}">
+                <a14:useLocalDpi xmlns:a14="http://schemas.microsoft.com/office/drawing/2010/main" val="0"/>
+              </a:ext>
+            </a:extLst>
+          </a:blip>
+          <a:srcRect/>
+          <a:stretch>
+            <a:fillRect/>
+          </a:stretch>
+        </p:blipFill>
+        <p:spPr bwMode="auto">
+          <a:xfrm>
+            <a:off x="1524000" y="1808164"/>
+            <a:ext cx="8848725" cy="4122492"/>
+          </a:xfrm>
+          <a:prstGeom prst="rect">
+            <a:avLst/>
+          </a:prstGeom>
+          <a:noFill/>
+          <a:extLst>
+            <a:ext uri="{909E8E84-426E-40DD-AFC4-6F175D3DCCD1}">
+              <a14:hiddenFill xmlns:a14="http://schemas.microsoft.com/office/drawing/2010/main">
+                <a:solidFill>
+                  <a:srgbClr val="FFFFFF"/>
+                </a:solidFill>
+              </a14:hiddenFill>
+            </a:ext>
+          </a:extLst>
+        </p:spPr>
+      </p:pic>
+      <p:sp>
+        <p:nvSpPr>
+          <p:cNvPr id="4" name="TextBox 3">
+            <a:extLst>
+              <a:ext uri="{FF2B5EF4-FFF2-40B4-BE49-F238E27FC236}">
+                <a16:creationId xmlns:a16="http://schemas.microsoft.com/office/drawing/2014/main" id="{CE9417FF-04F4-0DD8-35F5-0BB01AE0AB91}"/>
+              </a:ext>
+            </a:extLst>
+          </p:cNvPr>
+          <p:cNvSpPr txBox="1"/>
+          <p:nvPr/>
+        </p:nvSpPr>
+        <p:spPr>
+          <a:xfrm>
+            <a:off x="1524000" y="6006685"/>
+            <a:ext cx="6096000" cy="307777"/>
+          </a:xfrm>
+          <a:prstGeom prst="rect">
+            <a:avLst/>
+          </a:prstGeom>
+          <a:noFill/>
+        </p:spPr>
+        <p:txBody>
+          <a:bodyPr wrap="square">
+            <a:spAutoFit/>
+          </a:bodyPr>
+          <a:lstStyle/>
+          <a:p>
+            <a:r>
+              <a:rPr lang="en-US" altLang="ko-KR" sz="1400" dirty="0">
+                <a:latin typeface="D2Coding" panose="020B0609020101020101" pitchFamily="49" charset="-127"/>
+                <a:ea typeface="D2Coding" panose="020B0609020101020101" pitchFamily="49" charset="-127"/>
+                <a:hlinkClick r:id="rId3"/>
+              </a:rPr>
+              <a:t>https://lilianweng.github.io/posts/2018-08-12-vae/</a:t>
+            </a:r>
+            <a:r>
+              <a:rPr lang="en-US" altLang="ko-KR" sz="1400" dirty="0">
+                <a:latin typeface="D2Coding" panose="020B0609020101020101" pitchFamily="49" charset="-127"/>
+                <a:ea typeface="D2Coding" panose="020B0609020101020101" pitchFamily="49" charset="-127"/>
+              </a:rPr>
+              <a:t> </a:t>
+            </a:r>
+            <a:endParaRPr lang="ko-KR" altLang="en-US" sz="1400" dirty="0">
+              <a:latin typeface="D2Coding" panose="020B0609020101020101" pitchFamily="49" charset="-127"/>
+              <a:ea typeface="D2Coding" panose="020B0609020101020101" pitchFamily="49" charset="-127"/>
+            </a:endParaRPr>
+          </a:p>
+        </p:txBody>
+      </p:sp>
+    </p:spTree>
+    <p:extLst>
+      <p:ext uri="{BB962C8B-B14F-4D97-AF65-F5344CB8AC3E}">
+        <p14:creationId xmlns:p14="http://schemas.microsoft.com/office/powerpoint/2010/main" val="2177943110"/>
+      </p:ext>
+    </p:extLst>
+  </p:cSld>
+  <p:clrMapOvr>
+    <a:masterClrMapping/>
+  </p:clrMapOvr>
+</p:sld>
+</file>
+
+<file path=ppt/slides/slide17.xml><?xml version="1.0" encoding="utf-8"?>
+<p:sld xmlns:a="http://schemas.openxmlformats.org/drawingml/2006/main" xmlns:r="http://schemas.openxmlformats.org/officeDocument/2006/relationships" xmlns:p="http://schemas.openxmlformats.org/presentationml/2006/main">
+  <p:cSld>
+    <p:spTree>
+      <p:nvGrpSpPr>
+        <p:cNvPr id="1" name="">
+          <a:extLst>
+            <a:ext uri="{FF2B5EF4-FFF2-40B4-BE49-F238E27FC236}">
+              <a16:creationId xmlns:a16="http://schemas.microsoft.com/office/drawing/2014/main" id="{5A5955C9-5FA3-824C-2018-F1AE5DBC28E1}"/>
+            </a:ext>
+          </a:extLst>
+        </p:cNvPr>
+        <p:cNvGrpSpPr/>
+        <p:nvPr/>
+      </p:nvGrpSpPr>
+      <p:grpSpPr>
+        <a:xfrm>
+          <a:off x="0" y="0"/>
+          <a:ext cx="0" cy="0"/>
+          <a:chOff x="0" y="0"/>
+          <a:chExt cx="0" cy="0"/>
+        </a:xfrm>
+      </p:grpSpPr>
+      <p:sp>
+        <p:nvSpPr>
+          <p:cNvPr id="3" name="제목 1">
+            <a:extLst>
+              <a:ext uri="{FF2B5EF4-FFF2-40B4-BE49-F238E27FC236}">
+                <a16:creationId xmlns:a16="http://schemas.microsoft.com/office/drawing/2014/main" id="{F92444F5-6D20-4CA4-41CD-0088D7CED387}"/>
+              </a:ext>
+            </a:extLst>
+          </p:cNvPr>
+          <p:cNvSpPr txBox="1">
+            <a:spLocks/>
+          </p:cNvSpPr>
+          <p:nvPr/>
+        </p:nvSpPr>
+        <p:spPr>
+          <a:xfrm>
+            <a:off x="475645" y="481983"/>
+            <a:ext cx="10353762" cy="766439"/>
+          </a:xfrm>
+          <a:prstGeom prst="rect">
+            <a:avLst/>
+          </a:prstGeom>
+        </p:spPr>
+        <p:txBody>
+          <a:bodyPr vert="horz" lIns="91440" tIns="45720" rIns="91440" bIns="45720" rtlCol="0" anchor="ctr">
+            <a:normAutofit/>
+          </a:bodyPr>
+          <a:lstStyle>
+            <a:lvl1pPr algn="ctr" defTabSz="914400" rtl="0" eaLnBrk="1" latinLnBrk="1" hangingPunct="1">
+              <a:lnSpc>
+                <a:spcPct val="90000"/>
+              </a:lnSpc>
+              <a:spcBef>
+                <a:spcPct val="0"/>
+              </a:spcBef>
+              <a:buNone/>
+              <a:defRPr sz="3200" kern="1200" cap="all" baseline="0">
+                <a:solidFill>
+                  <a:schemeClr val="tx1"/>
+                </a:solidFill>
+                <a:effectLst/>
+                <a:latin typeface="Batang" panose="02030600000101010101" pitchFamily="18" charset="-127"/>
+                <a:ea typeface="Batang" panose="02030600000101010101" pitchFamily="18" charset="-127"/>
+                <a:cs typeface="+mj-cs"/>
+              </a:defRPr>
+            </a:lvl1pPr>
+          </a:lstStyle>
+          <a:p>
+            <a:pPr algn="l"/>
+            <a:r>
+              <a:rPr lang="en-US" altLang="ko-KR" sz="2800" cap="none" dirty="0">
+                <a:solidFill>
+                  <a:schemeClr val="bg2">
+                    <a:lumMod val="25000"/>
+                  </a:schemeClr>
+                </a:solidFill>
+                <a:latin typeface="D2Coding" panose="020B0609020101020101" pitchFamily="49" charset="-127"/>
+                <a:ea typeface="D2Coding" panose="020B0609020101020101" pitchFamily="49" charset="-127"/>
+                <a:cs typeface="Segoe UI Light" panose="020B0502040204020203" pitchFamily="34" charset="0"/>
+              </a:rPr>
+              <a:t>Autoencoders </a:t>
+            </a:r>
+            <a:endParaRPr lang="ko-KR" altLang="en-US" sz="2800" cap="none" dirty="0">
+              <a:solidFill>
+                <a:schemeClr val="bg2">
+                  <a:lumMod val="25000"/>
+                </a:schemeClr>
+              </a:solidFill>
+              <a:latin typeface="D2Coding" panose="020B0609020101020101" pitchFamily="49" charset="-127"/>
+              <a:ea typeface="D2Coding" panose="020B0609020101020101" pitchFamily="49" charset="-127"/>
+              <a:cs typeface="Segoe UI Light" panose="020B0502040204020203" pitchFamily="34" charset="0"/>
+            </a:endParaRPr>
+          </a:p>
+        </p:txBody>
+      </p:sp>
+      <p:sp>
+        <p:nvSpPr>
+          <p:cNvPr id="4" name="TextBox 3">
+            <a:extLst>
+              <a:ext uri="{FF2B5EF4-FFF2-40B4-BE49-F238E27FC236}">
+                <a16:creationId xmlns:a16="http://schemas.microsoft.com/office/drawing/2014/main" id="{2F320060-A4EA-2828-D79C-3EE57139181F}"/>
+              </a:ext>
+            </a:extLst>
+          </p:cNvPr>
+          <p:cNvSpPr txBox="1"/>
+          <p:nvPr/>
+        </p:nvSpPr>
+        <p:spPr>
+          <a:xfrm>
+            <a:off x="2604526" y="6068240"/>
+            <a:ext cx="6096000" cy="307777"/>
+          </a:xfrm>
+          <a:prstGeom prst="rect">
+            <a:avLst/>
+          </a:prstGeom>
+          <a:noFill/>
+        </p:spPr>
+        <p:txBody>
+          <a:bodyPr wrap="square">
+            <a:spAutoFit/>
+          </a:bodyPr>
+          <a:lstStyle/>
+          <a:p>
+            <a:r>
+              <a:rPr lang="ko-KR" altLang="en-US" sz="1400" dirty="0">
+                <a:latin typeface="D2Coding" panose="020B0609020101020101" pitchFamily="49" charset="-127"/>
+                <a:ea typeface="D2Coding" panose="020B0609020101020101" pitchFamily="49" charset="-127"/>
+                <a:hlinkClick r:id="rId2"/>
+              </a:rPr>
+              <a:t>https://www.geeksforgeeks.org/deep-learning/types-of-autoencoders/</a:t>
+            </a:r>
+            <a:r>
+              <a:rPr lang="ko-KR" altLang="en-US" sz="1400" dirty="0">
+                <a:latin typeface="D2Coding" panose="020B0609020101020101" pitchFamily="49" charset="-127"/>
+                <a:ea typeface="D2Coding" panose="020B0609020101020101" pitchFamily="49" charset="-127"/>
+              </a:rPr>
+              <a:t> </a:t>
+            </a:r>
+          </a:p>
+        </p:txBody>
+      </p:sp>
+      <p:sp>
+        <p:nvSpPr>
+          <p:cNvPr id="5" name="AutoShape 2" descr="nueral">
+            <a:extLst>
+              <a:ext uri="{FF2B5EF4-FFF2-40B4-BE49-F238E27FC236}">
+                <a16:creationId xmlns:a16="http://schemas.microsoft.com/office/drawing/2014/main" id="{91714E5F-61DB-E17F-BC52-BE9F4E4401A3}"/>
+              </a:ext>
+            </a:extLst>
+          </p:cNvPr>
+          <p:cNvSpPr>
+            <a:spLocks noChangeAspect="1" noChangeArrowheads="1"/>
+          </p:cNvSpPr>
+          <p:nvPr/>
+        </p:nvSpPr>
+        <p:spPr bwMode="auto">
+          <a:xfrm>
+            <a:off x="5943600" y="3276600"/>
+            <a:ext cx="304800" cy="304800"/>
+          </a:xfrm>
+          <a:prstGeom prst="rect">
+            <a:avLst/>
+          </a:prstGeom>
+          <a:noFill/>
+          <a:extLst>
+            <a:ext uri="{909E8E84-426E-40DD-AFC4-6F175D3DCCD1}">
+              <a14:hiddenFill xmlns:a14="http://schemas.microsoft.com/office/drawing/2010/main">
+                <a:solidFill>
+                  <a:srgbClr val="FFFFFF"/>
+                </a:solidFill>
+              </a14:hiddenFill>
+            </a:ext>
+          </a:extLst>
+        </p:spPr>
+        <p:txBody>
+          <a:bodyPr vert="horz" wrap="square" lIns="91440" tIns="45720" rIns="91440" bIns="45720" numCol="1" anchor="t" anchorCtr="0" compatLnSpc="1">
+            <a:prstTxWarp prst="textNoShape">
+              <a:avLst/>
+            </a:prstTxWarp>
+          </a:bodyPr>
+          <a:lstStyle/>
+          <a:p>
+            <a:endParaRPr lang="ko-KR" altLang="en-US"/>
+          </a:p>
+        </p:txBody>
+      </p:sp>
+      <p:pic>
+        <p:nvPicPr>
+          <p:cNvPr id="7" name="그림 6">
+            <a:extLst>
+              <a:ext uri="{FF2B5EF4-FFF2-40B4-BE49-F238E27FC236}">
+                <a16:creationId xmlns:a16="http://schemas.microsoft.com/office/drawing/2014/main" id="{C50ED493-D3B6-5B03-31D9-27588704BC45}"/>
+              </a:ext>
+            </a:extLst>
+          </p:cNvPr>
+          <p:cNvPicPr>
+            <a:picLocks noChangeAspect="1"/>
+          </p:cNvPicPr>
+          <p:nvPr/>
+        </p:nvPicPr>
+        <p:blipFill>
+          <a:blip r:embed="rId3"/>
+          <a:stretch>
+            <a:fillRect/>
+          </a:stretch>
+        </p:blipFill>
+        <p:spPr>
+          <a:xfrm>
+            <a:off x="2449540" y="1786711"/>
+            <a:ext cx="6683319" cy="4122777"/>
+          </a:xfrm>
+          <a:prstGeom prst="rect">
+            <a:avLst/>
+          </a:prstGeom>
+        </p:spPr>
+      </p:pic>
+    </p:spTree>
+    <p:extLst>
+      <p:ext uri="{BB962C8B-B14F-4D97-AF65-F5344CB8AC3E}">
+        <p14:creationId xmlns:p14="http://schemas.microsoft.com/office/powerpoint/2010/main" val="2539903926"/>
+      </p:ext>
+    </p:extLst>
+  </p:cSld>
+  <p:clrMapOvr>
+    <a:masterClrMapping/>
+  </p:clrMapOvr>
+</p:sld>
+</file>
+
+<file path=ppt/slides/slide18.xml><?xml version="1.0" encoding="utf-8"?>
+<p:sld xmlns:a="http://schemas.openxmlformats.org/drawingml/2006/main" xmlns:r="http://schemas.openxmlformats.org/officeDocument/2006/relationships" xmlns:p="http://schemas.openxmlformats.org/presentationml/2006/main">
+  <p:cSld>
+    <p:spTree>
+      <p:nvGrpSpPr>
+        <p:cNvPr id="1" name="">
+          <a:extLst>
+            <a:ext uri="{FF2B5EF4-FFF2-40B4-BE49-F238E27FC236}">
               <a16:creationId xmlns:a16="http://schemas.microsoft.com/office/drawing/2014/main" id="{40E0C018-C331-172A-A555-8604B962DE11}"/>
             </a:ext>
           </a:extLst>
@@ -4155,7 +6745,7 @@
 </p:sld>
 </file>
 
-<file path=ppt/slides/slide11.xml><?xml version="1.0" encoding="utf-8"?>
+<file path=ppt/slides/slide19.xml><?xml version="1.0" encoding="utf-8"?>
 <p:sld xmlns:a="http://schemas.openxmlformats.org/drawingml/2006/main" xmlns:r="http://schemas.openxmlformats.org/officeDocument/2006/relationships" xmlns:p="http://schemas.openxmlformats.org/presentationml/2006/main">
   <p:cSld>
     <p:spTree>
@@ -4503,7 +7093,279 @@
 </p:sld>
 </file>
 
-<file path=ppt/slides/slide12.xml><?xml version="1.0" encoding="utf-8"?>
+<file path=ppt/slides/slide2.xml><?xml version="1.0" encoding="utf-8"?>
+<p:sld xmlns:a="http://schemas.openxmlformats.org/drawingml/2006/main" xmlns:r="http://schemas.openxmlformats.org/officeDocument/2006/relationships" xmlns:p="http://schemas.openxmlformats.org/presentationml/2006/main">
+  <p:cSld>
+    <p:spTree>
+      <p:nvGrpSpPr>
+        <p:cNvPr id="1" name="">
+          <a:extLst>
+            <a:ext uri="{FF2B5EF4-FFF2-40B4-BE49-F238E27FC236}">
+              <a16:creationId xmlns:a16="http://schemas.microsoft.com/office/drawing/2014/main" id="{25F85264-DAF7-E028-936A-3E39FB0AE03D}"/>
+            </a:ext>
+          </a:extLst>
+        </p:cNvPr>
+        <p:cNvGrpSpPr/>
+        <p:nvPr/>
+      </p:nvGrpSpPr>
+      <p:grpSpPr>
+        <a:xfrm>
+          <a:off x="0" y="0"/>
+          <a:ext cx="0" cy="0"/>
+          <a:chOff x="0" y="0"/>
+          <a:chExt cx="0" cy="0"/>
+        </a:xfrm>
+      </p:grpSpPr>
+      <p:sp>
+        <p:nvSpPr>
+          <p:cNvPr id="3" name="제목 1">
+            <a:extLst>
+              <a:ext uri="{FF2B5EF4-FFF2-40B4-BE49-F238E27FC236}">
+                <a16:creationId xmlns:a16="http://schemas.microsoft.com/office/drawing/2014/main" id="{8C317C8E-BF00-9996-5D78-F73C973977E6}"/>
+              </a:ext>
+            </a:extLst>
+          </p:cNvPr>
+          <p:cNvSpPr txBox="1">
+            <a:spLocks/>
+          </p:cNvSpPr>
+          <p:nvPr/>
+        </p:nvSpPr>
+        <p:spPr>
+          <a:xfrm>
+            <a:off x="475645" y="481983"/>
+            <a:ext cx="10353762" cy="766439"/>
+          </a:xfrm>
+          <a:prstGeom prst="rect">
+            <a:avLst/>
+          </a:prstGeom>
+        </p:spPr>
+        <p:txBody>
+          <a:bodyPr vert="horz" lIns="91440" tIns="45720" rIns="91440" bIns="45720" rtlCol="0" anchor="ctr">
+            <a:normAutofit/>
+          </a:bodyPr>
+          <a:lstStyle>
+            <a:lvl1pPr algn="ctr" defTabSz="914400" rtl="0" eaLnBrk="1" latinLnBrk="1" hangingPunct="1">
+              <a:lnSpc>
+                <a:spcPct val="90000"/>
+              </a:lnSpc>
+              <a:spcBef>
+                <a:spcPct val="0"/>
+              </a:spcBef>
+              <a:buNone/>
+              <a:defRPr sz="3200" kern="1200" cap="all" baseline="0">
+                <a:solidFill>
+                  <a:schemeClr val="tx1"/>
+                </a:solidFill>
+                <a:effectLst/>
+                <a:latin typeface="Batang" panose="02030600000101010101" pitchFamily="18" charset="-127"/>
+                <a:ea typeface="Batang" panose="02030600000101010101" pitchFamily="18" charset="-127"/>
+                <a:cs typeface="+mj-cs"/>
+              </a:defRPr>
+            </a:lvl1pPr>
+          </a:lstStyle>
+          <a:p>
+            <a:pPr algn="l"/>
+            <a:r>
+              <a:rPr lang="en-US" altLang="ko-KR" sz="2800" cap="none" dirty="0">
+                <a:solidFill>
+                  <a:schemeClr val="bg2">
+                    <a:lumMod val="25000"/>
+                  </a:schemeClr>
+                </a:solidFill>
+                <a:latin typeface="D2Coding" panose="020B0609020101020101" pitchFamily="49" charset="-127"/>
+                <a:ea typeface="D2Coding" panose="020B0609020101020101" pitchFamily="49" charset="-127"/>
+                <a:cs typeface="Segoe UI Light" panose="020B0502040204020203" pitchFamily="34" charset="0"/>
+              </a:rPr>
+              <a:t>Variational Autoencoders</a:t>
+            </a:r>
+            <a:endParaRPr lang="ko-KR" altLang="en-US" sz="2800" cap="none" dirty="0">
+              <a:solidFill>
+                <a:schemeClr val="bg2">
+                  <a:lumMod val="25000"/>
+                </a:schemeClr>
+              </a:solidFill>
+              <a:latin typeface="D2Coding" panose="020B0609020101020101" pitchFamily="49" charset="-127"/>
+              <a:ea typeface="D2Coding" panose="020B0609020101020101" pitchFamily="49" charset="-127"/>
+              <a:cs typeface="Segoe UI Light" panose="020B0502040204020203" pitchFamily="34" charset="0"/>
+            </a:endParaRPr>
+          </a:p>
+        </p:txBody>
+      </p:sp>
+      <p:sp>
+        <p:nvSpPr>
+          <p:cNvPr id="2" name="TextBox 1">
+            <a:extLst>
+              <a:ext uri="{FF2B5EF4-FFF2-40B4-BE49-F238E27FC236}">
+                <a16:creationId xmlns:a16="http://schemas.microsoft.com/office/drawing/2014/main" id="{590AAD77-2BE3-B651-D9E7-0AADA229A2B1}"/>
+              </a:ext>
+            </a:extLst>
+          </p:cNvPr>
+          <p:cNvSpPr txBox="1"/>
+          <p:nvPr/>
+        </p:nvSpPr>
+        <p:spPr>
+          <a:xfrm>
+            <a:off x="2502417" y="1771466"/>
+            <a:ext cx="6981307" cy="1543821"/>
+          </a:xfrm>
+          <a:prstGeom prst="rect">
+            <a:avLst/>
+          </a:prstGeom>
+          <a:noFill/>
+        </p:spPr>
+        <p:txBody>
+          <a:bodyPr wrap="square" rtlCol="0">
+            <a:spAutoFit/>
+          </a:bodyPr>
+          <a:lstStyle/>
+          <a:p>
+            <a:pPr marL="342900" indent="-342900">
+              <a:lnSpc>
+                <a:spcPct val="200000"/>
+              </a:lnSpc>
+              <a:spcAft>
+                <a:spcPts val="600"/>
+              </a:spcAft>
+              <a:buFont typeface="+mj-lt"/>
+              <a:buAutoNum type="arabicPeriod"/>
+            </a:pPr>
+            <a:r>
+              <a:rPr lang="en-US" altLang="ko-KR" sz="2400" dirty="0" err="1">
+                <a:latin typeface="D2Coding" panose="020B0609020101020101" pitchFamily="49" charset="-127"/>
+                <a:ea typeface="D2Coding" panose="020B0609020101020101" pitchFamily="49" charset="-127"/>
+              </a:rPr>
+              <a:t>AutoEncoder</a:t>
+            </a:r>
+            <a:endParaRPr lang="en-US" altLang="ko-KR" sz="2400" dirty="0">
+              <a:latin typeface="D2Coding" panose="020B0609020101020101" pitchFamily="49" charset="-127"/>
+              <a:ea typeface="D2Coding" panose="020B0609020101020101" pitchFamily="49" charset="-127"/>
+            </a:endParaRPr>
+          </a:p>
+          <a:p>
+            <a:pPr marL="342900" indent="-342900">
+              <a:lnSpc>
+                <a:spcPct val="200000"/>
+              </a:lnSpc>
+              <a:spcAft>
+                <a:spcPts val="600"/>
+              </a:spcAft>
+              <a:buFont typeface="+mj-lt"/>
+              <a:buAutoNum type="arabicPeriod"/>
+            </a:pPr>
+            <a:r>
+              <a:rPr lang="en-US" altLang="ko-KR" sz="2400" dirty="0">
+                <a:latin typeface="D2Coding" panose="020B0609020101020101" pitchFamily="49" charset="-127"/>
+                <a:ea typeface="D2Coding" panose="020B0609020101020101" pitchFamily="49" charset="-127"/>
+              </a:rPr>
+              <a:t>Variational </a:t>
+            </a:r>
+            <a:r>
+              <a:rPr lang="en-US" altLang="ko-KR" sz="2400" dirty="0" err="1">
+                <a:latin typeface="D2Coding" panose="020B0609020101020101" pitchFamily="49" charset="-127"/>
+                <a:ea typeface="D2Coding" panose="020B0609020101020101" pitchFamily="49" charset="-127"/>
+              </a:rPr>
+              <a:t>AutoEncoder</a:t>
+            </a:r>
+            <a:endParaRPr lang="en-US" altLang="ko-KR" sz="2400" dirty="0">
+              <a:latin typeface="D2Coding" panose="020B0609020101020101" pitchFamily="49" charset="-127"/>
+              <a:ea typeface="D2Coding" panose="020B0609020101020101" pitchFamily="49" charset="-127"/>
+            </a:endParaRPr>
+          </a:p>
+        </p:txBody>
+      </p:sp>
+      <p:pic>
+        <p:nvPicPr>
+          <p:cNvPr id="5" name="그림 4">
+            <a:extLst>
+              <a:ext uri="{FF2B5EF4-FFF2-40B4-BE49-F238E27FC236}">
+                <a16:creationId xmlns:a16="http://schemas.microsoft.com/office/drawing/2014/main" id="{CCF4B8AC-C92D-256F-22B9-1BCA3A48EEEB}"/>
+              </a:ext>
+            </a:extLst>
+          </p:cNvPr>
+          <p:cNvPicPr>
+            <a:picLocks noChangeAspect="1"/>
+          </p:cNvPicPr>
+          <p:nvPr/>
+        </p:nvPicPr>
+        <p:blipFill>
+          <a:blip r:embed="rId2"/>
+          <a:stretch>
+            <a:fillRect/>
+          </a:stretch>
+        </p:blipFill>
+        <p:spPr>
+          <a:xfrm>
+            <a:off x="8839200" y="1583297"/>
+            <a:ext cx="2832666" cy="3753600"/>
+          </a:xfrm>
+          <a:prstGeom prst="rect">
+            <a:avLst/>
+          </a:prstGeom>
+        </p:spPr>
+      </p:pic>
+      <p:sp>
+        <p:nvSpPr>
+          <p:cNvPr id="6" name="TextBox 5">
+            <a:extLst>
+              <a:ext uri="{FF2B5EF4-FFF2-40B4-BE49-F238E27FC236}">
+                <a16:creationId xmlns:a16="http://schemas.microsoft.com/office/drawing/2014/main" id="{DDABF1DF-F364-FC6B-B631-1FB3134DF963}"/>
+              </a:ext>
+            </a:extLst>
+          </p:cNvPr>
+          <p:cNvSpPr txBox="1"/>
+          <p:nvPr/>
+        </p:nvSpPr>
+        <p:spPr>
+          <a:xfrm>
+            <a:off x="591709" y="1691187"/>
+            <a:ext cx="1789416" cy="461665"/>
+          </a:xfrm>
+          <a:prstGeom prst="rect">
+            <a:avLst/>
+          </a:prstGeom>
+          <a:solidFill>
+            <a:srgbClr val="002060"/>
+          </a:solidFill>
+        </p:spPr>
+        <p:txBody>
+          <a:bodyPr wrap="square">
+            <a:spAutoFit/>
+          </a:bodyPr>
+          <a:lstStyle/>
+          <a:p>
+            <a:r>
+              <a:rPr lang="en-US" altLang="ko-KR" sz="2400" cap="none" dirty="0">
+                <a:solidFill>
+                  <a:schemeClr val="bg1"/>
+                </a:solidFill>
+                <a:latin typeface="D2Coding" panose="020B0609020101020101" pitchFamily="49" charset="-127"/>
+                <a:ea typeface="D2Coding" panose="020B0609020101020101" pitchFamily="49" charset="-127"/>
+                <a:cs typeface="Segoe UI Light" panose="020B0502040204020203" pitchFamily="34" charset="0"/>
+              </a:rPr>
+              <a:t>Chapter 3 </a:t>
+            </a:r>
+            <a:endParaRPr lang="ko-KR" altLang="en-US" sz="1600" dirty="0">
+              <a:solidFill>
+                <a:schemeClr val="bg1"/>
+              </a:solidFill>
+            </a:endParaRPr>
+          </a:p>
+        </p:txBody>
+      </p:sp>
+    </p:spTree>
+    <p:extLst>
+      <p:ext uri="{BB962C8B-B14F-4D97-AF65-F5344CB8AC3E}">
+        <p14:creationId xmlns:p14="http://schemas.microsoft.com/office/powerpoint/2010/main" val="2187212317"/>
+      </p:ext>
+    </p:extLst>
+  </p:cSld>
+  <p:clrMapOvr>
+    <a:masterClrMapping/>
+  </p:clrMapOvr>
+</p:sld>
+</file>
+
+<file path=ppt/slides/slide20.xml><?xml version="1.0" encoding="utf-8"?>
 <p:sld xmlns:a="http://schemas.openxmlformats.org/drawingml/2006/main" xmlns:r="http://schemas.openxmlformats.org/officeDocument/2006/relationships" xmlns:p="http://schemas.openxmlformats.org/presentationml/2006/main">
   <p:cSld>
     <p:spTree>
@@ -4602,7 +7464,7 @@
 </p:sld>
 </file>
 
-<file path=ppt/slides/slide13.xml><?xml version="1.0" encoding="utf-8"?>
+<file path=ppt/slides/slide21.xml><?xml version="1.0" encoding="utf-8"?>
 <p:sld xmlns:a="http://schemas.openxmlformats.org/drawingml/2006/main" xmlns:r="http://schemas.openxmlformats.org/officeDocument/2006/relationships" xmlns:p="http://schemas.openxmlformats.org/presentationml/2006/main">
   <p:cSld>
     <p:spTree>
@@ -4868,7 +7730,7 @@
 </p:sld>
 </file>
 
-<file path=ppt/slides/slide14.xml><?xml version="1.0" encoding="utf-8"?>
+<file path=ppt/slides/slide22.xml><?xml version="1.0" encoding="utf-8"?>
 <p:sld xmlns:a="http://schemas.openxmlformats.org/drawingml/2006/main" xmlns:r="http://schemas.openxmlformats.org/officeDocument/2006/relationships" xmlns:p="http://schemas.openxmlformats.org/presentationml/2006/main">
   <p:cSld>
     <p:spTree>
@@ -5051,7 +7913,7 @@
 </p:sld>
 </file>
 
-<file path=ppt/slides/slide15.xml><?xml version="1.0" encoding="utf-8"?>
+<file path=ppt/slides/slide23.xml><?xml version="1.0" encoding="utf-8"?>
 <p:sld xmlns:a="http://schemas.openxmlformats.org/drawingml/2006/main" xmlns:r="http://schemas.openxmlformats.org/officeDocument/2006/relationships" xmlns:p="http://schemas.openxmlformats.org/presentationml/2006/main">
   <p:cSld>
     <p:spTree>
@@ -5264,7 +8126,7 @@
 </p:sld>
 </file>
 
-<file path=ppt/slides/slide16.xml><?xml version="1.0" encoding="utf-8"?>
+<file path=ppt/slides/slide24.xml><?xml version="1.0" encoding="utf-8"?>
 <p:sld xmlns:a="http://schemas.openxmlformats.org/drawingml/2006/main" xmlns:r="http://schemas.openxmlformats.org/officeDocument/2006/relationships" xmlns:p="http://schemas.openxmlformats.org/presentationml/2006/main">
   <p:cSld>
     <p:spTree>
@@ -5607,7 +8469,7 @@
 </p:sld>
 </file>
 
-<file path=ppt/slides/slide17.xml><?xml version="1.0" encoding="utf-8"?>
+<file path=ppt/slides/slide25.xml><?xml version="1.0" encoding="utf-8"?>
 <p:sld xmlns:a="http://schemas.openxmlformats.org/drawingml/2006/main" xmlns:r="http://schemas.openxmlformats.org/officeDocument/2006/relationships" xmlns:p="http://schemas.openxmlformats.org/presentationml/2006/main">
   <p:cSld>
     <p:spTree>
@@ -5811,7 +8673,7 @@
 </p:sld>
 </file>
 
-<file path=ppt/slides/slide18.xml><?xml version="1.0" encoding="utf-8"?>
+<file path=ppt/slides/slide26.xml><?xml version="1.0" encoding="utf-8"?>
 <p:sld xmlns:a="http://schemas.openxmlformats.org/drawingml/2006/main" xmlns:r="http://schemas.openxmlformats.org/officeDocument/2006/relationships" xmlns:p="http://schemas.openxmlformats.org/presentationml/2006/main">
   <p:cSld>
     <p:spTree>
@@ -6077,7 +8939,7 @@
 </p:sld>
 </file>
 
-<file path=ppt/slides/slide19.xml><?xml version="1.0" encoding="utf-8"?>
+<file path=ppt/slides/slide27.xml><?xml version="1.0" encoding="utf-8"?>
 <p:sld xmlns:a="http://schemas.openxmlformats.org/drawingml/2006/main" xmlns:r="http://schemas.openxmlformats.org/officeDocument/2006/relationships" xmlns:p="http://schemas.openxmlformats.org/presentationml/2006/main">
   <p:cSld>
     <p:spTree>
@@ -6573,279 +9435,7 @@
 </p:sld>
 </file>
 
-<file path=ppt/slides/slide2.xml><?xml version="1.0" encoding="utf-8"?>
-<p:sld xmlns:a="http://schemas.openxmlformats.org/drawingml/2006/main" xmlns:r="http://schemas.openxmlformats.org/officeDocument/2006/relationships" xmlns:p="http://schemas.openxmlformats.org/presentationml/2006/main">
-  <p:cSld>
-    <p:spTree>
-      <p:nvGrpSpPr>
-        <p:cNvPr id="1" name="">
-          <a:extLst>
-            <a:ext uri="{FF2B5EF4-FFF2-40B4-BE49-F238E27FC236}">
-              <a16:creationId xmlns:a16="http://schemas.microsoft.com/office/drawing/2014/main" id="{25F85264-DAF7-E028-936A-3E39FB0AE03D}"/>
-            </a:ext>
-          </a:extLst>
-        </p:cNvPr>
-        <p:cNvGrpSpPr/>
-        <p:nvPr/>
-      </p:nvGrpSpPr>
-      <p:grpSpPr>
-        <a:xfrm>
-          <a:off x="0" y="0"/>
-          <a:ext cx="0" cy="0"/>
-          <a:chOff x="0" y="0"/>
-          <a:chExt cx="0" cy="0"/>
-        </a:xfrm>
-      </p:grpSpPr>
-      <p:sp>
-        <p:nvSpPr>
-          <p:cNvPr id="3" name="제목 1">
-            <a:extLst>
-              <a:ext uri="{FF2B5EF4-FFF2-40B4-BE49-F238E27FC236}">
-                <a16:creationId xmlns:a16="http://schemas.microsoft.com/office/drawing/2014/main" id="{8C317C8E-BF00-9996-5D78-F73C973977E6}"/>
-              </a:ext>
-            </a:extLst>
-          </p:cNvPr>
-          <p:cNvSpPr txBox="1">
-            <a:spLocks/>
-          </p:cNvSpPr>
-          <p:nvPr/>
-        </p:nvSpPr>
-        <p:spPr>
-          <a:xfrm>
-            <a:off x="475645" y="481983"/>
-            <a:ext cx="10353762" cy="766439"/>
-          </a:xfrm>
-          <a:prstGeom prst="rect">
-            <a:avLst/>
-          </a:prstGeom>
-        </p:spPr>
-        <p:txBody>
-          <a:bodyPr vert="horz" lIns="91440" tIns="45720" rIns="91440" bIns="45720" rtlCol="0" anchor="ctr">
-            <a:normAutofit/>
-          </a:bodyPr>
-          <a:lstStyle>
-            <a:lvl1pPr algn="ctr" defTabSz="914400" rtl="0" eaLnBrk="1" latinLnBrk="1" hangingPunct="1">
-              <a:lnSpc>
-                <a:spcPct val="90000"/>
-              </a:lnSpc>
-              <a:spcBef>
-                <a:spcPct val="0"/>
-              </a:spcBef>
-              <a:buNone/>
-              <a:defRPr sz="3200" kern="1200" cap="all" baseline="0">
-                <a:solidFill>
-                  <a:schemeClr val="tx1"/>
-                </a:solidFill>
-                <a:effectLst/>
-                <a:latin typeface="Batang" panose="02030600000101010101" pitchFamily="18" charset="-127"/>
-                <a:ea typeface="Batang" panose="02030600000101010101" pitchFamily="18" charset="-127"/>
-                <a:cs typeface="+mj-cs"/>
-              </a:defRPr>
-            </a:lvl1pPr>
-          </a:lstStyle>
-          <a:p>
-            <a:pPr algn="l"/>
-            <a:r>
-              <a:rPr lang="en-US" altLang="ko-KR" sz="2800" cap="none" dirty="0">
-                <a:solidFill>
-                  <a:schemeClr val="bg2">
-                    <a:lumMod val="25000"/>
-                  </a:schemeClr>
-                </a:solidFill>
-                <a:latin typeface="D2Coding" panose="020B0609020101020101" pitchFamily="49" charset="-127"/>
-                <a:ea typeface="D2Coding" panose="020B0609020101020101" pitchFamily="49" charset="-127"/>
-                <a:cs typeface="Segoe UI Light" panose="020B0502040204020203" pitchFamily="34" charset="0"/>
-              </a:rPr>
-              <a:t>Variational Autoencoders</a:t>
-            </a:r>
-            <a:endParaRPr lang="ko-KR" altLang="en-US" sz="2800" cap="none" dirty="0">
-              <a:solidFill>
-                <a:schemeClr val="bg2">
-                  <a:lumMod val="25000"/>
-                </a:schemeClr>
-              </a:solidFill>
-              <a:latin typeface="D2Coding" panose="020B0609020101020101" pitchFamily="49" charset="-127"/>
-              <a:ea typeface="D2Coding" panose="020B0609020101020101" pitchFamily="49" charset="-127"/>
-              <a:cs typeface="Segoe UI Light" panose="020B0502040204020203" pitchFamily="34" charset="0"/>
-            </a:endParaRPr>
-          </a:p>
-        </p:txBody>
-      </p:sp>
-      <p:sp>
-        <p:nvSpPr>
-          <p:cNvPr id="2" name="TextBox 1">
-            <a:extLst>
-              <a:ext uri="{FF2B5EF4-FFF2-40B4-BE49-F238E27FC236}">
-                <a16:creationId xmlns:a16="http://schemas.microsoft.com/office/drawing/2014/main" id="{590AAD77-2BE3-B651-D9E7-0AADA229A2B1}"/>
-              </a:ext>
-            </a:extLst>
-          </p:cNvPr>
-          <p:cNvSpPr txBox="1"/>
-          <p:nvPr/>
-        </p:nvSpPr>
-        <p:spPr>
-          <a:xfrm>
-            <a:off x="2502417" y="1771466"/>
-            <a:ext cx="6981307" cy="1543821"/>
-          </a:xfrm>
-          <a:prstGeom prst="rect">
-            <a:avLst/>
-          </a:prstGeom>
-          <a:noFill/>
-        </p:spPr>
-        <p:txBody>
-          <a:bodyPr wrap="square" rtlCol="0">
-            <a:spAutoFit/>
-          </a:bodyPr>
-          <a:lstStyle/>
-          <a:p>
-            <a:pPr marL="342900" indent="-342900">
-              <a:lnSpc>
-                <a:spcPct val="200000"/>
-              </a:lnSpc>
-              <a:spcAft>
-                <a:spcPts val="600"/>
-              </a:spcAft>
-              <a:buFont typeface="+mj-lt"/>
-              <a:buAutoNum type="arabicPeriod"/>
-            </a:pPr>
-            <a:r>
-              <a:rPr lang="en-US" altLang="ko-KR" sz="2400" dirty="0" err="1">
-                <a:latin typeface="D2Coding" panose="020B0609020101020101" pitchFamily="49" charset="-127"/>
-                <a:ea typeface="D2Coding" panose="020B0609020101020101" pitchFamily="49" charset="-127"/>
-              </a:rPr>
-              <a:t>AutoEncoder</a:t>
-            </a:r>
-            <a:endParaRPr lang="en-US" altLang="ko-KR" sz="2400" dirty="0">
-              <a:latin typeface="D2Coding" panose="020B0609020101020101" pitchFamily="49" charset="-127"/>
-              <a:ea typeface="D2Coding" panose="020B0609020101020101" pitchFamily="49" charset="-127"/>
-            </a:endParaRPr>
-          </a:p>
-          <a:p>
-            <a:pPr marL="342900" indent="-342900">
-              <a:lnSpc>
-                <a:spcPct val="200000"/>
-              </a:lnSpc>
-              <a:spcAft>
-                <a:spcPts val="600"/>
-              </a:spcAft>
-              <a:buFont typeface="+mj-lt"/>
-              <a:buAutoNum type="arabicPeriod"/>
-            </a:pPr>
-            <a:r>
-              <a:rPr lang="en-US" altLang="ko-KR" sz="2400" dirty="0">
-                <a:latin typeface="D2Coding" panose="020B0609020101020101" pitchFamily="49" charset="-127"/>
-                <a:ea typeface="D2Coding" panose="020B0609020101020101" pitchFamily="49" charset="-127"/>
-              </a:rPr>
-              <a:t>Variational </a:t>
-            </a:r>
-            <a:r>
-              <a:rPr lang="en-US" altLang="ko-KR" sz="2400" dirty="0" err="1">
-                <a:latin typeface="D2Coding" panose="020B0609020101020101" pitchFamily="49" charset="-127"/>
-                <a:ea typeface="D2Coding" panose="020B0609020101020101" pitchFamily="49" charset="-127"/>
-              </a:rPr>
-              <a:t>AutoEncoder</a:t>
-            </a:r>
-            <a:endParaRPr lang="en-US" altLang="ko-KR" sz="2400" dirty="0">
-              <a:latin typeface="D2Coding" panose="020B0609020101020101" pitchFamily="49" charset="-127"/>
-              <a:ea typeface="D2Coding" panose="020B0609020101020101" pitchFamily="49" charset="-127"/>
-            </a:endParaRPr>
-          </a:p>
-        </p:txBody>
-      </p:sp>
-      <p:pic>
-        <p:nvPicPr>
-          <p:cNvPr id="5" name="그림 4">
-            <a:extLst>
-              <a:ext uri="{FF2B5EF4-FFF2-40B4-BE49-F238E27FC236}">
-                <a16:creationId xmlns:a16="http://schemas.microsoft.com/office/drawing/2014/main" id="{CCF4B8AC-C92D-256F-22B9-1BCA3A48EEEB}"/>
-              </a:ext>
-            </a:extLst>
-          </p:cNvPr>
-          <p:cNvPicPr>
-            <a:picLocks noChangeAspect="1"/>
-          </p:cNvPicPr>
-          <p:nvPr/>
-        </p:nvPicPr>
-        <p:blipFill>
-          <a:blip r:embed="rId2"/>
-          <a:stretch>
-            <a:fillRect/>
-          </a:stretch>
-        </p:blipFill>
-        <p:spPr>
-          <a:xfrm>
-            <a:off x="8839200" y="1583297"/>
-            <a:ext cx="2832666" cy="3753600"/>
-          </a:xfrm>
-          <a:prstGeom prst="rect">
-            <a:avLst/>
-          </a:prstGeom>
-        </p:spPr>
-      </p:pic>
-      <p:sp>
-        <p:nvSpPr>
-          <p:cNvPr id="6" name="TextBox 5">
-            <a:extLst>
-              <a:ext uri="{FF2B5EF4-FFF2-40B4-BE49-F238E27FC236}">
-                <a16:creationId xmlns:a16="http://schemas.microsoft.com/office/drawing/2014/main" id="{DDABF1DF-F364-FC6B-B631-1FB3134DF963}"/>
-              </a:ext>
-            </a:extLst>
-          </p:cNvPr>
-          <p:cNvSpPr txBox="1"/>
-          <p:nvPr/>
-        </p:nvSpPr>
-        <p:spPr>
-          <a:xfrm>
-            <a:off x="591709" y="1691187"/>
-            <a:ext cx="1789416" cy="461665"/>
-          </a:xfrm>
-          <a:prstGeom prst="rect">
-            <a:avLst/>
-          </a:prstGeom>
-          <a:solidFill>
-            <a:srgbClr val="002060"/>
-          </a:solidFill>
-        </p:spPr>
-        <p:txBody>
-          <a:bodyPr wrap="square">
-            <a:spAutoFit/>
-          </a:bodyPr>
-          <a:lstStyle/>
-          <a:p>
-            <a:r>
-              <a:rPr lang="en-US" altLang="ko-KR" sz="2400" cap="none" dirty="0">
-                <a:solidFill>
-                  <a:schemeClr val="bg1"/>
-                </a:solidFill>
-                <a:latin typeface="D2Coding" panose="020B0609020101020101" pitchFamily="49" charset="-127"/>
-                <a:ea typeface="D2Coding" panose="020B0609020101020101" pitchFamily="49" charset="-127"/>
-                <a:cs typeface="Segoe UI Light" panose="020B0502040204020203" pitchFamily="34" charset="0"/>
-              </a:rPr>
-              <a:t>Chapter 3 </a:t>
-            </a:r>
-            <a:endParaRPr lang="ko-KR" altLang="en-US" sz="1600" dirty="0">
-              <a:solidFill>
-                <a:schemeClr val="bg1"/>
-              </a:solidFill>
-            </a:endParaRPr>
-          </a:p>
-        </p:txBody>
-      </p:sp>
-    </p:spTree>
-    <p:extLst>
-      <p:ext uri="{BB962C8B-B14F-4D97-AF65-F5344CB8AC3E}">
-        <p14:creationId xmlns:p14="http://schemas.microsoft.com/office/powerpoint/2010/main" val="2187212317"/>
-      </p:ext>
-    </p:extLst>
-  </p:cSld>
-  <p:clrMapOvr>
-    <a:masterClrMapping/>
-  </p:clrMapOvr>
-</p:sld>
-</file>
-
-<file path=ppt/slides/slide20.xml><?xml version="1.0" encoding="utf-8"?>
+<file path=ppt/slides/slide28.xml><?xml version="1.0" encoding="utf-8"?>
 <p:sld xmlns:a="http://schemas.openxmlformats.org/drawingml/2006/main" xmlns:r="http://schemas.openxmlformats.org/officeDocument/2006/relationships" xmlns:p="http://schemas.openxmlformats.org/presentationml/2006/main">
   <p:cSld>
     <p:spTree>
@@ -7193,7 +9783,7 @@
 </p:sld>
 </file>
 
-<file path=ppt/slides/slide21.xml><?xml version="1.0" encoding="utf-8"?>
+<file path=ppt/slides/slide29.xml><?xml version="1.0" encoding="utf-8"?>
 <p:sld xmlns:a="http://schemas.openxmlformats.org/drawingml/2006/main" xmlns:r="http://schemas.openxmlformats.org/officeDocument/2006/relationships" xmlns:p="http://schemas.openxmlformats.org/presentationml/2006/main">
   <p:cSld>
     <p:spTree>
@@ -7639,6 +10229,262 @@
     <p:extLst>
       <p:ext uri="{BB962C8B-B14F-4D97-AF65-F5344CB8AC3E}">
         <p14:creationId xmlns:p14="http://schemas.microsoft.com/office/powerpoint/2010/main" val="1080564212"/>
+      </p:ext>
+    </p:extLst>
+  </p:cSld>
+  <p:clrMapOvr>
+    <a:masterClrMapping/>
+  </p:clrMapOvr>
+</p:sld>
+</file>
+
+<file path=ppt/slides/slide30.xml><?xml version="1.0" encoding="utf-8"?>
+<p:sld xmlns:a="http://schemas.openxmlformats.org/drawingml/2006/main" xmlns:r="http://schemas.openxmlformats.org/officeDocument/2006/relationships" xmlns:p="http://schemas.openxmlformats.org/presentationml/2006/main">
+  <p:cSld>
+    <p:spTree>
+      <p:nvGrpSpPr>
+        <p:cNvPr id="1" name="">
+          <a:extLst>
+            <a:ext uri="{FF2B5EF4-FFF2-40B4-BE49-F238E27FC236}">
+              <a16:creationId xmlns:a16="http://schemas.microsoft.com/office/drawing/2014/main" id="{2A15C037-4C38-928F-DBD2-8487D4DFB159}"/>
+            </a:ext>
+          </a:extLst>
+        </p:cNvPr>
+        <p:cNvGrpSpPr/>
+        <p:nvPr/>
+      </p:nvGrpSpPr>
+      <p:grpSpPr>
+        <a:xfrm>
+          <a:off x="0" y="0"/>
+          <a:ext cx="0" cy="0"/>
+          <a:chOff x="0" y="0"/>
+          <a:chExt cx="0" cy="0"/>
+        </a:xfrm>
+      </p:grpSpPr>
+      <p:sp>
+        <p:nvSpPr>
+          <p:cNvPr id="3" name="제목 1">
+            <a:extLst>
+              <a:ext uri="{FF2B5EF4-FFF2-40B4-BE49-F238E27FC236}">
+                <a16:creationId xmlns:a16="http://schemas.microsoft.com/office/drawing/2014/main" id="{F2AFD9CA-5C62-9AE1-DF8E-4D1BDB28B16F}"/>
+              </a:ext>
+            </a:extLst>
+          </p:cNvPr>
+          <p:cNvSpPr txBox="1">
+            <a:spLocks/>
+          </p:cNvSpPr>
+          <p:nvPr/>
+        </p:nvSpPr>
+        <p:spPr>
+          <a:xfrm>
+            <a:off x="475645" y="481983"/>
+            <a:ext cx="10353762" cy="766439"/>
+          </a:xfrm>
+          <a:prstGeom prst="rect">
+            <a:avLst/>
+          </a:prstGeom>
+        </p:spPr>
+        <p:txBody>
+          <a:bodyPr vert="horz" lIns="91440" tIns="45720" rIns="91440" bIns="45720" rtlCol="0" anchor="ctr">
+            <a:normAutofit/>
+          </a:bodyPr>
+          <a:lstStyle>
+            <a:lvl1pPr algn="ctr" defTabSz="914400" rtl="0" eaLnBrk="1" latinLnBrk="1" hangingPunct="1">
+              <a:lnSpc>
+                <a:spcPct val="90000"/>
+              </a:lnSpc>
+              <a:spcBef>
+                <a:spcPct val="0"/>
+              </a:spcBef>
+              <a:buNone/>
+              <a:defRPr sz="3200" kern="1200" cap="all" baseline="0">
+                <a:solidFill>
+                  <a:schemeClr val="tx1"/>
+                </a:solidFill>
+                <a:effectLst/>
+                <a:latin typeface="Batang" panose="02030600000101010101" pitchFamily="18" charset="-127"/>
+                <a:ea typeface="Batang" panose="02030600000101010101" pitchFamily="18" charset="-127"/>
+                <a:cs typeface="+mj-cs"/>
+              </a:defRPr>
+            </a:lvl1pPr>
+          </a:lstStyle>
+          <a:p>
+            <a:pPr algn="l"/>
+            <a:r>
+              <a:rPr lang="en-US" altLang="ko-KR" sz="2800" cap="none" dirty="0">
+                <a:solidFill>
+                  <a:schemeClr val="bg2">
+                    <a:lumMod val="25000"/>
+                  </a:schemeClr>
+                </a:solidFill>
+                <a:latin typeface="D2Coding" panose="020B0609020101020101" pitchFamily="49" charset="-127"/>
+                <a:ea typeface="D2Coding" panose="020B0609020101020101" pitchFamily="49" charset="-127"/>
+                <a:cs typeface="Segoe UI Light" panose="020B0502040204020203" pitchFamily="34" charset="0"/>
+              </a:rPr>
+              <a:t>Convolutional Variational Autoencoder </a:t>
+            </a:r>
+            <a:endParaRPr lang="ko-KR" altLang="en-US" sz="2800" cap="none" dirty="0">
+              <a:solidFill>
+                <a:schemeClr val="bg2">
+                  <a:lumMod val="25000"/>
+                </a:schemeClr>
+              </a:solidFill>
+              <a:latin typeface="D2Coding" panose="020B0609020101020101" pitchFamily="49" charset="-127"/>
+              <a:ea typeface="D2Coding" panose="020B0609020101020101" pitchFamily="49" charset="-127"/>
+              <a:cs typeface="Segoe UI Light" panose="020B0502040204020203" pitchFamily="34" charset="0"/>
+            </a:endParaRPr>
+          </a:p>
+        </p:txBody>
+      </p:sp>
+      <p:pic>
+        <p:nvPicPr>
+          <p:cNvPr id="27650" name="Picture 2" descr="png">
+            <a:extLst>
+              <a:ext uri="{FF2B5EF4-FFF2-40B4-BE49-F238E27FC236}">
+                <a16:creationId xmlns:a16="http://schemas.microsoft.com/office/drawing/2014/main" id="{14608F00-17CF-D2F5-5AB7-60C588BFEB8E}"/>
+              </a:ext>
+            </a:extLst>
+          </p:cNvPr>
+          <p:cNvPicPr>
+            <a:picLocks noChangeAspect="1" noChangeArrowheads="1"/>
+          </p:cNvPicPr>
+          <p:nvPr/>
+        </p:nvPicPr>
+        <p:blipFill>
+          <a:blip r:embed="rId2">
+            <a:extLst>
+              <a:ext uri="{28A0092B-C50C-407E-A947-70E740481C1C}">
+                <a14:useLocalDpi xmlns:a14="http://schemas.microsoft.com/office/drawing/2010/main" val="0"/>
+              </a:ext>
+            </a:extLst>
+          </a:blip>
+          <a:srcRect/>
+          <a:stretch>
+            <a:fillRect/>
+          </a:stretch>
+        </p:blipFill>
+        <p:spPr bwMode="auto">
+          <a:xfrm>
+            <a:off x="6210300" y="1647824"/>
+            <a:ext cx="4962525" cy="4962525"/>
+          </a:xfrm>
+          <a:prstGeom prst="rect">
+            <a:avLst/>
+          </a:prstGeom>
+          <a:noFill/>
+          <a:extLst>
+            <a:ext uri="{909E8E84-426E-40DD-AFC4-6F175D3DCCD1}">
+              <a14:hiddenFill xmlns:a14="http://schemas.microsoft.com/office/drawing/2010/main">
+                <a:solidFill>
+                  <a:srgbClr val="FFFFFF"/>
+                </a:solidFill>
+              </a14:hiddenFill>
+            </a:ext>
+          </a:extLst>
+        </p:spPr>
+      </p:pic>
+      <p:pic>
+        <p:nvPicPr>
+          <p:cNvPr id="27652" name="Picture 4" descr="gif">
+            <a:extLst>
+              <a:ext uri="{FF2B5EF4-FFF2-40B4-BE49-F238E27FC236}">
+                <a16:creationId xmlns:a16="http://schemas.microsoft.com/office/drawing/2014/main" id="{227A3A12-B9F1-5CD2-5B0E-B08213C2565D}"/>
+              </a:ext>
+            </a:extLst>
+          </p:cNvPr>
+          <p:cNvPicPr>
+            <a:picLocks noChangeAspect="1" noChangeArrowheads="1"/>
+          </p:cNvPicPr>
+          <p:nvPr/>
+        </p:nvPicPr>
+        <p:blipFill>
+          <a:blip r:embed="rId3">
+            <a:extLst>
+              <a:ext uri="{28A0092B-C50C-407E-A947-70E740481C1C}">
+                <a14:useLocalDpi xmlns:a14="http://schemas.microsoft.com/office/drawing/2010/main" val="0"/>
+              </a:ext>
+            </a:extLst>
+          </a:blip>
+          <a:srcRect/>
+          <a:stretch>
+            <a:fillRect/>
+          </a:stretch>
+        </p:blipFill>
+        <p:spPr bwMode="auto">
+          <a:xfrm>
+            <a:off x="1318651" y="2224086"/>
+            <a:ext cx="3810000" cy="3810000"/>
+          </a:xfrm>
+          <a:prstGeom prst="rect">
+            <a:avLst/>
+          </a:prstGeom>
+          <a:noFill/>
+          <a:extLst>
+            <a:ext uri="{909E8E84-426E-40DD-AFC4-6F175D3DCCD1}">
+              <a14:hiddenFill xmlns:a14="http://schemas.microsoft.com/office/drawing/2010/main">
+                <a:solidFill>
+                  <a:srgbClr val="FFFFFF"/>
+                </a:solidFill>
+              </a14:hiddenFill>
+            </a:ext>
+          </a:extLst>
+        </p:spPr>
+      </p:pic>
+      <p:sp>
+        <p:nvSpPr>
+          <p:cNvPr id="2" name="TextBox 1">
+            <a:extLst>
+              <a:ext uri="{FF2B5EF4-FFF2-40B4-BE49-F238E27FC236}">
+                <a16:creationId xmlns:a16="http://schemas.microsoft.com/office/drawing/2014/main" id="{92E299D1-F29D-E264-DC97-66606A457604}"/>
+              </a:ext>
+            </a:extLst>
+          </p:cNvPr>
+          <p:cNvSpPr txBox="1"/>
+          <p:nvPr/>
+        </p:nvSpPr>
+        <p:spPr>
+          <a:xfrm>
+            <a:off x="581025" y="1447769"/>
+            <a:ext cx="2108269" cy="400110"/>
+          </a:xfrm>
+          <a:prstGeom prst="rect">
+            <a:avLst/>
+          </a:prstGeom>
+          <a:noFill/>
+        </p:spPr>
+        <p:txBody>
+          <a:bodyPr wrap="none" rtlCol="0">
+            <a:spAutoFit/>
+          </a:bodyPr>
+          <a:lstStyle/>
+          <a:p>
+            <a:r>
+              <a:rPr lang="en-US" altLang="ko-KR" sz="2000" dirty="0">
+                <a:latin typeface="D2Coding" panose="020B0609020101020101" pitchFamily="49" charset="-127"/>
+                <a:ea typeface="D2Coding" panose="020B0609020101020101" pitchFamily="49" charset="-127"/>
+                <a:hlinkClick r:id="rId4"/>
+              </a:rPr>
+              <a:t>Generative/</a:t>
+            </a:r>
+            <a:r>
+              <a:rPr lang="en-US" altLang="ko-KR" sz="2000" dirty="0" err="1">
+                <a:latin typeface="D2Coding" panose="020B0609020101020101" pitchFamily="49" charset="-127"/>
+                <a:ea typeface="D2Coding" panose="020B0609020101020101" pitchFamily="49" charset="-127"/>
+                <a:hlinkClick r:id="rId4"/>
+              </a:rPr>
+              <a:t>cvae</a:t>
+            </a:r>
+            <a:endParaRPr lang="ko-KR" altLang="en-US" sz="2000" dirty="0">
+              <a:latin typeface="D2Coding" panose="020B0609020101020101" pitchFamily="49" charset="-127"/>
+              <a:ea typeface="D2Coding" panose="020B0609020101020101" pitchFamily="49" charset="-127"/>
+            </a:endParaRPr>
+          </a:p>
+        </p:txBody>
+      </p:sp>
+    </p:spTree>
+    <p:extLst>
+      <p:ext uri="{BB962C8B-B14F-4D97-AF65-F5344CB8AC3E}">
+        <p14:creationId xmlns:p14="http://schemas.microsoft.com/office/powerpoint/2010/main" val="668551498"/>
       </p:ext>
     </p:extLst>
   </p:cSld>
@@ -12029,7 +14875,7 @@
         <p:cNvPr id="1" name="">
           <a:extLst>
             <a:ext uri="{FF2B5EF4-FFF2-40B4-BE49-F238E27FC236}">
-              <a16:creationId xmlns:a16="http://schemas.microsoft.com/office/drawing/2014/main" id="{448AE45B-DED7-1C98-3C49-D10799CCA495}"/>
+              <a16:creationId xmlns:a16="http://schemas.microsoft.com/office/drawing/2014/main" id="{3E990FD7-A050-92C9-D55B-DBE0ABC5CC82}"/>
             </a:ext>
           </a:extLst>
         </p:cNvPr>
@@ -12049,7 +14895,7 @@
           <p:cNvPr id="2" name="제목 1">
             <a:extLst>
               <a:ext uri="{FF2B5EF4-FFF2-40B4-BE49-F238E27FC236}">
-                <a16:creationId xmlns:a16="http://schemas.microsoft.com/office/drawing/2014/main" id="{95E92FD1-6FA2-73C5-E656-2734EE17C2AF}"/>
+                <a16:creationId xmlns:a16="http://schemas.microsoft.com/office/drawing/2014/main" id="{CBE6F90A-0CB3-0392-D4C4-DB0D5F9DB99F}"/>
               </a:ext>
             </a:extLst>
           </p:cNvPr>
@@ -12078,14 +14924,53 @@
               </a:lnSpc>
             </a:pPr>
             <a:r>
-              <a:rPr lang="en-US" altLang="ko-KR" sz="5400" dirty="0" err="1">
+              <a:rPr lang="en-US" altLang="ko-KR" sz="4400" dirty="0">
                 <a:solidFill>
                   <a:schemeClr val="bg1"/>
                 </a:solidFill>
                 <a:latin typeface="D2Coding" panose="020B0609020101020101" pitchFamily="49" charset="-127"/>
                 <a:ea typeface="D2Coding" panose="020B0609020101020101" pitchFamily="49" charset="-127"/>
               </a:rPr>
-              <a:t>AutoEncoder</a:t>
+              <a:t>Dimension</a:t>
+            </a:r>
+            <a:r>
+              <a:rPr lang="ko-KR" altLang="en-US" sz="4400" dirty="0">
+                <a:solidFill>
+                  <a:schemeClr val="bg1"/>
+                </a:solidFill>
+                <a:latin typeface="D2Coding" panose="020B0609020101020101" pitchFamily="49" charset="-127"/>
+                <a:ea typeface="D2Coding" panose="020B0609020101020101" pitchFamily="49" charset="-127"/>
+              </a:rPr>
+              <a:t> </a:t>
+            </a:r>
+            <a:r>
+              <a:rPr lang="en-US" altLang="ko-KR" sz="4400" dirty="0">
+                <a:solidFill>
+                  <a:schemeClr val="bg1"/>
+                </a:solidFill>
+                <a:latin typeface="D2Coding" panose="020B0609020101020101" pitchFamily="49" charset="-127"/>
+                <a:ea typeface="D2Coding" panose="020B0609020101020101" pitchFamily="49" charset="-127"/>
+              </a:rPr>
+              <a:t>reduction</a:t>
+            </a:r>
+            <a:br>
+              <a:rPr lang="en-US" altLang="ko-KR" sz="4400" dirty="0">
+                <a:solidFill>
+                  <a:schemeClr val="bg1"/>
+                </a:solidFill>
+                <a:latin typeface="D2Coding" panose="020B0609020101020101" pitchFamily="49" charset="-127"/>
+                <a:ea typeface="D2Coding" panose="020B0609020101020101" pitchFamily="49" charset="-127"/>
+              </a:rPr>
+            </a:br>
+            <a:r>
+              <a:rPr lang="en-US" altLang="ko-KR" sz="3200" dirty="0">
+                <a:solidFill>
+                  <a:schemeClr val="bg1"/>
+                </a:solidFill>
+                <a:latin typeface="D2Coding" panose="020B0609020101020101" pitchFamily="49" charset="-127"/>
+                <a:ea typeface="D2Coding" panose="020B0609020101020101" pitchFamily="49" charset="-127"/>
+              </a:rPr>
+              <a:t>Linear/Non-Linear</a:t>
             </a:r>
             <a:endParaRPr lang="ko-KR" altLang="en-US" sz="4400" dirty="0">
               <a:solidFill>
@@ -12100,7 +14985,7 @@
     </p:spTree>
     <p:extLst>
       <p:ext uri="{BB962C8B-B14F-4D97-AF65-F5344CB8AC3E}">
-        <p14:creationId xmlns:p14="http://schemas.microsoft.com/office/powerpoint/2010/main" val="2375128833"/>
+        <p14:creationId xmlns:p14="http://schemas.microsoft.com/office/powerpoint/2010/main" val="2484232252"/>
       </p:ext>
     </p:extLst>
   </p:cSld>
@@ -12118,7 +15003,7 @@
         <p:cNvPr id="1" name="">
           <a:extLst>
             <a:ext uri="{FF2B5EF4-FFF2-40B4-BE49-F238E27FC236}">
-              <a16:creationId xmlns:a16="http://schemas.microsoft.com/office/drawing/2014/main" id="{A5606F2B-CE90-D579-2B88-0A5E99C04A73}"/>
+              <a16:creationId xmlns:a16="http://schemas.microsoft.com/office/drawing/2014/main" id="{D96D226C-24EB-9585-A96D-879EDE3E17D8}"/>
             </a:ext>
           </a:extLst>
         </p:cNvPr>
@@ -12138,7 +15023,7 @@
           <p:cNvPr id="3" name="제목 1">
             <a:extLst>
               <a:ext uri="{FF2B5EF4-FFF2-40B4-BE49-F238E27FC236}">
-                <a16:creationId xmlns:a16="http://schemas.microsoft.com/office/drawing/2014/main" id="{9F8CA659-6149-EDE3-2FD5-523267A87FFD}"/>
+                <a16:creationId xmlns:a16="http://schemas.microsoft.com/office/drawing/2014/main" id="{59B51D12-91CF-52CE-301F-ED40F23D5B92}"/>
               </a:ext>
             </a:extLst>
           </p:cNvPr>
@@ -12193,7 +15078,7 @@
                 <a:ea typeface="D2Coding" panose="020B0609020101020101" pitchFamily="49" charset="-127"/>
                 <a:cs typeface="Segoe UI Light" panose="020B0502040204020203" pitchFamily="34" charset="0"/>
               </a:rPr>
-              <a:t>Autoencoders </a:t>
+              <a:t>The curse of dimensionality </a:t>
             </a:r>
             <a:endParaRPr lang="ko-KR" altLang="en-US" sz="2800" cap="none" dirty="0">
               <a:solidFill>
@@ -12208,37 +15093,24 @@
           </a:p>
         </p:txBody>
       </p:sp>
-      <p:pic>
-        <p:nvPicPr>
-          <p:cNvPr id="2050" name="Picture 2">
+      <p:sp>
+        <p:nvSpPr>
+          <p:cNvPr id="2" name="AutoShape 2" descr="The curse of dimensionality. Adding dimensions stretches the points apart making high-dimensional data extremely sparse and uniformly distributed">
             <a:extLst>
               <a:ext uri="{FF2B5EF4-FFF2-40B4-BE49-F238E27FC236}">
-                <a16:creationId xmlns:a16="http://schemas.microsoft.com/office/drawing/2014/main" id="{5EFE7053-F270-ACA7-0EE4-A7134C61EAAD}"/>
+                <a16:creationId xmlns:a16="http://schemas.microsoft.com/office/drawing/2014/main" id="{0AACD530-C9AD-2C71-9511-4F29F07CBF77}"/>
               </a:ext>
             </a:extLst>
           </p:cNvPr>
-          <p:cNvPicPr>
-            <a:picLocks noChangeAspect="1" noChangeArrowheads="1"/>
-          </p:cNvPicPr>
+          <p:cNvSpPr>
+            <a:spLocks noChangeAspect="1" noChangeArrowheads="1"/>
+          </p:cNvSpPr>
           <p:nvPr/>
-        </p:nvPicPr>
-        <p:blipFill>
-          <a:blip r:embed="rId2">
-            <a:extLst>
-              <a:ext uri="{28A0092B-C50C-407E-A947-70E740481C1C}">
-                <a14:useLocalDpi xmlns:a14="http://schemas.microsoft.com/office/drawing/2010/main" val="0"/>
-              </a:ext>
-            </a:extLst>
-          </a:blip>
-          <a:srcRect/>
-          <a:stretch>
-            <a:fillRect/>
-          </a:stretch>
-        </p:blipFill>
+        </p:nvSpPr>
         <p:spPr bwMode="auto">
           <a:xfrm>
-            <a:off x="1524000" y="1808164"/>
-            <a:ext cx="8848725" cy="4122492"/>
+            <a:off x="5943600" y="3276600"/>
+            <a:ext cx="304800" cy="304800"/>
           </a:xfrm>
           <a:prstGeom prst="rect">
             <a:avLst/>
@@ -12254,13 +15126,24 @@
             </a:ext>
           </a:extLst>
         </p:spPr>
-      </p:pic>
+        <p:txBody>
+          <a:bodyPr vert="horz" wrap="square" lIns="91440" tIns="45720" rIns="91440" bIns="45720" numCol="1" anchor="t" anchorCtr="0" compatLnSpc="1">
+            <a:prstTxWarp prst="textNoShape">
+              <a:avLst/>
+            </a:prstTxWarp>
+          </a:bodyPr>
+          <a:lstStyle/>
+          <a:p>
+            <a:endParaRPr lang="ko-KR" altLang="en-US"/>
+          </a:p>
+        </p:txBody>
+      </p:sp>
       <p:sp>
         <p:nvSpPr>
-          <p:cNvPr id="4" name="TextBox 3">
+          <p:cNvPr id="6" name="TextBox 5">
             <a:extLst>
               <a:ext uri="{FF2B5EF4-FFF2-40B4-BE49-F238E27FC236}">
-                <a16:creationId xmlns:a16="http://schemas.microsoft.com/office/drawing/2014/main" id="{CE9417FF-04F4-0DD8-35F5-0BB01AE0AB91}"/>
+                <a16:creationId xmlns:a16="http://schemas.microsoft.com/office/drawing/2014/main" id="{81F82DD7-DAB3-D851-7E45-515CE0B3E7BA}"/>
               </a:ext>
             </a:extLst>
           </p:cNvPr>
@@ -12269,8 +15152,8 @@
         </p:nvSpPr>
         <p:spPr>
           <a:xfrm>
-            <a:off x="1524000" y="6006685"/>
-            <a:ext cx="6096000" cy="307777"/>
+            <a:off x="1323975" y="5728938"/>
+            <a:ext cx="9802992" cy="523220"/>
           </a:xfrm>
           <a:prstGeom prst="rect">
             <a:avLst/>
@@ -12283,32 +15166,57 @@
           </a:bodyPr>
           <a:lstStyle/>
           <a:p>
-            <a:r>
-              <a:rPr lang="en-US" altLang="ko-KR" sz="1400" dirty="0">
-                <a:latin typeface="D2Coding" panose="020B0609020101020101" pitchFamily="49" charset="-127"/>
-                <a:ea typeface="D2Coding" panose="020B0609020101020101" pitchFamily="49" charset="-127"/>
-                <a:hlinkClick r:id="rId3"/>
-              </a:rPr>
-              <a:t>https://lilianweng.github.io/posts/2018-08-12-vae/</a:t>
-            </a:r>
-            <a:r>
-              <a:rPr lang="en-US" altLang="ko-KR" sz="1400" dirty="0">
-                <a:latin typeface="D2Coding" panose="020B0609020101020101" pitchFamily="49" charset="-127"/>
-                <a:ea typeface="D2Coding" panose="020B0609020101020101" pitchFamily="49" charset="-127"/>
-              </a:rPr>
-              <a:t> </a:t>
-            </a:r>
-            <a:endParaRPr lang="ko-KR" altLang="en-US" sz="1400" dirty="0">
-              <a:latin typeface="D2Coding" panose="020B0609020101020101" pitchFamily="49" charset="-127"/>
-              <a:ea typeface="D2Coding" panose="020B0609020101020101" pitchFamily="49" charset="-127"/>
-            </a:endParaRPr>
+            <a:pPr algn="l">
+              <a:buNone/>
+            </a:pPr>
+            <a:r>
+              <a:rPr lang="en-US" altLang="ko-KR" sz="1400" b="0" i="0" dirty="0">
+                <a:solidFill>
+                  <a:srgbClr val="111111"/>
+                </a:solidFill>
+                <a:effectLst/>
+                <a:latin typeface="D2Coding" panose="020B0609020101020101" pitchFamily="49" charset="-127"/>
+                <a:ea typeface="D2Coding" panose="020B0609020101020101" pitchFamily="49" charset="-127"/>
+              </a:rPr>
+              <a:t>The curse of dimensionality. Adding dimensions stretches the points apart making high-dimensional data extremely sparse and uniformly distributed</a:t>
+            </a:r>
           </a:p>
         </p:txBody>
       </p:sp>
+      <p:pic>
+        <p:nvPicPr>
+          <p:cNvPr id="8" name="그림 7">
+            <a:extLst>
+              <a:ext uri="{FF2B5EF4-FFF2-40B4-BE49-F238E27FC236}">
+                <a16:creationId xmlns:a16="http://schemas.microsoft.com/office/drawing/2014/main" id="{0B1301F1-004E-A86C-1126-E249B6F8CBB3}"/>
+              </a:ext>
+            </a:extLst>
+          </p:cNvPr>
+          <p:cNvPicPr>
+            <a:picLocks noChangeAspect="1"/>
+          </p:cNvPicPr>
+          <p:nvPr/>
+        </p:nvPicPr>
+        <p:blipFill>
+          <a:blip r:embed="rId2"/>
+          <a:stretch>
+            <a:fillRect/>
+          </a:stretch>
+        </p:blipFill>
+        <p:spPr>
+          <a:xfrm>
+            <a:off x="1130344" y="2226185"/>
+            <a:ext cx="9996623" cy="3260215"/>
+          </a:xfrm>
+          <a:prstGeom prst="rect">
+            <a:avLst/>
+          </a:prstGeom>
+        </p:spPr>
+      </p:pic>
     </p:spTree>
     <p:extLst>
       <p:ext uri="{BB962C8B-B14F-4D97-AF65-F5344CB8AC3E}">
-        <p14:creationId xmlns:p14="http://schemas.microsoft.com/office/powerpoint/2010/main" val="2177943110"/>
+        <p14:creationId xmlns:p14="http://schemas.microsoft.com/office/powerpoint/2010/main" val="604073444"/>
       </p:ext>
     </p:extLst>
   </p:cSld>
@@ -12326,7 +15234,7 @@
         <p:cNvPr id="1" name="">
           <a:extLst>
             <a:ext uri="{FF2B5EF4-FFF2-40B4-BE49-F238E27FC236}">
-              <a16:creationId xmlns:a16="http://schemas.microsoft.com/office/drawing/2014/main" id="{5A5955C9-5FA3-824C-2018-F1AE5DBC28E1}"/>
+              <a16:creationId xmlns:a16="http://schemas.microsoft.com/office/drawing/2014/main" id="{4982B515-9CA1-0B60-170B-E39A98641183}"/>
             </a:ext>
           </a:extLst>
         </p:cNvPr>
@@ -12346,7 +15254,7 @@
           <p:cNvPr id="3" name="제목 1">
             <a:extLst>
               <a:ext uri="{FF2B5EF4-FFF2-40B4-BE49-F238E27FC236}">
-                <a16:creationId xmlns:a16="http://schemas.microsoft.com/office/drawing/2014/main" id="{F92444F5-6D20-4CA4-41CD-0088D7CED387}"/>
+                <a16:creationId xmlns:a16="http://schemas.microsoft.com/office/drawing/2014/main" id="{97EA7E0D-FC70-C4C0-A53A-1185CB2877BF}"/>
               </a:ext>
             </a:extLst>
           </p:cNvPr>
@@ -12401,7 +15309,7 @@
                 <a:ea typeface="D2Coding" panose="020B0609020101020101" pitchFamily="49" charset="-127"/>
                 <a:cs typeface="Segoe UI Light" panose="020B0502040204020203" pitchFamily="34" charset="0"/>
               </a:rPr>
-              <a:t>Autoencoders </a:t>
+              <a:t>Dimensionality Reduction</a:t>
             </a:r>
             <a:endParaRPr lang="ko-KR" altLang="en-US" sz="2800" cap="none" dirty="0">
               <a:solidFill>
@@ -12418,56 +15326,10 @@
       </p:sp>
       <p:sp>
         <p:nvSpPr>
-          <p:cNvPr id="4" name="TextBox 3">
+          <p:cNvPr id="2" name="AutoShape 2" descr="The curse of dimensionality. Adding dimensions stretches the points apart making high-dimensional data extremely sparse and uniformly distributed">
             <a:extLst>
               <a:ext uri="{FF2B5EF4-FFF2-40B4-BE49-F238E27FC236}">
-                <a16:creationId xmlns:a16="http://schemas.microsoft.com/office/drawing/2014/main" id="{2F320060-A4EA-2828-D79C-3EE57139181F}"/>
-              </a:ext>
-            </a:extLst>
-          </p:cNvPr>
-          <p:cNvSpPr txBox="1"/>
-          <p:nvPr/>
-        </p:nvSpPr>
-        <p:spPr>
-          <a:xfrm>
-            <a:off x="2604526" y="6068240"/>
-            <a:ext cx="6096000" cy="307777"/>
-          </a:xfrm>
-          <a:prstGeom prst="rect">
-            <a:avLst/>
-          </a:prstGeom>
-          <a:noFill/>
-        </p:spPr>
-        <p:txBody>
-          <a:bodyPr wrap="square">
-            <a:spAutoFit/>
-          </a:bodyPr>
-          <a:lstStyle/>
-          <a:p>
-            <a:r>
-              <a:rPr lang="ko-KR" altLang="en-US" sz="1400" dirty="0">
-                <a:latin typeface="D2Coding" panose="020B0609020101020101" pitchFamily="49" charset="-127"/>
-                <a:ea typeface="D2Coding" panose="020B0609020101020101" pitchFamily="49" charset="-127"/>
-                <a:hlinkClick r:id="rId2"/>
-              </a:rPr>
-              <a:t>https://www.geeksforgeeks.org/deep-learning/types-of-autoencoders/</a:t>
-            </a:r>
-            <a:r>
-              <a:rPr lang="ko-KR" altLang="en-US" sz="1400" dirty="0">
-                <a:latin typeface="D2Coding" panose="020B0609020101020101" pitchFamily="49" charset="-127"/>
-                <a:ea typeface="D2Coding" panose="020B0609020101020101" pitchFamily="49" charset="-127"/>
-              </a:rPr>
-              <a:t> </a:t>
-            </a:r>
-          </a:p>
-        </p:txBody>
-      </p:sp>
-      <p:sp>
-        <p:nvSpPr>
-          <p:cNvPr id="5" name="AutoShape 2" descr="nueral">
-            <a:extLst>
-              <a:ext uri="{FF2B5EF4-FFF2-40B4-BE49-F238E27FC236}">
-                <a16:creationId xmlns:a16="http://schemas.microsoft.com/office/drawing/2014/main" id="{91714E5F-61DB-E17F-BC52-BE9F4E4401A3}"/>
+                <a16:creationId xmlns:a16="http://schemas.microsoft.com/office/drawing/2014/main" id="{23ECC2F2-2168-8C81-6FAC-7DFB4A8723ED}"/>
               </a:ext>
             </a:extLst>
           </p:cNvPr>
@@ -12509,10 +15371,10 @@
       </p:sp>
       <p:pic>
         <p:nvPicPr>
-          <p:cNvPr id="7" name="그림 6">
+          <p:cNvPr id="4" name="그림 3">
             <a:extLst>
               <a:ext uri="{FF2B5EF4-FFF2-40B4-BE49-F238E27FC236}">
-                <a16:creationId xmlns:a16="http://schemas.microsoft.com/office/drawing/2014/main" id="{C50ED493-D3B6-5B03-31D9-27588704BC45}"/>
+                <a16:creationId xmlns:a16="http://schemas.microsoft.com/office/drawing/2014/main" id="{1635F914-D349-45EE-8D1B-8D0A263C4243}"/>
               </a:ext>
             </a:extLst>
           </p:cNvPr>
@@ -12522,15 +15384,15 @@
           <p:nvPr/>
         </p:nvPicPr>
         <p:blipFill>
-          <a:blip r:embed="rId3"/>
+          <a:blip r:embed="rId2"/>
           <a:stretch>
             <a:fillRect/>
           </a:stretch>
         </p:blipFill>
         <p:spPr>
           <a:xfrm>
-            <a:off x="2449540" y="1786711"/>
-            <a:ext cx="6683319" cy="4122777"/>
+            <a:off x="1311498" y="2200275"/>
+            <a:ext cx="9390992" cy="3209189"/>
           </a:xfrm>
           <a:prstGeom prst="rect">
             <a:avLst/>
@@ -12540,7 +15402,7 @@
     </p:spTree>
     <p:extLst>
       <p:ext uri="{BB962C8B-B14F-4D97-AF65-F5344CB8AC3E}">
-        <p14:creationId xmlns:p14="http://schemas.microsoft.com/office/powerpoint/2010/main" val="2539903926"/>
+        <p14:creationId xmlns:p14="http://schemas.microsoft.com/office/powerpoint/2010/main" val="3183544477"/>
       </p:ext>
     </p:extLst>
   </p:cSld>

--- a/Variational Autoencoders.pptx
+++ b/Variational Autoencoders.pptx
@@ -5,10 +5,10 @@
     <p:sldMasterId id="2147483660" r:id="rId1"/>
   </p:sldMasterIdLst>
   <p:notesMasterIdLst>
-    <p:notesMasterId r:id="rId32"/>
+    <p:notesMasterId r:id="rId33"/>
   </p:notesMasterIdLst>
   <p:handoutMasterIdLst>
-    <p:handoutMasterId r:id="rId33"/>
+    <p:handoutMasterId r:id="rId34"/>
   </p:handoutMasterIdLst>
   <p:sldIdLst>
     <p:sldId id="256" r:id="rId2"/>
@@ -35,12 +35,13 @@
     <p:sldId id="1355" r:id="rId23"/>
     <p:sldId id="1360" r:id="rId24"/>
     <p:sldId id="1349" r:id="rId25"/>
-    <p:sldId id="1351" r:id="rId26"/>
-    <p:sldId id="1365" r:id="rId27"/>
-    <p:sldId id="1358" r:id="rId28"/>
-    <p:sldId id="1357" r:id="rId29"/>
-    <p:sldId id="1366" r:id="rId30"/>
-    <p:sldId id="1376" r:id="rId31"/>
+    <p:sldId id="1377" r:id="rId26"/>
+    <p:sldId id="1351" r:id="rId27"/>
+    <p:sldId id="1365" r:id="rId28"/>
+    <p:sldId id="1358" r:id="rId29"/>
+    <p:sldId id="1357" r:id="rId30"/>
+    <p:sldId id="1366" r:id="rId31"/>
+    <p:sldId id="1376" r:id="rId32"/>
   </p:sldIdLst>
   <p:sldSz cx="12192000" cy="6858000"/>
   <p:notesSz cx="6858000" cy="9144000"/>
@@ -172,6 +173,7 @@
             <p14:sldId id="1355"/>
             <p14:sldId id="1360"/>
             <p14:sldId id="1349"/>
+            <p14:sldId id="1377"/>
             <p14:sldId id="1351"/>
             <p14:sldId id="1365"/>
             <p14:sldId id="1358"/>
@@ -8477,6 +8479,282 @@
         <p:cNvPr id="1" name="">
           <a:extLst>
             <a:ext uri="{FF2B5EF4-FFF2-40B4-BE49-F238E27FC236}">
+              <a16:creationId xmlns:a16="http://schemas.microsoft.com/office/drawing/2014/main" id="{4C812224-2CF6-01C8-921F-61545FCA4836}"/>
+            </a:ext>
+          </a:extLst>
+        </p:cNvPr>
+        <p:cNvGrpSpPr/>
+        <p:nvPr/>
+      </p:nvGrpSpPr>
+      <p:grpSpPr>
+        <a:xfrm>
+          <a:off x="0" y="0"/>
+          <a:ext cx="0" cy="0"/>
+          <a:chOff x="0" y="0"/>
+          <a:chExt cx="0" cy="0"/>
+        </a:xfrm>
+      </p:grpSpPr>
+      <p:sp>
+        <p:nvSpPr>
+          <p:cNvPr id="3" name="제목 1">
+            <a:extLst>
+              <a:ext uri="{FF2B5EF4-FFF2-40B4-BE49-F238E27FC236}">
+                <a16:creationId xmlns:a16="http://schemas.microsoft.com/office/drawing/2014/main" id="{EDC6DCCA-6712-13C1-8E72-AA7FE403A08A}"/>
+              </a:ext>
+            </a:extLst>
+          </p:cNvPr>
+          <p:cNvSpPr txBox="1">
+            <a:spLocks/>
+          </p:cNvSpPr>
+          <p:nvPr/>
+        </p:nvSpPr>
+        <p:spPr>
+          <a:xfrm>
+            <a:off x="475645" y="481983"/>
+            <a:ext cx="10353762" cy="766439"/>
+          </a:xfrm>
+          <a:prstGeom prst="rect">
+            <a:avLst/>
+          </a:prstGeom>
+        </p:spPr>
+        <p:txBody>
+          <a:bodyPr vert="horz" lIns="91440" tIns="45720" rIns="91440" bIns="45720" rtlCol="0" anchor="ctr">
+            <a:normAutofit/>
+          </a:bodyPr>
+          <a:lstStyle>
+            <a:lvl1pPr algn="ctr" defTabSz="914400" rtl="0" eaLnBrk="1" latinLnBrk="1" hangingPunct="1">
+              <a:lnSpc>
+                <a:spcPct val="90000"/>
+              </a:lnSpc>
+              <a:spcBef>
+                <a:spcPct val="0"/>
+              </a:spcBef>
+              <a:buNone/>
+              <a:defRPr sz="3200" kern="1200" cap="all" baseline="0">
+                <a:solidFill>
+                  <a:schemeClr val="tx1"/>
+                </a:solidFill>
+                <a:effectLst/>
+                <a:latin typeface="Batang" panose="02030600000101010101" pitchFamily="18" charset="-127"/>
+                <a:ea typeface="Batang" panose="02030600000101010101" pitchFamily="18" charset="-127"/>
+                <a:cs typeface="+mj-cs"/>
+              </a:defRPr>
+            </a:lvl1pPr>
+          </a:lstStyle>
+          <a:p>
+            <a:pPr algn="l"/>
+            <a:r>
+              <a:rPr lang="en-US" altLang="ko-KR" sz="2800" cap="none" dirty="0">
+                <a:solidFill>
+                  <a:schemeClr val="bg2">
+                    <a:lumMod val="25000"/>
+                  </a:schemeClr>
+                </a:solidFill>
+                <a:latin typeface="D2Coding" panose="020B0609020101020101" pitchFamily="49" charset="-127"/>
+                <a:ea typeface="D2Coding" panose="020B0609020101020101" pitchFamily="49" charset="-127"/>
+                <a:cs typeface="Segoe UI Light" panose="020B0502040204020203" pitchFamily="34" charset="0"/>
+              </a:rPr>
+              <a:t>Variational Autoencoders </a:t>
+            </a:r>
+            <a:endParaRPr lang="ko-KR" altLang="en-US" sz="2800" cap="none" dirty="0">
+              <a:solidFill>
+                <a:schemeClr val="bg2">
+                  <a:lumMod val="25000"/>
+                </a:schemeClr>
+              </a:solidFill>
+              <a:latin typeface="D2Coding" panose="020B0609020101020101" pitchFamily="49" charset="-127"/>
+              <a:ea typeface="D2Coding" panose="020B0609020101020101" pitchFamily="49" charset="-127"/>
+              <a:cs typeface="Segoe UI Light" panose="020B0502040204020203" pitchFamily="34" charset="0"/>
+            </a:endParaRPr>
+          </a:p>
+        </p:txBody>
+      </p:sp>
+      <p:sp>
+        <p:nvSpPr>
+          <p:cNvPr id="8" name="AutoShape 4" descr="{\displaystyle x}">
+            <a:extLst>
+              <a:ext uri="{FF2B5EF4-FFF2-40B4-BE49-F238E27FC236}">
+                <a16:creationId xmlns:a16="http://schemas.microsoft.com/office/drawing/2014/main" id="{01647269-D6E0-C149-E21A-8CCFC6653156}"/>
+              </a:ext>
+            </a:extLst>
+          </p:cNvPr>
+          <p:cNvSpPr>
+            <a:spLocks noChangeAspect="1" noChangeArrowheads="1"/>
+          </p:cNvSpPr>
+          <p:nvPr/>
+        </p:nvSpPr>
+        <p:spPr bwMode="auto">
+          <a:xfrm flipV="1">
+            <a:off x="3894138" y="-190182"/>
+            <a:ext cx="152400" cy="45719"/>
+          </a:xfrm>
+          <a:prstGeom prst="rect">
+            <a:avLst/>
+          </a:prstGeom>
+          <a:noFill/>
+          <a:extLst>
+            <a:ext uri="{909E8E84-426E-40DD-AFC4-6F175D3DCCD1}">
+              <a14:hiddenFill xmlns:a14="http://schemas.microsoft.com/office/drawing/2010/main">
+                <a:solidFill>
+                  <a:srgbClr val="FFFFFF"/>
+                </a:solidFill>
+              </a14:hiddenFill>
+            </a:ext>
+          </a:extLst>
+        </p:spPr>
+        <p:txBody>
+          <a:bodyPr vert="horz" wrap="square" lIns="91440" tIns="45720" rIns="91440" bIns="45720" numCol="1" anchor="t" anchorCtr="0" compatLnSpc="1">
+            <a:prstTxWarp prst="textNoShape">
+              <a:avLst/>
+            </a:prstTxWarp>
+          </a:bodyPr>
+          <a:lstStyle/>
+          <a:p>
+            <a:endParaRPr lang="ko-KR" altLang="en-US"/>
+          </a:p>
+        </p:txBody>
+      </p:sp>
+      <p:sp>
+        <p:nvSpPr>
+          <p:cNvPr id="11" name="AutoShape 5" descr="{\displaystyle {x'}}">
+            <a:extLst>
+              <a:ext uri="{FF2B5EF4-FFF2-40B4-BE49-F238E27FC236}">
+                <a16:creationId xmlns:a16="http://schemas.microsoft.com/office/drawing/2014/main" id="{4C0C9A2C-24BA-4516-8AA1-3DFC8862D023}"/>
+              </a:ext>
+            </a:extLst>
+          </p:cNvPr>
+          <p:cNvSpPr>
+            <a:spLocks noChangeAspect="1" noChangeArrowheads="1"/>
+          </p:cNvSpPr>
+          <p:nvPr/>
+        </p:nvSpPr>
+        <p:spPr bwMode="auto">
+          <a:xfrm flipV="1">
+            <a:off x="12719050" y="-190182"/>
+            <a:ext cx="152400" cy="45719"/>
+          </a:xfrm>
+          <a:prstGeom prst="rect">
+            <a:avLst/>
+          </a:prstGeom>
+          <a:noFill/>
+          <a:extLst>
+            <a:ext uri="{909E8E84-426E-40DD-AFC4-6F175D3DCCD1}">
+              <a14:hiddenFill xmlns:a14="http://schemas.microsoft.com/office/drawing/2010/main">
+                <a:solidFill>
+                  <a:srgbClr val="FFFFFF"/>
+                </a:solidFill>
+              </a14:hiddenFill>
+            </a:ext>
+          </a:extLst>
+        </p:spPr>
+        <p:txBody>
+          <a:bodyPr vert="horz" wrap="square" lIns="91440" tIns="45720" rIns="91440" bIns="45720" numCol="1" anchor="t" anchorCtr="0" compatLnSpc="1">
+            <a:prstTxWarp prst="textNoShape">
+              <a:avLst/>
+            </a:prstTxWarp>
+          </a:bodyPr>
+          <a:lstStyle/>
+          <a:p>
+            <a:endParaRPr lang="ko-KR" altLang="en-US"/>
+          </a:p>
+        </p:txBody>
+      </p:sp>
+      <p:sp>
+        <p:nvSpPr>
+          <p:cNvPr id="12" name="AutoShape 6" descr="{\displaystyle x}">
+            <a:extLst>
+              <a:ext uri="{FF2B5EF4-FFF2-40B4-BE49-F238E27FC236}">
+                <a16:creationId xmlns:a16="http://schemas.microsoft.com/office/drawing/2014/main" id="{9A979A12-FF09-51C2-510E-816F9D2132C1}"/>
+              </a:ext>
+            </a:extLst>
+          </p:cNvPr>
+          <p:cNvSpPr>
+            <a:spLocks noChangeAspect="1" noChangeArrowheads="1"/>
+          </p:cNvSpPr>
+          <p:nvPr/>
+        </p:nvSpPr>
+        <p:spPr bwMode="auto">
+          <a:xfrm flipV="1">
+            <a:off x="14535150" y="-190182"/>
+            <a:ext cx="152400" cy="45719"/>
+          </a:xfrm>
+          <a:prstGeom prst="rect">
+            <a:avLst/>
+          </a:prstGeom>
+          <a:noFill/>
+          <a:extLst>
+            <a:ext uri="{909E8E84-426E-40DD-AFC4-6F175D3DCCD1}">
+              <a14:hiddenFill xmlns:a14="http://schemas.microsoft.com/office/drawing/2010/main">
+                <a:solidFill>
+                  <a:srgbClr val="FFFFFF"/>
+                </a:solidFill>
+              </a14:hiddenFill>
+            </a:ext>
+          </a:extLst>
+        </p:spPr>
+        <p:txBody>
+          <a:bodyPr vert="horz" wrap="square" lIns="91440" tIns="45720" rIns="91440" bIns="45720" numCol="1" anchor="t" anchorCtr="0" compatLnSpc="1">
+            <a:prstTxWarp prst="textNoShape">
+              <a:avLst/>
+            </a:prstTxWarp>
+          </a:bodyPr>
+          <a:lstStyle/>
+          <a:p>
+            <a:endParaRPr lang="ko-KR" altLang="en-US"/>
+          </a:p>
+        </p:txBody>
+      </p:sp>
+      <p:pic>
+        <p:nvPicPr>
+          <p:cNvPr id="16" name="그림 15">
+            <a:extLst>
+              <a:ext uri="{FF2B5EF4-FFF2-40B4-BE49-F238E27FC236}">
+                <a16:creationId xmlns:a16="http://schemas.microsoft.com/office/drawing/2014/main" id="{E72851DB-A449-0AF4-B8B5-EC8DD5390373}"/>
+              </a:ext>
+            </a:extLst>
+          </p:cNvPr>
+          <p:cNvPicPr>
+            <a:picLocks noChangeAspect="1"/>
+          </p:cNvPicPr>
+          <p:nvPr/>
+        </p:nvPicPr>
+        <p:blipFill>
+          <a:blip r:embed="rId2"/>
+          <a:stretch>
+            <a:fillRect/>
+          </a:stretch>
+        </p:blipFill>
+        <p:spPr>
+          <a:xfrm>
+            <a:off x="1487537" y="2080434"/>
+            <a:ext cx="8902730" cy="2697132"/>
+          </a:xfrm>
+          <a:prstGeom prst="rect">
+            <a:avLst/>
+          </a:prstGeom>
+        </p:spPr>
+      </p:pic>
+    </p:spTree>
+    <p:extLst>
+      <p:ext uri="{BB962C8B-B14F-4D97-AF65-F5344CB8AC3E}">
+        <p14:creationId xmlns:p14="http://schemas.microsoft.com/office/powerpoint/2010/main" val="2787152255"/>
+      </p:ext>
+    </p:extLst>
+  </p:cSld>
+  <p:clrMapOvr>
+    <a:masterClrMapping/>
+  </p:clrMapOvr>
+</p:sld>
+</file>
+
+<file path=ppt/slides/slide26.xml><?xml version="1.0" encoding="utf-8"?>
+<p:sld xmlns:a="http://schemas.openxmlformats.org/drawingml/2006/main" xmlns:r="http://schemas.openxmlformats.org/officeDocument/2006/relationships" xmlns:p="http://schemas.openxmlformats.org/presentationml/2006/main">
+  <p:cSld>
+    <p:spTree>
+      <p:nvGrpSpPr>
+        <p:cNvPr id="1" name="">
+          <a:extLst>
+            <a:ext uri="{FF2B5EF4-FFF2-40B4-BE49-F238E27FC236}">
               <a16:creationId xmlns:a16="http://schemas.microsoft.com/office/drawing/2014/main" id="{6DF314EA-D872-2165-B417-661EEBB64EE8}"/>
             </a:ext>
           </a:extLst>
@@ -8673,7 +8951,7 @@
 </p:sld>
 </file>
 
-<file path=ppt/slides/slide26.xml><?xml version="1.0" encoding="utf-8"?>
+<file path=ppt/slides/slide27.xml><?xml version="1.0" encoding="utf-8"?>
 <p:sld xmlns:a="http://schemas.openxmlformats.org/drawingml/2006/main" xmlns:r="http://schemas.openxmlformats.org/officeDocument/2006/relationships" xmlns:p="http://schemas.openxmlformats.org/presentationml/2006/main">
   <p:cSld>
     <p:spTree>
@@ -8939,7 +9217,7 @@
 </p:sld>
 </file>
 
-<file path=ppt/slides/slide27.xml><?xml version="1.0" encoding="utf-8"?>
+<file path=ppt/slides/slide28.xml><?xml version="1.0" encoding="utf-8"?>
 <p:sld xmlns:a="http://schemas.openxmlformats.org/drawingml/2006/main" xmlns:r="http://schemas.openxmlformats.org/officeDocument/2006/relationships" xmlns:p="http://schemas.openxmlformats.org/presentationml/2006/main">
   <p:cSld>
     <p:spTree>
@@ -9435,7 +9713,7 @@
 </p:sld>
 </file>
 
-<file path=ppt/slides/slide28.xml><?xml version="1.0" encoding="utf-8"?>
+<file path=ppt/slides/slide29.xml><?xml version="1.0" encoding="utf-8"?>
 <p:sld xmlns:a="http://schemas.openxmlformats.org/drawingml/2006/main" xmlns:r="http://schemas.openxmlformats.org/officeDocument/2006/relationships" xmlns:p="http://schemas.openxmlformats.org/presentationml/2006/main">
   <p:cSld>
     <p:spTree>
@@ -9783,7 +10061,96 @@
 </p:sld>
 </file>
 
-<file path=ppt/slides/slide29.xml><?xml version="1.0" encoding="utf-8"?>
+<file path=ppt/slides/slide3.xml><?xml version="1.0" encoding="utf-8"?>
+<p:sld xmlns:a="http://schemas.openxmlformats.org/drawingml/2006/main" xmlns:r="http://schemas.openxmlformats.org/officeDocument/2006/relationships" xmlns:p="http://schemas.openxmlformats.org/presentationml/2006/main">
+  <p:cSld>
+    <p:spTree>
+      <p:nvGrpSpPr>
+        <p:cNvPr id="1" name="">
+          <a:extLst>
+            <a:ext uri="{FF2B5EF4-FFF2-40B4-BE49-F238E27FC236}">
+              <a16:creationId xmlns:a16="http://schemas.microsoft.com/office/drawing/2014/main" id="{77A6B4A7-594F-3473-B64A-03185EB1FE1D}"/>
+            </a:ext>
+          </a:extLst>
+        </p:cNvPr>
+        <p:cNvGrpSpPr/>
+        <p:nvPr/>
+      </p:nvGrpSpPr>
+      <p:grpSpPr>
+        <a:xfrm>
+          <a:off x="0" y="0"/>
+          <a:ext cx="0" cy="0"/>
+          <a:chOff x="0" y="0"/>
+          <a:chExt cx="0" cy="0"/>
+        </a:xfrm>
+      </p:grpSpPr>
+      <p:sp>
+        <p:nvSpPr>
+          <p:cNvPr id="2" name="제목 1">
+            <a:extLst>
+              <a:ext uri="{FF2B5EF4-FFF2-40B4-BE49-F238E27FC236}">
+                <a16:creationId xmlns:a16="http://schemas.microsoft.com/office/drawing/2014/main" id="{9F2D2E02-3ABD-8B6F-A86C-4C0D1BFEAD1A}"/>
+              </a:ext>
+            </a:extLst>
+          </p:cNvPr>
+          <p:cNvSpPr>
+            <a:spLocks noGrp="1"/>
+          </p:cNvSpPr>
+          <p:nvPr>
+            <p:ph type="ctrTitle"/>
+          </p:nvPr>
+        </p:nvSpPr>
+        <p:spPr>
+          <a:xfrm>
+            <a:off x="838199" y="1164324"/>
+            <a:ext cx="10934701" cy="2387600"/>
+          </a:xfrm>
+        </p:spPr>
+        <p:txBody>
+          <a:bodyPr rtlCol="0" anchor="ctr" anchorCtr="0">
+            <a:normAutofit/>
+          </a:bodyPr>
+          <a:lstStyle/>
+          <a:p>
+            <a:pPr>
+              <a:lnSpc>
+                <a:spcPct val="150000"/>
+              </a:lnSpc>
+            </a:pPr>
+            <a:r>
+              <a:rPr lang="en-US" altLang="ko-KR" sz="5400" dirty="0">
+                <a:solidFill>
+                  <a:schemeClr val="bg1"/>
+                </a:solidFill>
+                <a:latin typeface="D2Coding" panose="020B0609020101020101" pitchFamily="49" charset="-127"/>
+                <a:ea typeface="D2Coding" panose="020B0609020101020101" pitchFamily="49" charset="-127"/>
+              </a:rPr>
+              <a:t>Probability</a:t>
+            </a:r>
+            <a:endParaRPr lang="ko-KR" altLang="en-US" sz="4400" dirty="0">
+              <a:solidFill>
+                <a:schemeClr val="bg1"/>
+              </a:solidFill>
+              <a:latin typeface="D2Coding" panose="020B0609020101020101" pitchFamily="49" charset="-127"/>
+              <a:ea typeface="D2Coding" panose="020B0609020101020101" pitchFamily="49" charset="-127"/>
+            </a:endParaRPr>
+          </a:p>
+        </p:txBody>
+      </p:sp>
+    </p:spTree>
+    <p:extLst>
+      <p:ext uri="{BB962C8B-B14F-4D97-AF65-F5344CB8AC3E}">
+        <p14:creationId xmlns:p14="http://schemas.microsoft.com/office/powerpoint/2010/main" val="1080564212"/>
+      </p:ext>
+    </p:extLst>
+  </p:cSld>
+  <p:clrMapOvr>
+    <a:masterClrMapping/>
+  </p:clrMapOvr>
+</p:sld>
+</file>
+
+<file path=ppt/slides/slide30.xml><?xml version="1.0" encoding="utf-8"?>
 <p:sld xmlns:a="http://schemas.openxmlformats.org/drawingml/2006/main" xmlns:r="http://schemas.openxmlformats.org/officeDocument/2006/relationships" xmlns:p="http://schemas.openxmlformats.org/presentationml/2006/main">
   <p:cSld>
     <p:spTree>
@@ -10149,96 +10516,7 @@
 </p:sld>
 </file>
 
-<file path=ppt/slides/slide3.xml><?xml version="1.0" encoding="utf-8"?>
-<p:sld xmlns:a="http://schemas.openxmlformats.org/drawingml/2006/main" xmlns:r="http://schemas.openxmlformats.org/officeDocument/2006/relationships" xmlns:p="http://schemas.openxmlformats.org/presentationml/2006/main">
-  <p:cSld>
-    <p:spTree>
-      <p:nvGrpSpPr>
-        <p:cNvPr id="1" name="">
-          <a:extLst>
-            <a:ext uri="{FF2B5EF4-FFF2-40B4-BE49-F238E27FC236}">
-              <a16:creationId xmlns:a16="http://schemas.microsoft.com/office/drawing/2014/main" id="{77A6B4A7-594F-3473-B64A-03185EB1FE1D}"/>
-            </a:ext>
-          </a:extLst>
-        </p:cNvPr>
-        <p:cNvGrpSpPr/>
-        <p:nvPr/>
-      </p:nvGrpSpPr>
-      <p:grpSpPr>
-        <a:xfrm>
-          <a:off x="0" y="0"/>
-          <a:ext cx="0" cy="0"/>
-          <a:chOff x="0" y="0"/>
-          <a:chExt cx="0" cy="0"/>
-        </a:xfrm>
-      </p:grpSpPr>
-      <p:sp>
-        <p:nvSpPr>
-          <p:cNvPr id="2" name="제목 1">
-            <a:extLst>
-              <a:ext uri="{FF2B5EF4-FFF2-40B4-BE49-F238E27FC236}">
-                <a16:creationId xmlns:a16="http://schemas.microsoft.com/office/drawing/2014/main" id="{9F2D2E02-3ABD-8B6F-A86C-4C0D1BFEAD1A}"/>
-              </a:ext>
-            </a:extLst>
-          </p:cNvPr>
-          <p:cNvSpPr>
-            <a:spLocks noGrp="1"/>
-          </p:cNvSpPr>
-          <p:nvPr>
-            <p:ph type="ctrTitle"/>
-          </p:nvPr>
-        </p:nvSpPr>
-        <p:spPr>
-          <a:xfrm>
-            <a:off x="838199" y="1164324"/>
-            <a:ext cx="10934701" cy="2387600"/>
-          </a:xfrm>
-        </p:spPr>
-        <p:txBody>
-          <a:bodyPr rtlCol="0" anchor="ctr" anchorCtr="0">
-            <a:normAutofit/>
-          </a:bodyPr>
-          <a:lstStyle/>
-          <a:p>
-            <a:pPr>
-              <a:lnSpc>
-                <a:spcPct val="150000"/>
-              </a:lnSpc>
-            </a:pPr>
-            <a:r>
-              <a:rPr lang="en-US" altLang="ko-KR" sz="5400" dirty="0">
-                <a:solidFill>
-                  <a:schemeClr val="bg1"/>
-                </a:solidFill>
-                <a:latin typeface="D2Coding" panose="020B0609020101020101" pitchFamily="49" charset="-127"/>
-                <a:ea typeface="D2Coding" panose="020B0609020101020101" pitchFamily="49" charset="-127"/>
-              </a:rPr>
-              <a:t>Probability</a:t>
-            </a:r>
-            <a:endParaRPr lang="ko-KR" altLang="en-US" sz="4400" dirty="0">
-              <a:solidFill>
-                <a:schemeClr val="bg1"/>
-              </a:solidFill>
-              <a:latin typeface="D2Coding" panose="020B0609020101020101" pitchFamily="49" charset="-127"/>
-              <a:ea typeface="D2Coding" panose="020B0609020101020101" pitchFamily="49" charset="-127"/>
-            </a:endParaRPr>
-          </a:p>
-        </p:txBody>
-      </p:sp>
-    </p:spTree>
-    <p:extLst>
-      <p:ext uri="{BB962C8B-B14F-4D97-AF65-F5344CB8AC3E}">
-        <p14:creationId xmlns:p14="http://schemas.microsoft.com/office/powerpoint/2010/main" val="1080564212"/>
-      </p:ext>
-    </p:extLst>
-  </p:cSld>
-  <p:clrMapOvr>
-    <a:masterClrMapping/>
-  </p:clrMapOvr>
-</p:sld>
-</file>
-
-<file path=ppt/slides/slide30.xml><?xml version="1.0" encoding="utf-8"?>
+<file path=ppt/slides/slide31.xml><?xml version="1.0" encoding="utf-8"?>
 <p:sld xmlns:a="http://schemas.openxmlformats.org/drawingml/2006/main" xmlns:r="http://schemas.openxmlformats.org/officeDocument/2006/relationships" xmlns:p="http://schemas.openxmlformats.org/presentationml/2006/main">
   <p:cSld>
     <p:spTree>

--- a/Variational Autoencoders.pptx
+++ b/Variational Autoencoders.pptx
@@ -5,10 +5,10 @@
     <p:sldMasterId id="2147483660" r:id="rId1"/>
   </p:sldMasterIdLst>
   <p:notesMasterIdLst>
-    <p:notesMasterId r:id="rId36"/>
+    <p:notesMasterId r:id="rId37"/>
   </p:notesMasterIdLst>
   <p:handoutMasterIdLst>
-    <p:handoutMasterId r:id="rId37"/>
+    <p:handoutMasterId r:id="rId38"/>
   </p:handoutMasterIdLst>
   <p:sldIdLst>
     <p:sldId id="256" r:id="rId2"/>
@@ -30,21 +30,22 @@
     <p:sldId id="1353" r:id="rId18"/>
     <p:sldId id="1348" r:id="rId19"/>
     <p:sldId id="1350" r:id="rId20"/>
-    <p:sldId id="1363" r:id="rId21"/>
-    <p:sldId id="1364" r:id="rId22"/>
-    <p:sldId id="1355" r:id="rId23"/>
-    <p:sldId id="1360" r:id="rId24"/>
-    <p:sldId id="1349" r:id="rId25"/>
-    <p:sldId id="1377" r:id="rId26"/>
-    <p:sldId id="1351" r:id="rId27"/>
-    <p:sldId id="1365" r:id="rId28"/>
-    <p:sldId id="1358" r:id="rId29"/>
-    <p:sldId id="1357" r:id="rId30"/>
-    <p:sldId id="1366" r:id="rId31"/>
-    <p:sldId id="1378" r:id="rId32"/>
-    <p:sldId id="1380" r:id="rId33"/>
-    <p:sldId id="1379" r:id="rId34"/>
-    <p:sldId id="1381" r:id="rId35"/>
+    <p:sldId id="1382" r:id="rId21"/>
+    <p:sldId id="1383" r:id="rId22"/>
+    <p:sldId id="1363" r:id="rId23"/>
+    <p:sldId id="1355" r:id="rId24"/>
+    <p:sldId id="1364" r:id="rId25"/>
+    <p:sldId id="1360" r:id="rId26"/>
+    <p:sldId id="1349" r:id="rId27"/>
+    <p:sldId id="1377" r:id="rId28"/>
+    <p:sldId id="1351" r:id="rId29"/>
+    <p:sldId id="1358" r:id="rId30"/>
+    <p:sldId id="1357" r:id="rId31"/>
+    <p:sldId id="1366" r:id="rId32"/>
+    <p:sldId id="1378" r:id="rId33"/>
+    <p:sldId id="1380" r:id="rId34"/>
+    <p:sldId id="1379" r:id="rId35"/>
+    <p:sldId id="1381" r:id="rId36"/>
   </p:sldIdLst>
   <p:sldSz cx="12192000" cy="6858000"/>
   <p:notesSz cx="6858000" cy="9144000"/>
@@ -171,14 +172,15 @@
             <p14:sldId id="1353"/>
             <p14:sldId id="1348"/>
             <p14:sldId id="1350"/>
+            <p14:sldId id="1382"/>
+            <p14:sldId id="1383"/>
             <p14:sldId id="1363"/>
+            <p14:sldId id="1355"/>
             <p14:sldId id="1364"/>
-            <p14:sldId id="1355"/>
             <p14:sldId id="1360"/>
             <p14:sldId id="1349"/>
             <p14:sldId id="1377"/>
             <p14:sldId id="1351"/>
-            <p14:sldId id="1365"/>
             <p14:sldId id="1358"/>
             <p14:sldId id="1357"/>
             <p14:sldId id="1366"/>
@@ -1822,7 +1824,7 @@
                 <a:latin typeface="맑은 고딕" panose="020B0503020000020004" pitchFamily="50" charset="-127"/>
                 <a:ea typeface="맑은 고딕" panose="020B0503020000020004" pitchFamily="50" charset="-127"/>
               </a:rPr>
-              <a:t>20</a:t>
+              <a:t>22</a:t>
             </a:fld>
             <a:endParaRPr lang="ko-KR" altLang="en-US">
               <a:latin typeface="맑은 고딕" panose="020B0503020000020004" pitchFamily="50" charset="-127"/>
@@ -6853,10 +6855,10 @@
       </p:sp>
       <p:pic>
         <p:nvPicPr>
-          <p:cNvPr id="2" name="그림 1">
+          <p:cNvPr id="5" name="그림 4">
             <a:extLst>
               <a:ext uri="{FF2B5EF4-FFF2-40B4-BE49-F238E27FC236}">
-                <a16:creationId xmlns:a16="http://schemas.microsoft.com/office/drawing/2014/main" id="{6E06ED93-D395-57D6-A46E-B6C519A7CA1C}"/>
+                <a16:creationId xmlns:a16="http://schemas.microsoft.com/office/drawing/2014/main" id="{0CFA70F1-3665-6564-E646-A739528F710D}"/>
               </a:ext>
             </a:extLst>
           </p:cNvPr>
@@ -6873,8 +6875,38 @@
         </p:blipFill>
         <p:spPr>
           <a:xfrm>
-            <a:off x="1535222" y="1837476"/>
-            <a:ext cx="3687781" cy="4358817"/>
+            <a:off x="7812924" y="2009633"/>
+            <a:ext cx="3934626" cy="3895861"/>
+          </a:xfrm>
+          <a:prstGeom prst="rect">
+            <a:avLst/>
+          </a:prstGeom>
+        </p:spPr>
+      </p:pic>
+      <p:pic>
+        <p:nvPicPr>
+          <p:cNvPr id="8" name="그림 7">
+            <a:extLst>
+              <a:ext uri="{FF2B5EF4-FFF2-40B4-BE49-F238E27FC236}">
+                <a16:creationId xmlns:a16="http://schemas.microsoft.com/office/drawing/2014/main" id="{FC6D46CB-2637-57D2-7777-183C3EFA702F}"/>
+              </a:ext>
+            </a:extLst>
+          </p:cNvPr>
+          <p:cNvPicPr>
+            <a:picLocks noChangeAspect="1"/>
+          </p:cNvPicPr>
+          <p:nvPr/>
+        </p:nvPicPr>
+        <p:blipFill>
+          <a:blip r:embed="rId3"/>
+          <a:stretch>
+            <a:fillRect/>
+          </a:stretch>
+        </p:blipFill>
+        <p:spPr>
+          <a:xfrm>
+            <a:off x="1306661" y="2009634"/>
+            <a:ext cx="4989880" cy="4141991"/>
           </a:xfrm>
           <a:prstGeom prst="rect">
             <a:avLst/>
@@ -6883,10 +6915,10 @@
       </p:pic>
       <p:sp>
         <p:nvSpPr>
-          <p:cNvPr id="6" name="TextBox 5">
+          <p:cNvPr id="9" name="TextBox 8">
             <a:extLst>
               <a:ext uri="{FF2B5EF4-FFF2-40B4-BE49-F238E27FC236}">
-                <a16:creationId xmlns:a16="http://schemas.microsoft.com/office/drawing/2014/main" id="{E14AC1A6-34B1-BDB5-F457-1365BE4D866A}"/>
+                <a16:creationId xmlns:a16="http://schemas.microsoft.com/office/drawing/2014/main" id="{DD81DD2C-B118-2973-A071-6B96A83813AB}"/>
               </a:ext>
             </a:extLst>
           </p:cNvPr>
@@ -6895,8 +6927,8 @@
         </p:nvSpPr>
         <p:spPr>
           <a:xfrm>
-            <a:off x="3697397" y="695925"/>
-            <a:ext cx="6025124" cy="369332"/>
+            <a:off x="3162300" y="6006685"/>
+            <a:ext cx="1172116" cy="307777"/>
           </a:xfrm>
           <a:prstGeom prst="rect">
             <a:avLst/>
@@ -6904,70 +6936,45 @@
           <a:noFill/>
         </p:spPr>
         <p:txBody>
-          <a:bodyPr wrap="square">
+          <a:bodyPr wrap="none" rtlCol="0">
             <a:spAutoFit/>
           </a:bodyPr>
           <a:lstStyle/>
           <a:p>
             <a:r>
-              <a:rPr lang="en-US" altLang="ko-KR" dirty="0" err="1">
-                <a:latin typeface="D2Coding" panose="020B0609020101020101" pitchFamily="49" charset="-127"/>
-                <a:ea typeface="D2Coding" panose="020B0609020101020101" pitchFamily="49" charset="-127"/>
-                <a:hlinkClick r:id="rId3"/>
-              </a:rPr>
-              <a:t>vae_art</a:t>
-            </a:r>
-            <a:r>
-              <a:rPr lang="en-US" altLang="ko-KR" dirty="0">
-                <a:latin typeface="D2Coding" panose="020B0609020101020101" pitchFamily="49" charset="-127"/>
-                <a:ea typeface="D2Coding" panose="020B0609020101020101" pitchFamily="49" charset="-127"/>
-                <a:hlinkClick r:id="rId3"/>
-              </a:rPr>
-              <a:t> exhibition_explanation.pdf</a:t>
-            </a:r>
-            <a:endParaRPr lang="ko-KR" altLang="en-US" dirty="0">
+              <a:rPr lang="en-US" altLang="ko-KR" sz="1400" dirty="0">
+                <a:latin typeface="D2Coding" panose="020B0609020101020101" pitchFamily="49" charset="-127"/>
+                <a:ea typeface="D2Coding" panose="020B0609020101020101" pitchFamily="49" charset="-127"/>
+              </a:rPr>
+              <a:t>40</a:t>
+            </a:r>
+            <a:r>
+              <a:rPr lang="ko-KR" altLang="en-US" sz="1400" dirty="0">
+                <a:latin typeface="D2Coding" panose="020B0609020101020101" pitchFamily="49" charset="-127"/>
+                <a:ea typeface="D2Coding" panose="020B0609020101020101" pitchFamily="49" charset="-127"/>
+              </a:rPr>
+              <a:t>개 </a:t>
+            </a:r>
+            <a:r>
+              <a:rPr lang="ko-KR" altLang="en-US" sz="1400" dirty="0" err="1">
+                <a:latin typeface="D2Coding" panose="020B0609020101020101" pitchFamily="49" charset="-127"/>
+                <a:ea typeface="D2Coding" panose="020B0609020101020101" pitchFamily="49" charset="-127"/>
+              </a:rPr>
+              <a:t>등간격</a:t>
+            </a:r>
+            <a:endParaRPr lang="ko-KR" altLang="en-US" sz="1400" dirty="0">
               <a:latin typeface="D2Coding" panose="020B0609020101020101" pitchFamily="49" charset="-127"/>
               <a:ea typeface="D2Coding" panose="020B0609020101020101" pitchFamily="49" charset="-127"/>
             </a:endParaRPr>
           </a:p>
         </p:txBody>
       </p:sp>
-      <p:pic>
-        <p:nvPicPr>
-          <p:cNvPr id="10" name="그림 9">
-            <a:extLst>
-              <a:ext uri="{FF2B5EF4-FFF2-40B4-BE49-F238E27FC236}">
-                <a16:creationId xmlns:a16="http://schemas.microsoft.com/office/drawing/2014/main" id="{16820E8A-FAAA-9619-1798-42F9D5AE1631}"/>
-              </a:ext>
-            </a:extLst>
-          </p:cNvPr>
-          <p:cNvPicPr>
-            <a:picLocks noChangeAspect="1"/>
-          </p:cNvPicPr>
-          <p:nvPr/>
-        </p:nvPicPr>
-        <p:blipFill>
-          <a:blip r:embed="rId4"/>
-          <a:stretch>
-            <a:fillRect/>
-          </a:stretch>
-        </p:blipFill>
-        <p:spPr>
-          <a:xfrm>
-            <a:off x="6462151" y="1837476"/>
-            <a:ext cx="4282049" cy="4358817"/>
-          </a:xfrm>
-          <a:prstGeom prst="rect">
-            <a:avLst/>
-          </a:prstGeom>
-        </p:spPr>
-      </p:pic>
       <p:sp>
         <p:nvSpPr>
-          <p:cNvPr id="12" name="TextBox 11">
+          <p:cNvPr id="11" name="TextBox 10">
             <a:extLst>
               <a:ext uri="{FF2B5EF4-FFF2-40B4-BE49-F238E27FC236}">
-                <a16:creationId xmlns:a16="http://schemas.microsoft.com/office/drawing/2014/main" id="{2E6D9A72-E3E9-5736-3C48-813CD48203B0}"/>
+                <a16:creationId xmlns:a16="http://schemas.microsoft.com/office/drawing/2014/main" id="{EDF13746-632B-D734-460B-675C920C1A4E}"/>
               </a:ext>
             </a:extLst>
           </p:cNvPr>
@@ -6976,8 +6983,8 @@
         </p:nvSpPr>
         <p:spPr>
           <a:xfrm>
-            <a:off x="6385951" y="1485034"/>
-            <a:ext cx="3438525" cy="338554"/>
+            <a:off x="475645" y="3900417"/>
+            <a:ext cx="1172116" cy="307777"/>
           </a:xfrm>
           <a:prstGeom prst="rect">
             <a:avLst/>
@@ -6985,31 +6992,84 @@
           <a:noFill/>
         </p:spPr>
         <p:txBody>
-          <a:bodyPr wrap="square">
+          <a:bodyPr wrap="none" rtlCol="0">
             <a:spAutoFit/>
           </a:bodyPr>
           <a:lstStyle/>
           <a:p>
             <a:r>
-              <a:rPr lang="en-US" altLang="ko-KR" sz="1600" dirty="0">
-                <a:latin typeface="D2Coding" panose="020B0609020101020101" pitchFamily="49" charset="-127"/>
-                <a:ea typeface="D2Coding" panose="020B0609020101020101" pitchFamily="49" charset="-127"/>
-              </a:rPr>
-              <a:t>Some poorly generated images</a:t>
-            </a:r>
-            <a:endParaRPr lang="ko-KR" altLang="en-US" sz="1600" dirty="0">
+              <a:rPr lang="en-US" altLang="ko-KR" sz="1400" dirty="0">
+                <a:latin typeface="D2Coding" panose="020B0609020101020101" pitchFamily="49" charset="-127"/>
+                <a:ea typeface="D2Coding" panose="020B0609020101020101" pitchFamily="49" charset="-127"/>
+              </a:rPr>
+              <a:t>40</a:t>
+            </a:r>
+            <a:r>
+              <a:rPr lang="ko-KR" altLang="en-US" sz="1400" dirty="0">
+                <a:latin typeface="D2Coding" panose="020B0609020101020101" pitchFamily="49" charset="-127"/>
+                <a:ea typeface="D2Coding" panose="020B0609020101020101" pitchFamily="49" charset="-127"/>
+              </a:rPr>
+              <a:t>개 </a:t>
+            </a:r>
+            <a:r>
+              <a:rPr lang="ko-KR" altLang="en-US" sz="1400" dirty="0" err="1">
+                <a:latin typeface="D2Coding" panose="020B0609020101020101" pitchFamily="49" charset="-127"/>
+                <a:ea typeface="D2Coding" panose="020B0609020101020101" pitchFamily="49" charset="-127"/>
+              </a:rPr>
+              <a:t>등간격</a:t>
+            </a:r>
+            <a:endParaRPr lang="ko-KR" altLang="en-US" sz="1400" dirty="0">
               <a:latin typeface="D2Coding" panose="020B0609020101020101" pitchFamily="49" charset="-127"/>
               <a:ea typeface="D2Coding" panose="020B0609020101020101" pitchFamily="49" charset="-127"/>
             </a:endParaRPr>
           </a:p>
         </p:txBody>
       </p:sp>
+      <p:cxnSp>
+        <p:nvCxnSpPr>
+          <p:cNvPr id="15" name="직선 화살표 연결선 14">
+            <a:extLst>
+              <a:ext uri="{FF2B5EF4-FFF2-40B4-BE49-F238E27FC236}">
+                <a16:creationId xmlns:a16="http://schemas.microsoft.com/office/drawing/2014/main" id="{52F92E4B-6233-1808-1251-2D124A50C420}"/>
+              </a:ext>
+            </a:extLst>
+          </p:cNvPr>
+          <p:cNvCxnSpPr/>
+          <p:nvPr/>
+        </p:nvCxnSpPr>
+        <p:spPr>
+          <a:xfrm>
+            <a:off x="6562725" y="3900417"/>
+            <a:ext cx="942975" cy="0"/>
+          </a:xfrm>
+          <a:prstGeom prst="straightConnector1">
+            <a:avLst/>
+          </a:prstGeom>
+          <a:ln>
+            <a:tailEnd type="triangle"/>
+          </a:ln>
+        </p:spPr>
+        <p:style>
+          <a:lnRef idx="1">
+            <a:schemeClr val="dk1"/>
+          </a:lnRef>
+          <a:fillRef idx="0">
+            <a:schemeClr val="dk1"/>
+          </a:fillRef>
+          <a:effectRef idx="0">
+            <a:schemeClr val="dk1"/>
+          </a:effectRef>
+          <a:fontRef idx="minor">
+            <a:schemeClr val="tx1"/>
+          </a:fontRef>
+        </p:style>
+      </p:cxnSp>
       <p:sp>
         <p:nvSpPr>
-          <p:cNvPr id="13" name="TextBox 12">
+          <p:cNvPr id="17" name="TextBox 16">
             <a:extLst>
               <a:ext uri="{FF2B5EF4-FFF2-40B4-BE49-F238E27FC236}">
-                <a16:creationId xmlns:a16="http://schemas.microsoft.com/office/drawing/2014/main" id="{B12760BB-7C0D-B871-0EC7-C893CE051942}"/>
+                <a16:creationId xmlns:a16="http://schemas.microsoft.com/office/drawing/2014/main" id="{09FCF750-92CC-6DC4-A8BE-E8127B0261C1}"/>
               </a:ext>
             </a:extLst>
           </p:cNvPr>
@@ -7018,8 +7078,8 @@
         </p:nvSpPr>
         <p:spPr>
           <a:xfrm>
-            <a:off x="1447800" y="1485034"/>
-            <a:ext cx="3438525" cy="338554"/>
+            <a:off x="6468674" y="4208194"/>
+            <a:ext cx="1172116" cy="523220"/>
           </a:xfrm>
           <a:prstGeom prst="rect">
             <a:avLst/>
@@ -7027,31 +7087,64 @@
           <a:noFill/>
         </p:spPr>
         <p:txBody>
-          <a:bodyPr wrap="square">
+          <a:bodyPr wrap="none" rtlCol="0">
             <a:spAutoFit/>
           </a:bodyPr>
           <a:lstStyle/>
           <a:p>
             <a:r>
-              <a:rPr lang="en-US" altLang="ko-KR" sz="1600" dirty="0">
-                <a:latin typeface="D2Coding" panose="020B0609020101020101" pitchFamily="49" charset="-127"/>
-                <a:ea typeface="D2Coding" panose="020B0609020101020101" pitchFamily="49" charset="-127"/>
-              </a:rPr>
-              <a:t>Some good generated images</a:t>
-            </a:r>
-            <a:endParaRPr lang="ko-KR" altLang="en-US" sz="1600" dirty="0">
-              <a:latin typeface="D2Coding" panose="020B0609020101020101" pitchFamily="49" charset="-127"/>
-              <a:ea typeface="D2Coding" panose="020B0609020101020101" pitchFamily="49" charset="-127"/>
-            </a:endParaRPr>
+              <a:rPr lang="en-US" altLang="ko-KR" sz="1400" dirty="0">
+                <a:latin typeface="D2Coding" panose="020B0609020101020101" pitchFamily="49" charset="-127"/>
+                <a:ea typeface="D2Coding" panose="020B0609020101020101" pitchFamily="49" charset="-127"/>
+              </a:rPr>
+              <a:t>40,</a:t>
+            </a:r>
+            <a:r>
+              <a:rPr lang="ko-KR" altLang="en-US" sz="1400" dirty="0">
+                <a:latin typeface="D2Coding" panose="020B0609020101020101" pitchFamily="49" charset="-127"/>
+                <a:ea typeface="D2Coding" panose="020B0609020101020101" pitchFamily="49" charset="-127"/>
+              </a:rPr>
+              <a:t> </a:t>
+            </a:r>
+            <a:r>
+              <a:rPr lang="en-US" altLang="ko-KR" sz="1400" dirty="0">
+                <a:latin typeface="D2Coding" panose="020B0609020101020101" pitchFamily="49" charset="-127"/>
+                <a:ea typeface="D2Coding" panose="020B0609020101020101" pitchFamily="49" charset="-127"/>
+              </a:rPr>
+              <a:t>40</a:t>
+            </a:r>
+          </a:p>
+          <a:p>
+            <a:r>
+              <a:rPr lang="ko-KR" altLang="en-US" sz="1400" dirty="0">
+                <a:latin typeface="D2Coding" panose="020B0609020101020101" pitchFamily="49" charset="-127"/>
+                <a:ea typeface="D2Coding" panose="020B0609020101020101" pitchFamily="49" charset="-127"/>
+              </a:rPr>
+              <a:t>데이터</a:t>
+            </a:r>
+            <a:r>
+              <a:rPr lang="en-US" altLang="ko-KR" sz="1400" dirty="0">
+                <a:latin typeface="D2Coding" panose="020B0609020101020101" pitchFamily="49" charset="-127"/>
+                <a:ea typeface="D2Coding" panose="020B0609020101020101" pitchFamily="49" charset="-127"/>
+              </a:rPr>
+              <a:t> </a:t>
+            </a:r>
+            <a:r>
+              <a:rPr lang="ko-KR" altLang="en-US" sz="1400" dirty="0">
+                <a:latin typeface="D2Coding" panose="020B0609020101020101" pitchFamily="49" charset="-127"/>
+                <a:ea typeface="D2Coding" panose="020B0609020101020101" pitchFamily="49" charset="-127"/>
+              </a:rPr>
+              <a:t>생성</a:t>
+            </a:r>
           </a:p>
         </p:txBody>
       </p:sp>
       <p:sp>
         <p:nvSpPr>
-          <p:cNvPr id="16" name="TextBox 15">
+          <p:cNvPr id="18" name="TextBox 17">
             <a:extLst>
               <a:ext uri="{FF2B5EF4-FFF2-40B4-BE49-F238E27FC236}">
-                <a16:creationId xmlns:a16="http://schemas.microsoft.com/office/drawing/2014/main" id="{6271EAC2-930D-D3F4-CFCE-0C1810D2B484}"/>
+                <a16:creationId xmlns:a16="http://schemas.microsoft.com/office/drawing/2014/main" id="{3867739C-31BF-CA70-BA90-296E4375840E}"/>
               </a:ext>
             </a:extLst>
           </p:cNvPr>
@@ -7060,8 +7153,8 @@
         </p:nvSpPr>
         <p:spPr>
           <a:xfrm>
-            <a:off x="3337951" y="6210181"/>
-            <a:ext cx="4720199" cy="338554"/>
+            <a:off x="7812924" y="6006685"/>
+            <a:ext cx="4314001" cy="307777"/>
           </a:xfrm>
           <a:prstGeom prst="rect">
             <a:avLst/>
@@ -7069,22 +7162,133 @@
           <a:noFill/>
         </p:spPr>
         <p:txBody>
-          <a:bodyPr wrap="square">
+          <a:bodyPr wrap="none" rtlCol="0">
             <a:spAutoFit/>
           </a:bodyPr>
           <a:lstStyle/>
           <a:p>
             <a:r>
-              <a:rPr lang="en-US" altLang="ko-KR" sz="1600" dirty="0">
-                <a:latin typeface="D2Coding" panose="020B0609020101020101" pitchFamily="49" charset="-127"/>
-                <a:ea typeface="D2Coding" panose="020B0609020101020101" pitchFamily="49" charset="-127"/>
-              </a:rPr>
-              <a:t>The latent space of the VAE colored by digit</a:t>
-            </a:r>
-            <a:endParaRPr lang="ko-KR" altLang="en-US" sz="1600" dirty="0">
+              <a:rPr lang="ko-KR" altLang="en-US" sz="1400" dirty="0">
+                <a:latin typeface="D2Coding" panose="020B0609020101020101" pitchFamily="49" charset="-127"/>
+                <a:ea typeface="D2Coding" panose="020B0609020101020101" pitchFamily="49" charset="-127"/>
+              </a:rPr>
+              <a:t>일부 데이터는 수자라고 볼 수가 없음 </a:t>
+            </a:r>
+            <a:r>
+              <a:rPr lang="en-US" altLang="ko-KR" sz="1400" dirty="0">
+                <a:latin typeface="D2Coding" panose="020B0609020101020101" pitchFamily="49" charset="-127"/>
+                <a:ea typeface="D2Coding" panose="020B0609020101020101" pitchFamily="49" charset="-127"/>
+              </a:rPr>
+              <a:t>(Discrete)</a:t>
+            </a:r>
+            <a:endParaRPr lang="ko-KR" altLang="en-US" sz="1400" dirty="0">
               <a:latin typeface="D2Coding" panose="020B0609020101020101" pitchFamily="49" charset="-127"/>
               <a:ea typeface="D2Coding" panose="020B0609020101020101" pitchFamily="49" charset="-127"/>
             </a:endParaRPr>
+          </a:p>
+        </p:txBody>
+      </p:sp>
+      <p:sp>
+        <p:nvSpPr>
+          <p:cNvPr id="19" name="직사각형 18">
+            <a:extLst>
+              <a:ext uri="{FF2B5EF4-FFF2-40B4-BE49-F238E27FC236}">
+                <a16:creationId xmlns:a16="http://schemas.microsoft.com/office/drawing/2014/main" id="{F1BDFFC1-E2F2-CD91-A7B1-AB8CCA6D2D7F}"/>
+              </a:ext>
+            </a:extLst>
+          </p:cNvPr>
+          <p:cNvSpPr/>
+          <p:nvPr/>
+        </p:nvSpPr>
+        <p:spPr>
+          <a:xfrm>
+            <a:off x="9220200" y="2072640"/>
+            <a:ext cx="1112520" cy="967740"/>
+          </a:xfrm>
+          <a:prstGeom prst="rect">
+            <a:avLst/>
+          </a:prstGeom>
+          <a:noFill/>
+          <a:ln w="28575">
+            <a:solidFill>
+              <a:srgbClr val="FF0000"/>
+            </a:solidFill>
+          </a:ln>
+        </p:spPr>
+        <p:style>
+          <a:lnRef idx="2">
+            <a:schemeClr val="accent1">
+              <a:shade val="15000"/>
+            </a:schemeClr>
+          </a:lnRef>
+          <a:fillRef idx="1">
+            <a:schemeClr val="accent1"/>
+          </a:fillRef>
+          <a:effectRef idx="0">
+            <a:schemeClr val="accent1"/>
+          </a:effectRef>
+          <a:fontRef idx="minor">
+            <a:schemeClr val="lt1"/>
+          </a:fontRef>
+        </p:style>
+        <p:txBody>
+          <a:bodyPr rtlCol="0" anchor="ctr"/>
+          <a:lstStyle/>
+          <a:p>
+            <a:pPr algn="ctr"/>
+            <a:endParaRPr lang="ko-KR" altLang="en-US"/>
+          </a:p>
+        </p:txBody>
+      </p:sp>
+      <p:sp>
+        <p:nvSpPr>
+          <p:cNvPr id="20" name="직사각형 19">
+            <a:extLst>
+              <a:ext uri="{FF2B5EF4-FFF2-40B4-BE49-F238E27FC236}">
+                <a16:creationId xmlns:a16="http://schemas.microsoft.com/office/drawing/2014/main" id="{C57A9038-0763-C939-AF63-B7E745D551F1}"/>
+              </a:ext>
+            </a:extLst>
+          </p:cNvPr>
+          <p:cNvSpPr/>
+          <p:nvPr/>
+        </p:nvSpPr>
+        <p:spPr>
+          <a:xfrm>
+            <a:off x="2740351" y="3112889"/>
+            <a:ext cx="1112520" cy="967740"/>
+          </a:xfrm>
+          <a:prstGeom prst="rect">
+            <a:avLst/>
+          </a:prstGeom>
+          <a:noFill/>
+          <a:ln w="28575">
+            <a:solidFill>
+              <a:srgbClr val="FF0000"/>
+            </a:solidFill>
+          </a:ln>
+        </p:spPr>
+        <p:style>
+          <a:lnRef idx="2">
+            <a:schemeClr val="accent1">
+              <a:shade val="15000"/>
+            </a:schemeClr>
+          </a:lnRef>
+          <a:fillRef idx="1">
+            <a:schemeClr val="accent1"/>
+          </a:fillRef>
+          <a:effectRef idx="0">
+            <a:schemeClr val="accent1"/>
+          </a:effectRef>
+          <a:fontRef idx="minor">
+            <a:schemeClr val="lt1"/>
+          </a:fontRef>
+        </p:style>
+        <p:txBody>
+          <a:bodyPr rtlCol="0" anchor="ctr"/>
+          <a:lstStyle/>
+          <a:p>
+            <a:pPr algn="ctr"/>
+            <a:endParaRPr lang="ko-KR" altLang="en-US"/>
           </a:p>
         </p:txBody>
       </p:sp>
@@ -7381,106 +7585,7 @@
         <p:cNvPr id="1" name="">
           <a:extLst>
             <a:ext uri="{FF2B5EF4-FFF2-40B4-BE49-F238E27FC236}">
-              <a16:creationId xmlns:a16="http://schemas.microsoft.com/office/drawing/2014/main" id="{16CA4201-27AF-9D64-86CC-1F1C8A380CF0}"/>
-            </a:ext>
-          </a:extLst>
-        </p:cNvPr>
-        <p:cNvGrpSpPr/>
-        <p:nvPr/>
-      </p:nvGrpSpPr>
-      <p:grpSpPr>
-        <a:xfrm>
-          <a:off x="0" y="0"/>
-          <a:ext cx="0" cy="0"/>
-          <a:chOff x="0" y="0"/>
-          <a:chExt cx="0" cy="0"/>
-        </a:xfrm>
-      </p:grpSpPr>
-      <p:sp>
-        <p:nvSpPr>
-          <p:cNvPr id="2" name="제목 1">
-            <a:extLst>
-              <a:ext uri="{FF2B5EF4-FFF2-40B4-BE49-F238E27FC236}">
-                <a16:creationId xmlns:a16="http://schemas.microsoft.com/office/drawing/2014/main" id="{849C13BD-8CB8-F992-F86A-1EB798A7D935}"/>
-              </a:ext>
-            </a:extLst>
-          </p:cNvPr>
-          <p:cNvSpPr>
-            <a:spLocks noGrp="1"/>
-          </p:cNvSpPr>
-          <p:nvPr>
-            <p:ph type="ctrTitle"/>
-          </p:nvPr>
-        </p:nvSpPr>
-        <p:spPr>
-          <a:xfrm>
-            <a:off x="838199" y="1164324"/>
-            <a:ext cx="10934701" cy="2387600"/>
-          </a:xfrm>
-        </p:spPr>
-        <p:txBody>
-          <a:bodyPr rtlCol="0" anchor="ctr" anchorCtr="0">
-            <a:normAutofit/>
-          </a:bodyPr>
-          <a:lstStyle/>
-          <a:p>
-            <a:pPr>
-              <a:lnSpc>
-                <a:spcPct val="150000"/>
-              </a:lnSpc>
-            </a:pPr>
-            <a:r>
-              <a:rPr lang="en-US" altLang="ko-KR" sz="5400" dirty="0">
-                <a:solidFill>
-                  <a:schemeClr val="bg1"/>
-                </a:solidFill>
-                <a:latin typeface="D2Coding" panose="020B0609020101020101" pitchFamily="49" charset="-127"/>
-                <a:ea typeface="D2Coding" panose="020B0609020101020101" pitchFamily="49" charset="-127"/>
-              </a:rPr>
-              <a:t>Variational </a:t>
-            </a:r>
-            <a:r>
-              <a:rPr lang="en-US" altLang="ko-KR" sz="5400" dirty="0" err="1">
-                <a:solidFill>
-                  <a:schemeClr val="bg1"/>
-                </a:solidFill>
-                <a:latin typeface="D2Coding" panose="020B0609020101020101" pitchFamily="49" charset="-127"/>
-                <a:ea typeface="D2Coding" panose="020B0609020101020101" pitchFamily="49" charset="-127"/>
-              </a:rPr>
-              <a:t>AutoEncoder</a:t>
-            </a:r>
-            <a:endParaRPr lang="ko-KR" altLang="en-US" sz="4400" dirty="0">
-              <a:solidFill>
-                <a:schemeClr val="bg1"/>
-              </a:solidFill>
-              <a:latin typeface="D2Coding" panose="020B0609020101020101" pitchFamily="49" charset="-127"/>
-              <a:ea typeface="D2Coding" panose="020B0609020101020101" pitchFamily="49" charset="-127"/>
-            </a:endParaRPr>
-          </a:p>
-        </p:txBody>
-      </p:sp>
-    </p:spTree>
-    <p:extLst>
-      <p:ext uri="{BB962C8B-B14F-4D97-AF65-F5344CB8AC3E}">
-        <p14:creationId xmlns:p14="http://schemas.microsoft.com/office/powerpoint/2010/main" val="1976200519"/>
-      </p:ext>
-    </p:extLst>
-  </p:cSld>
-  <p:clrMapOvr>
-    <a:masterClrMapping/>
-  </p:clrMapOvr>
-</p:sld>
-</file>
-
-<file path=ppt/slides/slide21.xml><?xml version="1.0" encoding="utf-8"?>
-<p:sld xmlns:a="http://schemas.openxmlformats.org/drawingml/2006/main" xmlns:r="http://schemas.openxmlformats.org/officeDocument/2006/relationships" xmlns:p="http://schemas.openxmlformats.org/presentationml/2006/main">
-  <p:cSld>
-    <p:spTree>
-      <p:nvGrpSpPr>
-        <p:cNvPr id="1" name="">
-          <a:extLst>
-            <a:ext uri="{FF2B5EF4-FFF2-40B4-BE49-F238E27FC236}">
-              <a16:creationId xmlns:a16="http://schemas.microsoft.com/office/drawing/2014/main" id="{0CD5FEF5-617C-D3EC-5F92-DCB77404B7AD}"/>
+              <a16:creationId xmlns:a16="http://schemas.microsoft.com/office/drawing/2014/main" id="{AF367A5D-65F3-CC35-B404-4E45F48C0190}"/>
             </a:ext>
           </a:extLst>
         </p:cNvPr>
@@ -7500,7 +7605,7 @@
           <p:cNvPr id="3" name="제목 1">
             <a:extLst>
               <a:ext uri="{FF2B5EF4-FFF2-40B4-BE49-F238E27FC236}">
-                <a16:creationId xmlns:a16="http://schemas.microsoft.com/office/drawing/2014/main" id="{764A5BB0-CE71-790E-4ED7-E088E146AF8B}"/>
+                <a16:creationId xmlns:a16="http://schemas.microsoft.com/office/drawing/2014/main" id="{807618FF-8FD0-6445-18C7-0DF65B87DD53}"/>
               </a:ext>
             </a:extLst>
           </p:cNvPr>
@@ -7555,7 +7660,7 @@
                 <a:ea typeface="D2Coding" panose="020B0609020101020101" pitchFamily="49" charset="-127"/>
                 <a:cs typeface="Segoe UI Light" panose="020B0502040204020203" pitchFamily="34" charset="0"/>
               </a:rPr>
-              <a:t>Variational Art Exhibition </a:t>
+              <a:t>Autoencoders  </a:t>
             </a:r>
             <a:endParaRPr lang="ko-KR" altLang="en-US" sz="2800" cap="none" dirty="0">
               <a:solidFill>
@@ -7572,10 +7677,10 @@
       </p:sp>
       <p:pic>
         <p:nvPicPr>
-          <p:cNvPr id="9" name="그림 8">
+          <p:cNvPr id="2" name="그림 1">
             <a:extLst>
               <a:ext uri="{FF2B5EF4-FFF2-40B4-BE49-F238E27FC236}">
-                <a16:creationId xmlns:a16="http://schemas.microsoft.com/office/drawing/2014/main" id="{25F89A81-3A70-D6E7-3F1F-E5A1D600FFEE}"/>
+                <a16:creationId xmlns:a16="http://schemas.microsoft.com/office/drawing/2014/main" id="{D0DE1FF1-81FF-E700-E2A9-EE44DCF895BE}"/>
               </a:ext>
             </a:extLst>
           </p:cNvPr>
@@ -7592,8 +7697,8 @@
         </p:blipFill>
         <p:spPr>
           <a:xfrm>
-            <a:off x="592084" y="2040082"/>
-            <a:ext cx="8550381" cy="3977985"/>
+            <a:off x="1535222" y="1837476"/>
+            <a:ext cx="3687781" cy="4358817"/>
           </a:xfrm>
           <a:prstGeom prst="rect">
             <a:avLst/>
@@ -7602,10 +7707,10 @@
       </p:pic>
       <p:sp>
         <p:nvSpPr>
-          <p:cNvPr id="4" name="TextBox 3">
+          <p:cNvPr id="6" name="TextBox 5">
             <a:extLst>
               <a:ext uri="{FF2B5EF4-FFF2-40B4-BE49-F238E27FC236}">
-                <a16:creationId xmlns:a16="http://schemas.microsoft.com/office/drawing/2014/main" id="{0FB05E78-6A83-AA7D-BB3A-777326A65F39}"/>
+                <a16:creationId xmlns:a16="http://schemas.microsoft.com/office/drawing/2014/main" id="{9C26CFAF-86D2-7811-ABB1-6D9A8230B803}"/>
               </a:ext>
             </a:extLst>
           </p:cNvPr>
@@ -7614,51 +7719,8 @@
         </p:nvSpPr>
         <p:spPr>
           <a:xfrm>
-            <a:off x="475645" y="1600200"/>
-            <a:ext cx="6532558" cy="369332"/>
-          </a:xfrm>
-          <a:prstGeom prst="rect">
-            <a:avLst/>
-          </a:prstGeom>
-          <a:noFill/>
-        </p:spPr>
-        <p:txBody>
-          <a:bodyPr wrap="none" rtlCol="0">
-            <a:spAutoFit/>
-          </a:bodyPr>
-          <a:lstStyle/>
-          <a:p>
-            <a:r>
-              <a:rPr lang="en-US" altLang="ko-KR" dirty="0">
-                <a:latin typeface="D2Coding" panose="020B0609020101020101" pitchFamily="49" charset="-127"/>
-                <a:ea typeface="D2Coding" panose="020B0609020101020101" pitchFamily="49" charset="-127"/>
-                <a:hlinkClick r:id="rId3"/>
-              </a:rPr>
-              <a:t>Convolutional Variational Autoencoder, trained on MNIST</a:t>
-            </a:r>
-            <a:endParaRPr lang="ko-KR" altLang="en-US" dirty="0">
-              <a:latin typeface="D2Coding" panose="020B0609020101020101" pitchFamily="49" charset="-127"/>
-              <a:ea typeface="D2Coding" panose="020B0609020101020101" pitchFamily="49" charset="-127"/>
-            </a:endParaRPr>
-          </a:p>
-        </p:txBody>
-      </p:sp>
-      <p:sp>
-        <p:nvSpPr>
-          <p:cNvPr id="6" name="TextBox 5">
-            <a:extLst>
-              <a:ext uri="{FF2B5EF4-FFF2-40B4-BE49-F238E27FC236}">
-                <a16:creationId xmlns:a16="http://schemas.microsoft.com/office/drawing/2014/main" id="{77F92648-BA8C-EB45-4CF1-D020CB3CF871}"/>
-              </a:ext>
-            </a:extLst>
-          </p:cNvPr>
-          <p:cNvSpPr txBox="1"/>
-          <p:nvPr/>
-        </p:nvSpPr>
-        <p:spPr>
-          <a:xfrm>
-            <a:off x="592084" y="6088617"/>
-            <a:ext cx="4505325" cy="338554"/>
+            <a:off x="3697397" y="695925"/>
+            <a:ext cx="6025124" cy="369332"/>
           </a:xfrm>
           <a:prstGeom prst="rect">
             <a:avLst/>
@@ -7672,63 +7734,188 @@
           <a:lstStyle/>
           <a:p>
             <a:r>
-              <a:rPr lang="en-US" altLang="ko-KR" sz="1600" dirty="0" err="1">
-                <a:latin typeface="D2Coding" panose="020B0609020101020101" pitchFamily="49" charset="-127"/>
-                <a:ea typeface="D2Coding" panose="020B0609020101020101" pitchFamily="49" charset="-127"/>
-                <a:hlinkClick r:id="rId4"/>
-              </a:rPr>
-              <a:t>Keras</a:t>
-            </a:r>
+              <a:rPr lang="en-US" altLang="ko-KR" dirty="0" err="1">
+                <a:latin typeface="D2Coding" panose="020B0609020101020101" pitchFamily="49" charset="-127"/>
+                <a:ea typeface="D2Coding" panose="020B0609020101020101" pitchFamily="49" charset="-127"/>
+                <a:hlinkClick r:id="rId3"/>
+              </a:rPr>
+              <a:t>vae_art</a:t>
+            </a:r>
+            <a:r>
+              <a:rPr lang="en-US" altLang="ko-KR" dirty="0">
+                <a:latin typeface="D2Coding" panose="020B0609020101020101" pitchFamily="49" charset="-127"/>
+                <a:ea typeface="D2Coding" panose="020B0609020101020101" pitchFamily="49" charset="-127"/>
+                <a:hlinkClick r:id="rId3"/>
+              </a:rPr>
+              <a:t> exhibition_explanation.pdf</a:t>
+            </a:r>
+            <a:endParaRPr lang="ko-KR" altLang="en-US" dirty="0">
+              <a:latin typeface="D2Coding" panose="020B0609020101020101" pitchFamily="49" charset="-127"/>
+              <a:ea typeface="D2Coding" panose="020B0609020101020101" pitchFamily="49" charset="-127"/>
+            </a:endParaRPr>
+          </a:p>
+        </p:txBody>
+      </p:sp>
+      <p:pic>
+        <p:nvPicPr>
+          <p:cNvPr id="10" name="그림 9">
+            <a:extLst>
+              <a:ext uri="{FF2B5EF4-FFF2-40B4-BE49-F238E27FC236}">
+                <a16:creationId xmlns:a16="http://schemas.microsoft.com/office/drawing/2014/main" id="{751CD087-5C75-DE34-4191-5F89A8A24EEB}"/>
+              </a:ext>
+            </a:extLst>
+          </p:cNvPr>
+          <p:cNvPicPr>
+            <a:picLocks noChangeAspect="1"/>
+          </p:cNvPicPr>
+          <p:nvPr/>
+        </p:nvPicPr>
+        <p:blipFill>
+          <a:blip r:embed="rId4"/>
+          <a:stretch>
+            <a:fillRect/>
+          </a:stretch>
+        </p:blipFill>
+        <p:spPr>
+          <a:xfrm>
+            <a:off x="6462151" y="1837476"/>
+            <a:ext cx="4282049" cy="4358817"/>
+          </a:xfrm>
+          <a:prstGeom prst="rect">
+            <a:avLst/>
+          </a:prstGeom>
+        </p:spPr>
+      </p:pic>
+      <p:sp>
+        <p:nvSpPr>
+          <p:cNvPr id="12" name="TextBox 11">
+            <a:extLst>
+              <a:ext uri="{FF2B5EF4-FFF2-40B4-BE49-F238E27FC236}">
+                <a16:creationId xmlns:a16="http://schemas.microsoft.com/office/drawing/2014/main" id="{5F05786E-6BB3-3FB1-7F95-E7CA77962979}"/>
+              </a:ext>
+            </a:extLst>
+          </p:cNvPr>
+          <p:cNvSpPr txBox="1"/>
+          <p:nvPr/>
+        </p:nvSpPr>
+        <p:spPr>
+          <a:xfrm>
+            <a:off x="6385951" y="1485034"/>
+            <a:ext cx="3438525" cy="338554"/>
+          </a:xfrm>
+          <a:prstGeom prst="rect">
+            <a:avLst/>
+          </a:prstGeom>
+          <a:noFill/>
+        </p:spPr>
+        <p:txBody>
+          <a:bodyPr wrap="square">
+            <a:spAutoFit/>
+          </a:bodyPr>
+          <a:lstStyle/>
+          <a:p>
             <a:r>
               <a:rPr lang="en-US" altLang="ko-KR" sz="1600" dirty="0">
                 <a:latin typeface="D2Coding" panose="020B0609020101020101" pitchFamily="49" charset="-127"/>
                 <a:ea typeface="D2Coding" panose="020B0609020101020101" pitchFamily="49" charset="-127"/>
-                <a:hlinkClick r:id="rId4"/>
-              </a:rPr>
-              <a:t> JS</a:t>
-            </a:r>
+              </a:rPr>
+              <a:t>Some poorly generated images</a:t>
+            </a:r>
+            <a:endParaRPr lang="ko-KR" altLang="en-US" sz="1600" dirty="0">
+              <a:latin typeface="D2Coding" panose="020B0609020101020101" pitchFamily="49" charset="-127"/>
+              <a:ea typeface="D2Coding" panose="020B0609020101020101" pitchFamily="49" charset="-127"/>
+            </a:endParaRPr>
+          </a:p>
+        </p:txBody>
+      </p:sp>
+      <p:sp>
+        <p:nvSpPr>
+          <p:cNvPr id="13" name="TextBox 12">
+            <a:extLst>
+              <a:ext uri="{FF2B5EF4-FFF2-40B4-BE49-F238E27FC236}">
+                <a16:creationId xmlns:a16="http://schemas.microsoft.com/office/drawing/2014/main" id="{81B31CDD-457B-72E7-8E65-67D12983C91D}"/>
+              </a:ext>
+            </a:extLst>
+          </p:cNvPr>
+          <p:cNvSpPr txBox="1"/>
+          <p:nvPr/>
+        </p:nvSpPr>
+        <p:spPr>
+          <a:xfrm>
+            <a:off x="1447800" y="1485034"/>
+            <a:ext cx="3438525" cy="338554"/>
+          </a:xfrm>
+          <a:prstGeom prst="rect">
+            <a:avLst/>
+          </a:prstGeom>
+          <a:noFill/>
+        </p:spPr>
+        <p:txBody>
+          <a:bodyPr wrap="square">
+            <a:spAutoFit/>
+          </a:bodyPr>
+          <a:lstStyle/>
+          <a:p>
             <a:r>
               <a:rPr lang="en-US" altLang="ko-KR" sz="1600" dirty="0">
                 <a:latin typeface="D2Coding" panose="020B0609020101020101" pitchFamily="49" charset="-127"/>
                 <a:ea typeface="D2Coding" panose="020B0609020101020101" pitchFamily="49" charset="-127"/>
               </a:rPr>
-              <a:t> </a:t>
-            </a:r>
-            <a:r>
-              <a:rPr lang="ko-KR" altLang="en-US" sz="1600" dirty="0">
-                <a:latin typeface="D2Coding" panose="020B0609020101020101" pitchFamily="49" charset="-127"/>
-                <a:ea typeface="D2Coding" panose="020B0609020101020101" pitchFamily="49" charset="-127"/>
-              </a:rPr>
-              <a:t>실습</a:t>
-            </a:r>
+              <a:t>Some good generated images</a:t>
+            </a:r>
+            <a:endParaRPr lang="ko-KR" altLang="en-US" sz="1600" dirty="0">
+              <a:latin typeface="D2Coding" panose="020B0609020101020101" pitchFamily="49" charset="-127"/>
+              <a:ea typeface="D2Coding" panose="020B0609020101020101" pitchFamily="49" charset="-127"/>
+            </a:endParaRPr>
+          </a:p>
+        </p:txBody>
+      </p:sp>
+      <p:sp>
+        <p:nvSpPr>
+          <p:cNvPr id="16" name="TextBox 15">
+            <a:extLst>
+              <a:ext uri="{FF2B5EF4-FFF2-40B4-BE49-F238E27FC236}">
+                <a16:creationId xmlns:a16="http://schemas.microsoft.com/office/drawing/2014/main" id="{80D00EA6-F24E-6E98-93F4-45BF324CE073}"/>
+              </a:ext>
+            </a:extLst>
+          </p:cNvPr>
+          <p:cNvSpPr txBox="1"/>
+          <p:nvPr/>
+        </p:nvSpPr>
+        <p:spPr>
+          <a:xfrm>
+            <a:off x="3337951" y="6210181"/>
+            <a:ext cx="4720199" cy="338554"/>
+          </a:xfrm>
+          <a:prstGeom prst="rect">
+            <a:avLst/>
+          </a:prstGeom>
+          <a:noFill/>
+        </p:spPr>
+        <p:txBody>
+          <a:bodyPr wrap="square">
+            <a:spAutoFit/>
+          </a:bodyPr>
+          <a:lstStyle/>
+          <a:p>
             <a:r>
               <a:rPr lang="en-US" altLang="ko-KR" sz="1600" dirty="0">
                 <a:latin typeface="D2Coding" panose="020B0609020101020101" pitchFamily="49" charset="-127"/>
                 <a:ea typeface="D2Coding" panose="020B0609020101020101" pitchFamily="49" charset="-127"/>
               </a:rPr>
-              <a:t> </a:t>
-            </a:r>
-            <a:r>
-              <a:rPr lang="ko-KR" altLang="en-US" sz="1600" dirty="0">
-                <a:latin typeface="D2Coding" panose="020B0609020101020101" pitchFamily="49" charset="-127"/>
-                <a:ea typeface="D2Coding" panose="020B0609020101020101" pitchFamily="49" charset="-127"/>
-              </a:rPr>
-              <a:t>사이트 </a:t>
-            </a:r>
-            <a:r>
-              <a:rPr lang="en-US" altLang="ko-KR" sz="1600" dirty="0">
-                <a:latin typeface="D2Coding" panose="020B0609020101020101" pitchFamily="49" charset="-127"/>
-                <a:ea typeface="D2Coding" panose="020B0609020101020101" pitchFamily="49" charset="-127"/>
-              </a:rPr>
-              <a:t>click</a:t>
-            </a:r>
+              <a:t>The latent space of the VAE colored by digit</a:t>
+            </a:r>
+            <a:endParaRPr lang="ko-KR" altLang="en-US" sz="1600" dirty="0">
+              <a:latin typeface="D2Coding" panose="020B0609020101020101" pitchFamily="49" charset="-127"/>
+              <a:ea typeface="D2Coding" panose="020B0609020101020101" pitchFamily="49" charset="-127"/>
+            </a:endParaRPr>
           </a:p>
         </p:txBody>
       </p:sp>
     </p:spTree>
     <p:extLst>
       <p:ext uri="{BB962C8B-B14F-4D97-AF65-F5344CB8AC3E}">
-        <p14:creationId xmlns:p14="http://schemas.microsoft.com/office/powerpoint/2010/main" val="4247683160"/>
+        <p14:creationId xmlns:p14="http://schemas.microsoft.com/office/powerpoint/2010/main" val="3856981640"/>
       </p:ext>
     </p:extLst>
   </p:cSld>
@@ -7738,7 +7925,7 @@
 </p:sld>
 </file>
 
-<file path=ppt/slides/slide22.xml><?xml version="1.0" encoding="utf-8"?>
+<file path=ppt/slides/slide21.xml><?xml version="1.0" encoding="utf-8"?>
 <p:sld xmlns:a="http://schemas.openxmlformats.org/drawingml/2006/main" xmlns:r="http://schemas.openxmlformats.org/officeDocument/2006/relationships" xmlns:p="http://schemas.openxmlformats.org/presentationml/2006/main">
   <p:cSld>
     <p:spTree>
@@ -7746,7 +7933,7 @@
         <p:cNvPr id="1" name="">
           <a:extLst>
             <a:ext uri="{FF2B5EF4-FFF2-40B4-BE49-F238E27FC236}">
-              <a16:creationId xmlns:a16="http://schemas.microsoft.com/office/drawing/2014/main" id="{679342E9-6C38-FA32-18FB-153823A853BA}"/>
+              <a16:creationId xmlns:a16="http://schemas.microsoft.com/office/drawing/2014/main" id="{EB8941FA-B84D-C6FD-65F8-79F80D5C9ECE}"/>
             </a:ext>
           </a:extLst>
         </p:cNvPr>
@@ -7766,7 +7953,7 @@
           <p:cNvPr id="3" name="제목 1">
             <a:extLst>
               <a:ext uri="{FF2B5EF4-FFF2-40B4-BE49-F238E27FC236}">
-                <a16:creationId xmlns:a16="http://schemas.microsoft.com/office/drawing/2014/main" id="{48C3F9A7-C49B-E541-7644-11CE24E2158D}"/>
+                <a16:creationId xmlns:a16="http://schemas.microsoft.com/office/drawing/2014/main" id="{A9A877FF-BBE4-726E-EBFF-F3451BC77736}"/>
               </a:ext>
             </a:extLst>
           </p:cNvPr>
@@ -7821,7 +8008,59 @@
                 <a:ea typeface="D2Coding" panose="020B0609020101020101" pitchFamily="49" charset="-127"/>
                 <a:cs typeface="Segoe UI Light" panose="020B0502040204020203" pitchFamily="34" charset="0"/>
               </a:rPr>
-              <a:t>Variational Autoencoders </a:t>
+              <a:t>Discrete</a:t>
+            </a:r>
+            <a:r>
+              <a:rPr lang="ko-KR" altLang="en-US" sz="2800" cap="none" dirty="0">
+                <a:solidFill>
+                  <a:schemeClr val="bg2">
+                    <a:lumMod val="25000"/>
+                  </a:schemeClr>
+                </a:solidFill>
+                <a:latin typeface="D2Coding" panose="020B0609020101020101" pitchFamily="49" charset="-127"/>
+                <a:ea typeface="D2Coding" panose="020B0609020101020101" pitchFamily="49" charset="-127"/>
+                <a:cs typeface="Segoe UI Light" panose="020B0502040204020203" pitchFamily="34" charset="0"/>
+              </a:rPr>
+              <a:t> </a:t>
+            </a:r>
+            <a:r>
+              <a:rPr lang="en-US" altLang="ko-KR" sz="2800" cap="none" dirty="0">
+                <a:solidFill>
+                  <a:schemeClr val="bg2">
+                    <a:lumMod val="25000"/>
+                  </a:schemeClr>
+                </a:solidFill>
+                <a:latin typeface="D2Coding" panose="020B0609020101020101" pitchFamily="49" charset="-127"/>
+                <a:ea typeface="D2Coding" panose="020B0609020101020101" pitchFamily="49" charset="-127"/>
+                <a:cs typeface="Segoe UI Light" panose="020B0502040204020203" pitchFamily="34" charset="0"/>
+              </a:rPr>
+              <a:t>vs.</a:t>
+            </a:r>
+            <a:r>
+              <a:rPr lang="ko-KR" altLang="en-US" sz="2800" cap="none" dirty="0">
+                <a:solidFill>
+                  <a:schemeClr val="bg2">
+                    <a:lumMod val="25000"/>
+                  </a:schemeClr>
+                </a:solidFill>
+                <a:latin typeface="D2Coding" panose="020B0609020101020101" pitchFamily="49" charset="-127"/>
+                <a:ea typeface="D2Coding" panose="020B0609020101020101" pitchFamily="49" charset="-127"/>
+                <a:cs typeface="Segoe UI Light" panose="020B0502040204020203" pitchFamily="34" charset="0"/>
+              </a:rPr>
+              <a:t> </a:t>
+            </a:r>
+            <a:r>
+              <a:rPr lang="en-US" altLang="ko-KR" sz="2800" cap="none" dirty="0">
+                <a:solidFill>
+                  <a:schemeClr val="bg2">
+                    <a:lumMod val="25000"/>
+                  </a:schemeClr>
+                </a:solidFill>
+                <a:latin typeface="D2Coding" panose="020B0609020101020101" pitchFamily="49" charset="-127"/>
+                <a:ea typeface="D2Coding" panose="020B0609020101020101" pitchFamily="49" charset="-127"/>
+                <a:cs typeface="Segoe UI Light" panose="020B0502040204020203" pitchFamily="34" charset="0"/>
+              </a:rPr>
+              <a:t>Continuous Function  </a:t>
             </a:r>
             <a:endParaRPr lang="ko-KR" altLang="en-US" sz="2800" cap="none" dirty="0">
               <a:solidFill>
@@ -7836,12 +8075,57 @@
           </a:p>
         </p:txBody>
       </p:sp>
+      <p:sp>
+        <p:nvSpPr>
+          <p:cNvPr id="4" name="AutoShape 2">
+            <a:extLst>
+              <a:ext uri="{FF2B5EF4-FFF2-40B4-BE49-F238E27FC236}">
+                <a16:creationId xmlns:a16="http://schemas.microsoft.com/office/drawing/2014/main" id="{DCDC91B5-EA99-28F5-7DAB-371DF1837F0E}"/>
+              </a:ext>
+            </a:extLst>
+          </p:cNvPr>
+          <p:cNvSpPr>
+            <a:spLocks noChangeAspect="1" noChangeArrowheads="1"/>
+          </p:cNvSpPr>
+          <p:nvPr/>
+        </p:nvSpPr>
+        <p:spPr bwMode="auto">
+          <a:xfrm>
+            <a:off x="5943600" y="3276600"/>
+            <a:ext cx="304800" cy="304800"/>
+          </a:xfrm>
+          <a:prstGeom prst="rect">
+            <a:avLst/>
+          </a:prstGeom>
+          <a:noFill/>
+          <a:extLst>
+            <a:ext uri="{909E8E84-426E-40DD-AFC4-6F175D3DCCD1}">
+              <a14:hiddenFill xmlns:a14="http://schemas.microsoft.com/office/drawing/2010/main">
+                <a:solidFill>
+                  <a:srgbClr val="FFFFFF"/>
+                </a:solidFill>
+              </a14:hiddenFill>
+            </a:ext>
+          </a:extLst>
+        </p:spPr>
+        <p:txBody>
+          <a:bodyPr vert="horz" wrap="square" lIns="91440" tIns="45720" rIns="91440" bIns="45720" numCol="1" anchor="t" anchorCtr="0" compatLnSpc="1">
+            <a:prstTxWarp prst="textNoShape">
+              <a:avLst/>
+            </a:prstTxWarp>
+          </a:bodyPr>
+          <a:lstStyle/>
+          <a:p>
+            <a:endParaRPr lang="ko-KR" altLang="en-US"/>
+          </a:p>
+        </p:txBody>
+      </p:sp>
       <p:pic>
         <p:nvPicPr>
-          <p:cNvPr id="4" name="그림 3">
+          <p:cNvPr id="8" name="그림 7">
             <a:extLst>
               <a:ext uri="{FF2B5EF4-FFF2-40B4-BE49-F238E27FC236}">
-                <a16:creationId xmlns:a16="http://schemas.microsoft.com/office/drawing/2014/main" id="{B8DC8903-EAF5-B143-ACD9-9B7BD1BE9D09}"/>
+                <a16:creationId xmlns:a16="http://schemas.microsoft.com/office/drawing/2014/main" id="{52A27CA0-1CD2-3E90-00A5-FDC4216D2503}"/>
               </a:ext>
             </a:extLst>
           </p:cNvPr>
@@ -7858,148 +8142,107 @@
         </p:blipFill>
         <p:spPr>
           <a:xfrm>
-            <a:off x="670744" y="1922558"/>
-            <a:ext cx="7696613" cy="3674875"/>
+            <a:off x="937067" y="2008449"/>
+            <a:ext cx="9736046" cy="4056686"/>
           </a:xfrm>
           <a:prstGeom prst="rect">
             <a:avLst/>
           </a:prstGeom>
         </p:spPr>
       </p:pic>
+    </p:spTree>
+    <p:extLst>
+      <p:ext uri="{BB962C8B-B14F-4D97-AF65-F5344CB8AC3E}">
+        <p14:creationId xmlns:p14="http://schemas.microsoft.com/office/powerpoint/2010/main" val="3812821222"/>
+      </p:ext>
+    </p:extLst>
+  </p:cSld>
+  <p:clrMapOvr>
+    <a:masterClrMapping/>
+  </p:clrMapOvr>
+</p:sld>
+</file>
+
+<file path=ppt/slides/slide22.xml><?xml version="1.0" encoding="utf-8"?>
+<p:sld xmlns:a="http://schemas.openxmlformats.org/drawingml/2006/main" xmlns:r="http://schemas.openxmlformats.org/officeDocument/2006/relationships" xmlns:p="http://schemas.openxmlformats.org/presentationml/2006/main">
+  <p:cSld>
+    <p:spTree>
+      <p:nvGrpSpPr>
+        <p:cNvPr id="1" name="">
+          <a:extLst>
+            <a:ext uri="{FF2B5EF4-FFF2-40B4-BE49-F238E27FC236}">
+              <a16:creationId xmlns:a16="http://schemas.microsoft.com/office/drawing/2014/main" id="{16CA4201-27AF-9D64-86CC-1F1C8A380CF0}"/>
+            </a:ext>
+          </a:extLst>
+        </p:cNvPr>
+        <p:cNvGrpSpPr/>
+        <p:nvPr/>
+      </p:nvGrpSpPr>
+      <p:grpSpPr>
+        <a:xfrm>
+          <a:off x="0" y="0"/>
+          <a:ext cx="0" cy="0"/>
+          <a:chOff x="0" y="0"/>
+          <a:chExt cx="0" cy="0"/>
+        </a:xfrm>
+      </p:grpSpPr>
       <p:sp>
         <p:nvSpPr>
-          <p:cNvPr id="6" name="TextBox 5">
+          <p:cNvPr id="2" name="제목 1">
             <a:extLst>
               <a:ext uri="{FF2B5EF4-FFF2-40B4-BE49-F238E27FC236}">
-                <a16:creationId xmlns:a16="http://schemas.microsoft.com/office/drawing/2014/main" id="{36C19082-8F36-05E1-CB3C-7EE63D024883}"/>
+                <a16:creationId xmlns:a16="http://schemas.microsoft.com/office/drawing/2014/main" id="{849C13BD-8CB8-F992-F86A-1EB798A7D935}"/>
               </a:ext>
             </a:extLst>
           </p:cNvPr>
-          <p:cNvSpPr txBox="1"/>
-          <p:nvPr/>
+          <p:cNvSpPr>
+            <a:spLocks noGrp="1"/>
+          </p:cNvSpPr>
+          <p:nvPr>
+            <p:ph type="ctrTitle"/>
+          </p:nvPr>
         </p:nvSpPr>
         <p:spPr>
           <a:xfrm>
-            <a:off x="585019" y="5724525"/>
-            <a:ext cx="6096000" cy="369332"/>
+            <a:off x="838199" y="1164324"/>
+            <a:ext cx="10934701" cy="2387600"/>
           </a:xfrm>
-          <a:prstGeom prst="rect">
-            <a:avLst/>
-          </a:prstGeom>
-          <a:noFill/>
         </p:spPr>
         <p:txBody>
-          <a:bodyPr wrap="square">
-            <a:spAutoFit/>
+          <a:bodyPr rtlCol="0" anchor="ctr" anchorCtr="0">
+            <a:normAutofit/>
           </a:bodyPr>
           <a:lstStyle/>
           <a:p>
-            <a:r>
-              <a:rPr lang="en-US" altLang="ko-KR" dirty="0">
-                <a:latin typeface="D2Coding" panose="020B0609020101020101" pitchFamily="49" charset="-127"/>
-                <a:ea typeface="D2Coding" panose="020B0609020101020101" pitchFamily="49" charset="-127"/>
-              </a:rPr>
-              <a:t>The latent space of the VAE colored by digit</a:t>
-            </a:r>
-            <a:endParaRPr lang="ko-KR" altLang="en-US" dirty="0">
-              <a:latin typeface="D2Coding" panose="020B0609020101020101" pitchFamily="49" charset="-127"/>
-              <a:ea typeface="D2Coding" panose="020B0609020101020101" pitchFamily="49" charset="-127"/>
-            </a:endParaRPr>
-          </a:p>
-        </p:txBody>
-      </p:sp>
-      <p:pic>
-        <p:nvPicPr>
-          <p:cNvPr id="2" name="Picture 2" descr="png">
-            <a:extLst>
-              <a:ext uri="{FF2B5EF4-FFF2-40B4-BE49-F238E27FC236}">
-                <a16:creationId xmlns:a16="http://schemas.microsoft.com/office/drawing/2014/main" id="{78473249-EDD1-2EFD-4360-A70EF2C792F2}"/>
-              </a:ext>
-            </a:extLst>
-          </p:cNvPr>
-          <p:cNvPicPr>
-            <a:picLocks noChangeAspect="1" noChangeArrowheads="1"/>
-          </p:cNvPicPr>
-          <p:nvPr/>
-        </p:nvPicPr>
-        <p:blipFill>
-          <a:blip r:embed="rId3">
-            <a:extLst>
-              <a:ext uri="{28A0092B-C50C-407E-A947-70E740481C1C}">
-                <a14:useLocalDpi xmlns:a14="http://schemas.microsoft.com/office/drawing/2010/main" val="0"/>
-              </a:ext>
-            </a:extLst>
-          </a:blip>
-          <a:srcRect/>
-          <a:stretch>
-            <a:fillRect/>
-          </a:stretch>
-        </p:blipFill>
-        <p:spPr bwMode="auto">
-          <a:xfrm>
-            <a:off x="8519344" y="1988345"/>
-            <a:ext cx="3409950" cy="3409950"/>
-          </a:xfrm>
-          <a:prstGeom prst="rect">
-            <a:avLst/>
-          </a:prstGeom>
-          <a:noFill/>
-          <a:extLst>
-            <a:ext uri="{909E8E84-426E-40DD-AFC4-6F175D3DCCD1}">
-              <a14:hiddenFill xmlns:a14="http://schemas.microsoft.com/office/drawing/2010/main">
-                <a:solidFill>
-                  <a:srgbClr val="FFFFFF"/>
-                </a:solidFill>
-              </a14:hiddenFill>
-            </a:ext>
-          </a:extLst>
-        </p:spPr>
-      </p:pic>
-      <p:sp>
-        <p:nvSpPr>
-          <p:cNvPr id="5" name="TextBox 4">
-            <a:extLst>
-              <a:ext uri="{FF2B5EF4-FFF2-40B4-BE49-F238E27FC236}">
-                <a16:creationId xmlns:a16="http://schemas.microsoft.com/office/drawing/2014/main" id="{92E299D1-F29D-E264-DC97-66606A457604}"/>
-              </a:ext>
-            </a:extLst>
-          </p:cNvPr>
-          <p:cNvSpPr txBox="1"/>
-          <p:nvPr/>
-        </p:nvSpPr>
-        <p:spPr>
-          <a:xfrm>
-            <a:off x="8519344" y="5398295"/>
-            <a:ext cx="2108269" cy="400110"/>
-          </a:xfrm>
-          <a:prstGeom prst="rect">
-            <a:avLst/>
-          </a:prstGeom>
-          <a:noFill/>
-        </p:spPr>
-        <p:txBody>
-          <a:bodyPr wrap="none" rtlCol="0">
-            <a:spAutoFit/>
-          </a:bodyPr>
-          <a:lstStyle/>
-          <a:p>
-            <a:r>
-              <a:rPr lang="en-US" altLang="ko-KR" sz="2000" dirty="0">
-                <a:latin typeface="D2Coding" panose="020B0609020101020101" pitchFamily="49" charset="-127"/>
-                <a:ea typeface="D2Coding" panose="020B0609020101020101" pitchFamily="49" charset="-127"/>
-                <a:hlinkClick r:id="rId4"/>
-              </a:rPr>
-              <a:t>Generative/</a:t>
-            </a:r>
-            <a:r>
-              <a:rPr lang="en-US" altLang="ko-KR" sz="2000" dirty="0" err="1">
-                <a:latin typeface="D2Coding" panose="020B0609020101020101" pitchFamily="49" charset="-127"/>
-                <a:ea typeface="D2Coding" panose="020B0609020101020101" pitchFamily="49" charset="-127"/>
-                <a:hlinkClick r:id="rId4"/>
-              </a:rPr>
-              <a:t>cvae</a:t>
-            </a:r>
-            <a:endParaRPr lang="ko-KR" altLang="en-US" sz="2000" dirty="0">
+            <a:pPr>
+              <a:lnSpc>
+                <a:spcPct val="150000"/>
+              </a:lnSpc>
+            </a:pPr>
+            <a:r>
+              <a:rPr lang="en-US" altLang="ko-KR" sz="5400" dirty="0">
+                <a:solidFill>
+                  <a:schemeClr val="bg1"/>
+                </a:solidFill>
+                <a:latin typeface="D2Coding" panose="020B0609020101020101" pitchFamily="49" charset="-127"/>
+                <a:ea typeface="D2Coding" panose="020B0609020101020101" pitchFamily="49" charset="-127"/>
+              </a:rPr>
+              <a:t>Variational </a:t>
+            </a:r>
+            <a:r>
+              <a:rPr lang="en-US" altLang="ko-KR" sz="5400" dirty="0" err="1">
+                <a:solidFill>
+                  <a:schemeClr val="bg1"/>
+                </a:solidFill>
+                <a:latin typeface="D2Coding" panose="020B0609020101020101" pitchFamily="49" charset="-127"/>
+                <a:ea typeface="D2Coding" panose="020B0609020101020101" pitchFamily="49" charset="-127"/>
+              </a:rPr>
+              <a:t>AutoEncoder</a:t>
+            </a:r>
+            <a:endParaRPr lang="ko-KR" altLang="en-US" sz="4400" dirty="0">
+              <a:solidFill>
+                <a:schemeClr val="bg1"/>
+              </a:solidFill>
               <a:latin typeface="D2Coding" panose="020B0609020101020101" pitchFamily="49" charset="-127"/>
               <a:ea typeface="D2Coding" panose="020B0609020101020101" pitchFamily="49" charset="-127"/>
             </a:endParaRPr>
@@ -8009,7 +8252,7 @@
     </p:spTree>
     <p:extLst>
       <p:ext uri="{BB962C8B-B14F-4D97-AF65-F5344CB8AC3E}">
-        <p14:creationId xmlns:p14="http://schemas.microsoft.com/office/powerpoint/2010/main" val="2934553490"/>
+        <p14:creationId xmlns:p14="http://schemas.microsoft.com/office/powerpoint/2010/main" val="1976200519"/>
       </p:ext>
     </p:extLst>
   </p:cSld>
@@ -8027,7 +8270,7 @@
         <p:cNvPr id="1" name="">
           <a:extLst>
             <a:ext uri="{FF2B5EF4-FFF2-40B4-BE49-F238E27FC236}">
-              <a16:creationId xmlns:a16="http://schemas.microsoft.com/office/drawing/2014/main" id="{66B09516-21E9-348C-3C75-0C0D6299878C}"/>
+              <a16:creationId xmlns:a16="http://schemas.microsoft.com/office/drawing/2014/main" id="{679342E9-6C38-FA32-18FB-153823A853BA}"/>
             </a:ext>
           </a:extLst>
         </p:cNvPr>
@@ -8047,7 +8290,7 @@
           <p:cNvPr id="3" name="제목 1">
             <a:extLst>
               <a:ext uri="{FF2B5EF4-FFF2-40B4-BE49-F238E27FC236}">
-                <a16:creationId xmlns:a16="http://schemas.microsoft.com/office/drawing/2014/main" id="{5CFE18E0-5B17-FE87-AF9F-7D5AE232EC51}"/>
+                <a16:creationId xmlns:a16="http://schemas.microsoft.com/office/drawing/2014/main" id="{48C3F9A7-C49B-E541-7644-11CE24E2158D}"/>
               </a:ext>
             </a:extLst>
           </p:cNvPr>
@@ -8119,10 +8362,10 @@
       </p:sp>
       <p:pic>
         <p:nvPicPr>
-          <p:cNvPr id="8" name="그림 7">
+          <p:cNvPr id="4" name="그림 3">
             <a:extLst>
               <a:ext uri="{FF2B5EF4-FFF2-40B4-BE49-F238E27FC236}">
-                <a16:creationId xmlns:a16="http://schemas.microsoft.com/office/drawing/2014/main" id="{C15A6743-67F3-498A-6A7B-D286FE652D53}"/>
+                <a16:creationId xmlns:a16="http://schemas.microsoft.com/office/drawing/2014/main" id="{B8DC8903-EAF5-B143-ACD9-9B7BD1BE9D09}"/>
               </a:ext>
             </a:extLst>
           </p:cNvPr>
@@ -8139,38 +8382,8 @@
         </p:blipFill>
         <p:spPr>
           <a:xfrm>
-            <a:off x="662753" y="1483553"/>
-            <a:ext cx="4313294" cy="4892464"/>
-          </a:xfrm>
-          <a:prstGeom prst="rect">
-            <a:avLst/>
-          </a:prstGeom>
-        </p:spPr>
-      </p:pic>
-      <p:pic>
-        <p:nvPicPr>
-          <p:cNvPr id="2" name="그림 1">
-            <a:extLst>
-              <a:ext uri="{FF2B5EF4-FFF2-40B4-BE49-F238E27FC236}">
-                <a16:creationId xmlns:a16="http://schemas.microsoft.com/office/drawing/2014/main" id="{778DA0AB-083D-F17B-9BF3-539604C1EEE6}"/>
-              </a:ext>
-            </a:extLst>
-          </p:cNvPr>
-          <p:cNvPicPr>
-            <a:picLocks noChangeAspect="1"/>
-          </p:cNvPicPr>
-          <p:nvPr/>
-        </p:nvPicPr>
-        <p:blipFill>
-          <a:blip r:embed="rId3"/>
-          <a:stretch>
-            <a:fillRect/>
-          </a:stretch>
-        </p:blipFill>
-        <p:spPr>
-          <a:xfrm>
-            <a:off x="6276267" y="2481180"/>
-            <a:ext cx="4553140" cy="1868397"/>
+            <a:off x="670744" y="1922558"/>
+            <a:ext cx="7696613" cy="3674875"/>
           </a:xfrm>
           <a:prstGeom prst="rect">
             <a:avLst/>
@@ -8179,10 +8392,10 @@
       </p:pic>
       <p:sp>
         <p:nvSpPr>
-          <p:cNvPr id="5" name="TextBox 4">
+          <p:cNvPr id="6" name="TextBox 5">
             <a:extLst>
               <a:ext uri="{FF2B5EF4-FFF2-40B4-BE49-F238E27FC236}">
-                <a16:creationId xmlns:a16="http://schemas.microsoft.com/office/drawing/2014/main" id="{12C20C81-978F-7EA5-11A7-8EBF6E12D6A3}"/>
+                <a16:creationId xmlns:a16="http://schemas.microsoft.com/office/drawing/2014/main" id="{36C19082-8F36-05E1-CB3C-7EE63D024883}"/>
               </a:ext>
             </a:extLst>
           </p:cNvPr>
@@ -8191,8 +8404,8 @@
         </p:nvSpPr>
         <p:spPr>
           <a:xfrm>
-            <a:off x="6315637" y="4629835"/>
-            <a:ext cx="4474400" cy="584775"/>
+            <a:off x="585019" y="5724525"/>
+            <a:ext cx="6096000" cy="369332"/>
           </a:xfrm>
           <a:prstGeom prst="rect">
             <a:avLst/>
@@ -8206,13 +8419,111 @@
           <a:lstStyle/>
           <a:p>
             <a:r>
-              <a:rPr lang="en-US" altLang="ko-KR" sz="1600" dirty="0">
-                <a:latin typeface="D2Coding" panose="020B0609020101020101" pitchFamily="49" charset="-127"/>
-                <a:ea typeface="D2Coding" panose="020B0609020101020101" pitchFamily="49" charset="-127"/>
-              </a:rPr>
-              <a:t>The difference between the encoder in an autoencoder and a variational autoencoder</a:t>
-            </a:r>
-            <a:endParaRPr lang="ko-KR" altLang="en-US" sz="1600" dirty="0">
+              <a:rPr lang="en-US" altLang="ko-KR" dirty="0">
+                <a:latin typeface="D2Coding" panose="020B0609020101020101" pitchFamily="49" charset="-127"/>
+                <a:ea typeface="D2Coding" panose="020B0609020101020101" pitchFamily="49" charset="-127"/>
+              </a:rPr>
+              <a:t>The latent space of the VAE colored by digit</a:t>
+            </a:r>
+            <a:endParaRPr lang="ko-KR" altLang="en-US" dirty="0">
+              <a:latin typeface="D2Coding" panose="020B0609020101020101" pitchFamily="49" charset="-127"/>
+              <a:ea typeface="D2Coding" panose="020B0609020101020101" pitchFamily="49" charset="-127"/>
+            </a:endParaRPr>
+          </a:p>
+        </p:txBody>
+      </p:sp>
+      <p:pic>
+        <p:nvPicPr>
+          <p:cNvPr id="2" name="Picture 2" descr="png">
+            <a:extLst>
+              <a:ext uri="{FF2B5EF4-FFF2-40B4-BE49-F238E27FC236}">
+                <a16:creationId xmlns:a16="http://schemas.microsoft.com/office/drawing/2014/main" id="{78473249-EDD1-2EFD-4360-A70EF2C792F2}"/>
+              </a:ext>
+            </a:extLst>
+          </p:cNvPr>
+          <p:cNvPicPr>
+            <a:picLocks noChangeAspect="1" noChangeArrowheads="1"/>
+          </p:cNvPicPr>
+          <p:nvPr/>
+        </p:nvPicPr>
+        <p:blipFill>
+          <a:blip r:embed="rId3">
+            <a:extLst>
+              <a:ext uri="{28A0092B-C50C-407E-A947-70E740481C1C}">
+                <a14:useLocalDpi xmlns:a14="http://schemas.microsoft.com/office/drawing/2010/main" val="0"/>
+              </a:ext>
+            </a:extLst>
+          </a:blip>
+          <a:srcRect/>
+          <a:stretch>
+            <a:fillRect/>
+          </a:stretch>
+        </p:blipFill>
+        <p:spPr bwMode="auto">
+          <a:xfrm>
+            <a:off x="8519344" y="1988345"/>
+            <a:ext cx="3409950" cy="3409950"/>
+          </a:xfrm>
+          <a:prstGeom prst="rect">
+            <a:avLst/>
+          </a:prstGeom>
+          <a:noFill/>
+          <a:extLst>
+            <a:ext uri="{909E8E84-426E-40DD-AFC4-6F175D3DCCD1}">
+              <a14:hiddenFill xmlns:a14="http://schemas.microsoft.com/office/drawing/2010/main">
+                <a:solidFill>
+                  <a:srgbClr val="FFFFFF"/>
+                </a:solidFill>
+              </a14:hiddenFill>
+            </a:ext>
+          </a:extLst>
+        </p:spPr>
+      </p:pic>
+      <p:sp>
+        <p:nvSpPr>
+          <p:cNvPr id="5" name="TextBox 4">
+            <a:extLst>
+              <a:ext uri="{FF2B5EF4-FFF2-40B4-BE49-F238E27FC236}">
+                <a16:creationId xmlns:a16="http://schemas.microsoft.com/office/drawing/2014/main" id="{92E299D1-F29D-E264-DC97-66606A457604}"/>
+              </a:ext>
+            </a:extLst>
+          </p:cNvPr>
+          <p:cNvSpPr txBox="1"/>
+          <p:nvPr/>
+        </p:nvSpPr>
+        <p:spPr>
+          <a:xfrm>
+            <a:off x="8519344" y="5398295"/>
+            <a:ext cx="2108269" cy="400110"/>
+          </a:xfrm>
+          <a:prstGeom prst="rect">
+            <a:avLst/>
+          </a:prstGeom>
+          <a:noFill/>
+        </p:spPr>
+        <p:txBody>
+          <a:bodyPr wrap="none" rtlCol="0">
+            <a:spAutoFit/>
+          </a:bodyPr>
+          <a:lstStyle/>
+          <a:p>
+            <a:r>
+              <a:rPr lang="en-US" altLang="ko-KR" sz="2000" dirty="0">
+                <a:latin typeface="D2Coding" panose="020B0609020101020101" pitchFamily="49" charset="-127"/>
+                <a:ea typeface="D2Coding" panose="020B0609020101020101" pitchFamily="49" charset="-127"/>
+                <a:hlinkClick r:id="rId4"/>
+              </a:rPr>
+              <a:t>Generative/</a:t>
+            </a:r>
+            <a:r>
+              <a:rPr lang="en-US" altLang="ko-KR" sz="2000" dirty="0" err="1">
+                <a:latin typeface="D2Coding" panose="020B0609020101020101" pitchFamily="49" charset="-127"/>
+                <a:ea typeface="D2Coding" panose="020B0609020101020101" pitchFamily="49" charset="-127"/>
+                <a:hlinkClick r:id="rId4"/>
+              </a:rPr>
+              <a:t>cvae</a:t>
+            </a:r>
+            <a:endParaRPr lang="ko-KR" altLang="en-US" sz="2000" dirty="0">
               <a:latin typeface="D2Coding" panose="020B0609020101020101" pitchFamily="49" charset="-127"/>
               <a:ea typeface="D2Coding" panose="020B0609020101020101" pitchFamily="49" charset="-127"/>
             </a:endParaRPr>
@@ -8222,7 +8533,7 @@
     </p:spTree>
     <p:extLst>
       <p:ext uri="{BB962C8B-B14F-4D97-AF65-F5344CB8AC3E}">
-        <p14:creationId xmlns:p14="http://schemas.microsoft.com/office/powerpoint/2010/main" val="773232188"/>
+        <p14:creationId xmlns:p14="http://schemas.microsoft.com/office/powerpoint/2010/main" val="2934553490"/>
       </p:ext>
     </p:extLst>
   </p:cSld>
@@ -8240,7 +8551,7 @@
         <p:cNvPr id="1" name="">
           <a:extLst>
             <a:ext uri="{FF2B5EF4-FFF2-40B4-BE49-F238E27FC236}">
-              <a16:creationId xmlns:a16="http://schemas.microsoft.com/office/drawing/2014/main" id="{FE122660-74B4-FE78-8B0A-9B358B4A349A}"/>
+              <a16:creationId xmlns:a16="http://schemas.microsoft.com/office/drawing/2014/main" id="{0CD5FEF5-617C-D3EC-5F92-DCB77404B7AD}"/>
             </a:ext>
           </a:extLst>
         </p:cNvPr>
@@ -8260,7 +8571,7 @@
           <p:cNvPr id="3" name="제목 1">
             <a:extLst>
               <a:ext uri="{FF2B5EF4-FFF2-40B4-BE49-F238E27FC236}">
-                <a16:creationId xmlns:a16="http://schemas.microsoft.com/office/drawing/2014/main" id="{AEFF8BA2-223F-DC99-8585-2020CEF24F2D}"/>
+                <a16:creationId xmlns:a16="http://schemas.microsoft.com/office/drawing/2014/main" id="{764A5BB0-CE71-790E-4ED7-E088E146AF8B}"/>
               </a:ext>
             </a:extLst>
           </p:cNvPr>
@@ -8315,6 +8626,485 @@
                 <a:ea typeface="D2Coding" panose="020B0609020101020101" pitchFamily="49" charset="-127"/>
                 <a:cs typeface="Segoe UI Light" panose="020B0502040204020203" pitchFamily="34" charset="0"/>
               </a:rPr>
+              <a:t>Variational Art Exhibition </a:t>
+            </a:r>
+            <a:endParaRPr lang="ko-KR" altLang="en-US" sz="2800" cap="none" dirty="0">
+              <a:solidFill>
+                <a:schemeClr val="bg2">
+                  <a:lumMod val="25000"/>
+                </a:schemeClr>
+              </a:solidFill>
+              <a:latin typeface="D2Coding" panose="020B0609020101020101" pitchFamily="49" charset="-127"/>
+              <a:ea typeface="D2Coding" panose="020B0609020101020101" pitchFamily="49" charset="-127"/>
+              <a:cs typeface="Segoe UI Light" panose="020B0502040204020203" pitchFamily="34" charset="0"/>
+            </a:endParaRPr>
+          </a:p>
+        </p:txBody>
+      </p:sp>
+      <p:pic>
+        <p:nvPicPr>
+          <p:cNvPr id="9" name="그림 8">
+            <a:extLst>
+              <a:ext uri="{FF2B5EF4-FFF2-40B4-BE49-F238E27FC236}">
+                <a16:creationId xmlns:a16="http://schemas.microsoft.com/office/drawing/2014/main" id="{25F89A81-3A70-D6E7-3F1F-E5A1D600FFEE}"/>
+              </a:ext>
+            </a:extLst>
+          </p:cNvPr>
+          <p:cNvPicPr>
+            <a:picLocks noChangeAspect="1"/>
+          </p:cNvPicPr>
+          <p:nvPr/>
+        </p:nvPicPr>
+        <p:blipFill>
+          <a:blip r:embed="rId2"/>
+          <a:stretch>
+            <a:fillRect/>
+          </a:stretch>
+        </p:blipFill>
+        <p:spPr>
+          <a:xfrm>
+            <a:off x="592084" y="2040082"/>
+            <a:ext cx="8550381" cy="3977985"/>
+          </a:xfrm>
+          <a:prstGeom prst="rect">
+            <a:avLst/>
+          </a:prstGeom>
+        </p:spPr>
+      </p:pic>
+      <p:sp>
+        <p:nvSpPr>
+          <p:cNvPr id="4" name="TextBox 3">
+            <a:extLst>
+              <a:ext uri="{FF2B5EF4-FFF2-40B4-BE49-F238E27FC236}">
+                <a16:creationId xmlns:a16="http://schemas.microsoft.com/office/drawing/2014/main" id="{0FB05E78-6A83-AA7D-BB3A-777326A65F39}"/>
+              </a:ext>
+            </a:extLst>
+          </p:cNvPr>
+          <p:cNvSpPr txBox="1"/>
+          <p:nvPr/>
+        </p:nvSpPr>
+        <p:spPr>
+          <a:xfrm>
+            <a:off x="475645" y="1600200"/>
+            <a:ext cx="6532558" cy="369332"/>
+          </a:xfrm>
+          <a:prstGeom prst="rect">
+            <a:avLst/>
+          </a:prstGeom>
+          <a:noFill/>
+        </p:spPr>
+        <p:txBody>
+          <a:bodyPr wrap="none" rtlCol="0">
+            <a:spAutoFit/>
+          </a:bodyPr>
+          <a:lstStyle/>
+          <a:p>
+            <a:r>
+              <a:rPr lang="en-US" altLang="ko-KR" dirty="0">
+                <a:latin typeface="D2Coding" panose="020B0609020101020101" pitchFamily="49" charset="-127"/>
+                <a:ea typeface="D2Coding" panose="020B0609020101020101" pitchFamily="49" charset="-127"/>
+                <a:hlinkClick r:id="rId3"/>
+              </a:rPr>
+              <a:t>Convolutional Variational Autoencoder, trained on MNIST</a:t>
+            </a:r>
+            <a:endParaRPr lang="ko-KR" altLang="en-US" dirty="0">
+              <a:latin typeface="D2Coding" panose="020B0609020101020101" pitchFamily="49" charset="-127"/>
+              <a:ea typeface="D2Coding" panose="020B0609020101020101" pitchFamily="49" charset="-127"/>
+            </a:endParaRPr>
+          </a:p>
+        </p:txBody>
+      </p:sp>
+      <p:sp>
+        <p:nvSpPr>
+          <p:cNvPr id="6" name="TextBox 5">
+            <a:extLst>
+              <a:ext uri="{FF2B5EF4-FFF2-40B4-BE49-F238E27FC236}">
+                <a16:creationId xmlns:a16="http://schemas.microsoft.com/office/drawing/2014/main" id="{77F92648-BA8C-EB45-4CF1-D020CB3CF871}"/>
+              </a:ext>
+            </a:extLst>
+          </p:cNvPr>
+          <p:cNvSpPr txBox="1"/>
+          <p:nvPr/>
+        </p:nvSpPr>
+        <p:spPr>
+          <a:xfrm>
+            <a:off x="592084" y="6088617"/>
+            <a:ext cx="4505325" cy="338554"/>
+          </a:xfrm>
+          <a:prstGeom prst="rect">
+            <a:avLst/>
+          </a:prstGeom>
+          <a:noFill/>
+        </p:spPr>
+        <p:txBody>
+          <a:bodyPr wrap="square">
+            <a:spAutoFit/>
+          </a:bodyPr>
+          <a:lstStyle/>
+          <a:p>
+            <a:r>
+              <a:rPr lang="en-US" altLang="ko-KR" sz="1600" dirty="0" err="1">
+                <a:latin typeface="D2Coding" panose="020B0609020101020101" pitchFamily="49" charset="-127"/>
+                <a:ea typeface="D2Coding" panose="020B0609020101020101" pitchFamily="49" charset="-127"/>
+                <a:hlinkClick r:id="rId4"/>
+              </a:rPr>
+              <a:t>Keras</a:t>
+            </a:r>
+            <a:r>
+              <a:rPr lang="en-US" altLang="ko-KR" sz="1600" dirty="0">
+                <a:latin typeface="D2Coding" panose="020B0609020101020101" pitchFamily="49" charset="-127"/>
+                <a:ea typeface="D2Coding" panose="020B0609020101020101" pitchFamily="49" charset="-127"/>
+                <a:hlinkClick r:id="rId4"/>
+              </a:rPr>
+              <a:t> JS</a:t>
+            </a:r>
+            <a:r>
+              <a:rPr lang="en-US" altLang="ko-KR" sz="1600" dirty="0">
+                <a:latin typeface="D2Coding" panose="020B0609020101020101" pitchFamily="49" charset="-127"/>
+                <a:ea typeface="D2Coding" panose="020B0609020101020101" pitchFamily="49" charset="-127"/>
+              </a:rPr>
+              <a:t> </a:t>
+            </a:r>
+            <a:r>
+              <a:rPr lang="ko-KR" altLang="en-US" sz="1600" dirty="0">
+                <a:latin typeface="D2Coding" panose="020B0609020101020101" pitchFamily="49" charset="-127"/>
+                <a:ea typeface="D2Coding" panose="020B0609020101020101" pitchFamily="49" charset="-127"/>
+              </a:rPr>
+              <a:t>실습</a:t>
+            </a:r>
+            <a:r>
+              <a:rPr lang="en-US" altLang="ko-KR" sz="1600" dirty="0">
+                <a:latin typeface="D2Coding" panose="020B0609020101020101" pitchFamily="49" charset="-127"/>
+                <a:ea typeface="D2Coding" panose="020B0609020101020101" pitchFamily="49" charset="-127"/>
+              </a:rPr>
+              <a:t> </a:t>
+            </a:r>
+            <a:r>
+              <a:rPr lang="ko-KR" altLang="en-US" sz="1600" dirty="0">
+                <a:latin typeface="D2Coding" panose="020B0609020101020101" pitchFamily="49" charset="-127"/>
+                <a:ea typeface="D2Coding" panose="020B0609020101020101" pitchFamily="49" charset="-127"/>
+              </a:rPr>
+              <a:t>사이트 </a:t>
+            </a:r>
+            <a:r>
+              <a:rPr lang="en-US" altLang="ko-KR" sz="1600" dirty="0">
+                <a:latin typeface="D2Coding" panose="020B0609020101020101" pitchFamily="49" charset="-127"/>
+                <a:ea typeface="D2Coding" panose="020B0609020101020101" pitchFamily="49" charset="-127"/>
+              </a:rPr>
+              <a:t>click</a:t>
+            </a:r>
+          </a:p>
+        </p:txBody>
+      </p:sp>
+    </p:spTree>
+    <p:extLst>
+      <p:ext uri="{BB962C8B-B14F-4D97-AF65-F5344CB8AC3E}">
+        <p14:creationId xmlns:p14="http://schemas.microsoft.com/office/powerpoint/2010/main" val="4247683160"/>
+      </p:ext>
+    </p:extLst>
+  </p:cSld>
+  <p:clrMapOvr>
+    <a:masterClrMapping/>
+  </p:clrMapOvr>
+</p:sld>
+</file>
+
+<file path=ppt/slides/slide25.xml><?xml version="1.0" encoding="utf-8"?>
+<p:sld xmlns:a="http://schemas.openxmlformats.org/drawingml/2006/main" xmlns:r="http://schemas.openxmlformats.org/officeDocument/2006/relationships" xmlns:p="http://schemas.openxmlformats.org/presentationml/2006/main">
+  <p:cSld>
+    <p:spTree>
+      <p:nvGrpSpPr>
+        <p:cNvPr id="1" name="">
+          <a:extLst>
+            <a:ext uri="{FF2B5EF4-FFF2-40B4-BE49-F238E27FC236}">
+              <a16:creationId xmlns:a16="http://schemas.microsoft.com/office/drawing/2014/main" id="{66B09516-21E9-348C-3C75-0C0D6299878C}"/>
+            </a:ext>
+          </a:extLst>
+        </p:cNvPr>
+        <p:cNvGrpSpPr/>
+        <p:nvPr/>
+      </p:nvGrpSpPr>
+      <p:grpSpPr>
+        <a:xfrm>
+          <a:off x="0" y="0"/>
+          <a:ext cx="0" cy="0"/>
+          <a:chOff x="0" y="0"/>
+          <a:chExt cx="0" cy="0"/>
+        </a:xfrm>
+      </p:grpSpPr>
+      <p:sp>
+        <p:nvSpPr>
+          <p:cNvPr id="3" name="제목 1">
+            <a:extLst>
+              <a:ext uri="{FF2B5EF4-FFF2-40B4-BE49-F238E27FC236}">
+                <a16:creationId xmlns:a16="http://schemas.microsoft.com/office/drawing/2014/main" id="{5CFE18E0-5B17-FE87-AF9F-7D5AE232EC51}"/>
+              </a:ext>
+            </a:extLst>
+          </p:cNvPr>
+          <p:cNvSpPr txBox="1">
+            <a:spLocks/>
+          </p:cNvSpPr>
+          <p:nvPr/>
+        </p:nvSpPr>
+        <p:spPr>
+          <a:xfrm>
+            <a:off x="475645" y="481983"/>
+            <a:ext cx="10353762" cy="766439"/>
+          </a:xfrm>
+          <a:prstGeom prst="rect">
+            <a:avLst/>
+          </a:prstGeom>
+        </p:spPr>
+        <p:txBody>
+          <a:bodyPr vert="horz" lIns="91440" tIns="45720" rIns="91440" bIns="45720" rtlCol="0" anchor="ctr">
+            <a:normAutofit/>
+          </a:bodyPr>
+          <a:lstStyle>
+            <a:lvl1pPr algn="ctr" defTabSz="914400" rtl="0" eaLnBrk="1" latinLnBrk="1" hangingPunct="1">
+              <a:lnSpc>
+                <a:spcPct val="90000"/>
+              </a:lnSpc>
+              <a:spcBef>
+                <a:spcPct val="0"/>
+              </a:spcBef>
+              <a:buNone/>
+              <a:defRPr sz="3200" kern="1200" cap="all" baseline="0">
+                <a:solidFill>
+                  <a:schemeClr val="tx1"/>
+                </a:solidFill>
+                <a:effectLst/>
+                <a:latin typeface="Batang" panose="02030600000101010101" pitchFamily="18" charset="-127"/>
+                <a:ea typeface="Batang" panose="02030600000101010101" pitchFamily="18" charset="-127"/>
+                <a:cs typeface="+mj-cs"/>
+              </a:defRPr>
+            </a:lvl1pPr>
+          </a:lstStyle>
+          <a:p>
+            <a:pPr algn="l"/>
+            <a:r>
+              <a:rPr lang="en-US" altLang="ko-KR" sz="2800" cap="none" dirty="0">
+                <a:solidFill>
+                  <a:schemeClr val="bg2">
+                    <a:lumMod val="25000"/>
+                  </a:schemeClr>
+                </a:solidFill>
+                <a:latin typeface="D2Coding" panose="020B0609020101020101" pitchFamily="49" charset="-127"/>
+                <a:ea typeface="D2Coding" panose="020B0609020101020101" pitchFamily="49" charset="-127"/>
+                <a:cs typeface="Segoe UI Light" panose="020B0502040204020203" pitchFamily="34" charset="0"/>
+              </a:rPr>
+              <a:t>Variational Autoencoders </a:t>
+            </a:r>
+            <a:endParaRPr lang="ko-KR" altLang="en-US" sz="2800" cap="none" dirty="0">
+              <a:solidFill>
+                <a:schemeClr val="bg2">
+                  <a:lumMod val="25000"/>
+                </a:schemeClr>
+              </a:solidFill>
+              <a:latin typeface="D2Coding" panose="020B0609020101020101" pitchFamily="49" charset="-127"/>
+              <a:ea typeface="D2Coding" panose="020B0609020101020101" pitchFamily="49" charset="-127"/>
+              <a:cs typeface="Segoe UI Light" panose="020B0502040204020203" pitchFamily="34" charset="0"/>
+            </a:endParaRPr>
+          </a:p>
+        </p:txBody>
+      </p:sp>
+      <p:pic>
+        <p:nvPicPr>
+          <p:cNvPr id="8" name="그림 7">
+            <a:extLst>
+              <a:ext uri="{FF2B5EF4-FFF2-40B4-BE49-F238E27FC236}">
+                <a16:creationId xmlns:a16="http://schemas.microsoft.com/office/drawing/2014/main" id="{C15A6743-67F3-498A-6A7B-D286FE652D53}"/>
+              </a:ext>
+            </a:extLst>
+          </p:cNvPr>
+          <p:cNvPicPr>
+            <a:picLocks noChangeAspect="1"/>
+          </p:cNvPicPr>
+          <p:nvPr/>
+        </p:nvPicPr>
+        <p:blipFill>
+          <a:blip r:embed="rId2"/>
+          <a:stretch>
+            <a:fillRect/>
+          </a:stretch>
+        </p:blipFill>
+        <p:spPr>
+          <a:xfrm>
+            <a:off x="662753" y="1483553"/>
+            <a:ext cx="4313294" cy="4892464"/>
+          </a:xfrm>
+          <a:prstGeom prst="rect">
+            <a:avLst/>
+          </a:prstGeom>
+        </p:spPr>
+      </p:pic>
+      <p:pic>
+        <p:nvPicPr>
+          <p:cNvPr id="2" name="그림 1">
+            <a:extLst>
+              <a:ext uri="{FF2B5EF4-FFF2-40B4-BE49-F238E27FC236}">
+                <a16:creationId xmlns:a16="http://schemas.microsoft.com/office/drawing/2014/main" id="{778DA0AB-083D-F17B-9BF3-539604C1EEE6}"/>
+              </a:ext>
+            </a:extLst>
+          </p:cNvPr>
+          <p:cNvPicPr>
+            <a:picLocks noChangeAspect="1"/>
+          </p:cNvPicPr>
+          <p:nvPr/>
+        </p:nvPicPr>
+        <p:blipFill>
+          <a:blip r:embed="rId3"/>
+          <a:stretch>
+            <a:fillRect/>
+          </a:stretch>
+        </p:blipFill>
+        <p:spPr>
+          <a:xfrm>
+            <a:off x="6276267" y="2481180"/>
+            <a:ext cx="4553140" cy="1868397"/>
+          </a:xfrm>
+          <a:prstGeom prst="rect">
+            <a:avLst/>
+          </a:prstGeom>
+        </p:spPr>
+      </p:pic>
+      <p:sp>
+        <p:nvSpPr>
+          <p:cNvPr id="5" name="TextBox 4">
+            <a:extLst>
+              <a:ext uri="{FF2B5EF4-FFF2-40B4-BE49-F238E27FC236}">
+                <a16:creationId xmlns:a16="http://schemas.microsoft.com/office/drawing/2014/main" id="{12C20C81-978F-7EA5-11A7-8EBF6E12D6A3}"/>
+              </a:ext>
+            </a:extLst>
+          </p:cNvPr>
+          <p:cNvSpPr txBox="1"/>
+          <p:nvPr/>
+        </p:nvSpPr>
+        <p:spPr>
+          <a:xfrm>
+            <a:off x="6315637" y="4629835"/>
+            <a:ext cx="4474400" cy="584775"/>
+          </a:xfrm>
+          <a:prstGeom prst="rect">
+            <a:avLst/>
+          </a:prstGeom>
+          <a:noFill/>
+        </p:spPr>
+        <p:txBody>
+          <a:bodyPr wrap="square">
+            <a:spAutoFit/>
+          </a:bodyPr>
+          <a:lstStyle/>
+          <a:p>
+            <a:r>
+              <a:rPr lang="en-US" altLang="ko-KR" sz="1600" dirty="0">
+                <a:latin typeface="D2Coding" panose="020B0609020101020101" pitchFamily="49" charset="-127"/>
+                <a:ea typeface="D2Coding" panose="020B0609020101020101" pitchFamily="49" charset="-127"/>
+              </a:rPr>
+              <a:t>The difference between the encoder in an autoencoder and a variational autoencoder</a:t>
+            </a:r>
+            <a:endParaRPr lang="ko-KR" altLang="en-US" sz="1600" dirty="0">
+              <a:latin typeface="D2Coding" panose="020B0609020101020101" pitchFamily="49" charset="-127"/>
+              <a:ea typeface="D2Coding" panose="020B0609020101020101" pitchFamily="49" charset="-127"/>
+            </a:endParaRPr>
+          </a:p>
+        </p:txBody>
+      </p:sp>
+    </p:spTree>
+    <p:extLst>
+      <p:ext uri="{BB962C8B-B14F-4D97-AF65-F5344CB8AC3E}">
+        <p14:creationId xmlns:p14="http://schemas.microsoft.com/office/powerpoint/2010/main" val="773232188"/>
+      </p:ext>
+    </p:extLst>
+  </p:cSld>
+  <p:clrMapOvr>
+    <a:masterClrMapping/>
+  </p:clrMapOvr>
+</p:sld>
+</file>
+
+<file path=ppt/slides/slide26.xml><?xml version="1.0" encoding="utf-8"?>
+<p:sld xmlns:a="http://schemas.openxmlformats.org/drawingml/2006/main" xmlns:r="http://schemas.openxmlformats.org/officeDocument/2006/relationships" xmlns:p="http://schemas.openxmlformats.org/presentationml/2006/main">
+  <p:cSld>
+    <p:spTree>
+      <p:nvGrpSpPr>
+        <p:cNvPr id="1" name="">
+          <a:extLst>
+            <a:ext uri="{FF2B5EF4-FFF2-40B4-BE49-F238E27FC236}">
+              <a16:creationId xmlns:a16="http://schemas.microsoft.com/office/drawing/2014/main" id="{FE122660-74B4-FE78-8B0A-9B358B4A349A}"/>
+            </a:ext>
+          </a:extLst>
+        </p:cNvPr>
+        <p:cNvGrpSpPr/>
+        <p:nvPr/>
+      </p:nvGrpSpPr>
+      <p:grpSpPr>
+        <a:xfrm>
+          <a:off x="0" y="0"/>
+          <a:ext cx="0" cy="0"/>
+          <a:chOff x="0" y="0"/>
+          <a:chExt cx="0" cy="0"/>
+        </a:xfrm>
+      </p:grpSpPr>
+      <p:sp>
+        <p:nvSpPr>
+          <p:cNvPr id="3" name="제목 1">
+            <a:extLst>
+              <a:ext uri="{FF2B5EF4-FFF2-40B4-BE49-F238E27FC236}">
+                <a16:creationId xmlns:a16="http://schemas.microsoft.com/office/drawing/2014/main" id="{AEFF8BA2-223F-DC99-8585-2020CEF24F2D}"/>
+              </a:ext>
+            </a:extLst>
+          </p:cNvPr>
+          <p:cNvSpPr txBox="1">
+            <a:spLocks/>
+          </p:cNvSpPr>
+          <p:nvPr/>
+        </p:nvSpPr>
+        <p:spPr>
+          <a:xfrm>
+            <a:off x="475645" y="481983"/>
+            <a:ext cx="10353762" cy="766439"/>
+          </a:xfrm>
+          <a:prstGeom prst="rect">
+            <a:avLst/>
+          </a:prstGeom>
+        </p:spPr>
+        <p:txBody>
+          <a:bodyPr vert="horz" lIns="91440" tIns="45720" rIns="91440" bIns="45720" rtlCol="0" anchor="ctr">
+            <a:normAutofit/>
+          </a:bodyPr>
+          <a:lstStyle>
+            <a:lvl1pPr algn="ctr" defTabSz="914400" rtl="0" eaLnBrk="1" latinLnBrk="1" hangingPunct="1">
+              <a:lnSpc>
+                <a:spcPct val="90000"/>
+              </a:lnSpc>
+              <a:spcBef>
+                <a:spcPct val="0"/>
+              </a:spcBef>
+              <a:buNone/>
+              <a:defRPr sz="3200" kern="1200" cap="all" baseline="0">
+                <a:solidFill>
+                  <a:schemeClr val="tx1"/>
+                </a:solidFill>
+                <a:effectLst/>
+                <a:latin typeface="Batang" panose="02030600000101010101" pitchFamily="18" charset="-127"/>
+                <a:ea typeface="Batang" panose="02030600000101010101" pitchFamily="18" charset="-127"/>
+                <a:cs typeface="+mj-cs"/>
+              </a:defRPr>
+            </a:lvl1pPr>
+          </a:lstStyle>
+          <a:p>
+            <a:pPr algn="l"/>
+            <a:r>
+              <a:rPr lang="en-US" altLang="ko-KR" sz="2800" cap="none" dirty="0">
+                <a:solidFill>
+                  <a:schemeClr val="bg2">
+                    <a:lumMod val="25000"/>
+                  </a:schemeClr>
+                </a:solidFill>
+                <a:latin typeface="D2Coding" panose="020B0609020101020101" pitchFamily="49" charset="-127"/>
+                <a:ea typeface="D2Coding" panose="020B0609020101020101" pitchFamily="49" charset="-127"/>
+                <a:cs typeface="Segoe UI Light" panose="020B0502040204020203" pitchFamily="34" charset="0"/>
+              </a:rPr>
               <a:t>Variational Autoencoders </a:t>
             </a:r>
             <a:endParaRPr lang="ko-KR" altLang="en-US" sz="2800" cap="none" dirty="0">
@@ -8575,7 +9365,7 @@
 </p:sld>
 </file>
 
-<file path=ppt/slides/slide25.xml><?xml version="1.0" encoding="utf-8"?>
+<file path=ppt/slides/slide27.xml><?xml version="1.0" encoding="utf-8"?>
 <p:sld xmlns:a="http://schemas.openxmlformats.org/drawingml/2006/main" xmlns:r="http://schemas.openxmlformats.org/officeDocument/2006/relationships" xmlns:p="http://schemas.openxmlformats.org/presentationml/2006/main">
   <p:cSld>
     <p:spTree>
@@ -8851,7 +9641,7 @@
 </p:sld>
 </file>
 
-<file path=ppt/slides/slide26.xml><?xml version="1.0" encoding="utf-8"?>
+<file path=ppt/slides/slide28.xml><?xml version="1.0" encoding="utf-8"?>
 <p:sld xmlns:a="http://schemas.openxmlformats.org/drawingml/2006/main" xmlns:r="http://schemas.openxmlformats.org/officeDocument/2006/relationships" xmlns:p="http://schemas.openxmlformats.org/presentationml/2006/main">
   <p:cSld>
     <p:spTree>
@@ -9055,7 +9845,7 @@
 </p:sld>
 </file>
 
-<file path=ppt/slides/slide27.xml><?xml version="1.0" encoding="utf-8"?>
+<file path=ppt/slides/slide29.xml><?xml version="1.0" encoding="utf-8"?>
 <p:sld xmlns:a="http://schemas.openxmlformats.org/drawingml/2006/main" xmlns:r="http://schemas.openxmlformats.org/officeDocument/2006/relationships" xmlns:p="http://schemas.openxmlformats.org/presentationml/2006/main">
   <p:cSld>
     <p:spTree>
@@ -9063,7 +9853,7 @@
         <p:cNvPr id="1" name="">
           <a:extLst>
             <a:ext uri="{FF2B5EF4-FFF2-40B4-BE49-F238E27FC236}">
-              <a16:creationId xmlns:a16="http://schemas.microsoft.com/office/drawing/2014/main" id="{A32EF085-A9D6-491C-B41C-425574255B08}"/>
+              <a16:creationId xmlns:a16="http://schemas.microsoft.com/office/drawing/2014/main" id="{158C9950-8B20-FB27-23EA-7F1F00CEEF5A}"/>
             </a:ext>
           </a:extLst>
         </p:cNvPr>
@@ -9083,7 +9873,7 @@
           <p:cNvPr id="3" name="제목 1">
             <a:extLst>
               <a:ext uri="{FF2B5EF4-FFF2-40B4-BE49-F238E27FC236}">
-                <a16:creationId xmlns:a16="http://schemas.microsoft.com/office/drawing/2014/main" id="{B089DBD2-7E9A-0AC7-ED86-9850F3E6B221}"/>
+                <a16:creationId xmlns:a16="http://schemas.microsoft.com/office/drawing/2014/main" id="{0344EAE5-E862-E316-A22E-E0C08FAA410A}"/>
               </a:ext>
             </a:extLst>
           </p:cNvPr>
@@ -9138,272 +9928,6 @@
                 <a:ea typeface="D2Coding" panose="020B0609020101020101" pitchFamily="49" charset="-127"/>
                 <a:cs typeface="Segoe UI Light" panose="020B0502040204020203" pitchFamily="34" charset="0"/>
               </a:rPr>
-              <a:t>Variational Art Exhibition </a:t>
-            </a:r>
-            <a:endParaRPr lang="ko-KR" altLang="en-US" sz="2800" cap="none" dirty="0">
-              <a:solidFill>
-                <a:schemeClr val="bg2">
-                  <a:lumMod val="25000"/>
-                </a:schemeClr>
-              </a:solidFill>
-              <a:latin typeface="D2Coding" panose="020B0609020101020101" pitchFamily="49" charset="-127"/>
-              <a:ea typeface="D2Coding" panose="020B0609020101020101" pitchFamily="49" charset="-127"/>
-              <a:cs typeface="Segoe UI Light" panose="020B0502040204020203" pitchFamily="34" charset="0"/>
-            </a:endParaRPr>
-          </a:p>
-        </p:txBody>
-      </p:sp>
-      <p:pic>
-        <p:nvPicPr>
-          <p:cNvPr id="9" name="그림 8">
-            <a:extLst>
-              <a:ext uri="{FF2B5EF4-FFF2-40B4-BE49-F238E27FC236}">
-                <a16:creationId xmlns:a16="http://schemas.microsoft.com/office/drawing/2014/main" id="{1F2664FC-F24D-780D-B8F8-03FE03098E83}"/>
-              </a:ext>
-            </a:extLst>
-          </p:cNvPr>
-          <p:cNvPicPr>
-            <a:picLocks noChangeAspect="1"/>
-          </p:cNvPicPr>
-          <p:nvPr/>
-        </p:nvPicPr>
-        <p:blipFill>
-          <a:blip r:embed="rId2"/>
-          <a:stretch>
-            <a:fillRect/>
-          </a:stretch>
-        </p:blipFill>
-        <p:spPr>
-          <a:xfrm>
-            <a:off x="592084" y="2040082"/>
-            <a:ext cx="8550381" cy="3977985"/>
-          </a:xfrm>
-          <a:prstGeom prst="rect">
-            <a:avLst/>
-          </a:prstGeom>
-        </p:spPr>
-      </p:pic>
-      <p:sp>
-        <p:nvSpPr>
-          <p:cNvPr id="4" name="TextBox 3">
-            <a:extLst>
-              <a:ext uri="{FF2B5EF4-FFF2-40B4-BE49-F238E27FC236}">
-                <a16:creationId xmlns:a16="http://schemas.microsoft.com/office/drawing/2014/main" id="{DB8DE8BA-6409-AF25-A1C8-0A932E8028A2}"/>
-              </a:ext>
-            </a:extLst>
-          </p:cNvPr>
-          <p:cNvSpPr txBox="1"/>
-          <p:nvPr/>
-        </p:nvSpPr>
-        <p:spPr>
-          <a:xfrm>
-            <a:off x="475645" y="1600200"/>
-            <a:ext cx="6532558" cy="369332"/>
-          </a:xfrm>
-          <a:prstGeom prst="rect">
-            <a:avLst/>
-          </a:prstGeom>
-          <a:noFill/>
-        </p:spPr>
-        <p:txBody>
-          <a:bodyPr wrap="none" rtlCol="0">
-            <a:spAutoFit/>
-          </a:bodyPr>
-          <a:lstStyle/>
-          <a:p>
-            <a:r>
-              <a:rPr lang="en-US" altLang="ko-KR" dirty="0">
-                <a:latin typeface="D2Coding" panose="020B0609020101020101" pitchFamily="49" charset="-127"/>
-                <a:ea typeface="D2Coding" panose="020B0609020101020101" pitchFamily="49" charset="-127"/>
-                <a:hlinkClick r:id="rId3"/>
-              </a:rPr>
-              <a:t>Convolutional Variational Autoencoder, trained on MNIST</a:t>
-            </a:r>
-            <a:endParaRPr lang="ko-KR" altLang="en-US" dirty="0">
-              <a:latin typeface="D2Coding" panose="020B0609020101020101" pitchFamily="49" charset="-127"/>
-              <a:ea typeface="D2Coding" panose="020B0609020101020101" pitchFamily="49" charset="-127"/>
-            </a:endParaRPr>
-          </a:p>
-        </p:txBody>
-      </p:sp>
-      <p:sp>
-        <p:nvSpPr>
-          <p:cNvPr id="6" name="TextBox 5">
-            <a:extLst>
-              <a:ext uri="{FF2B5EF4-FFF2-40B4-BE49-F238E27FC236}">
-                <a16:creationId xmlns:a16="http://schemas.microsoft.com/office/drawing/2014/main" id="{F659BE8F-44B5-FCF1-E3C8-2342B4266B84}"/>
-              </a:ext>
-            </a:extLst>
-          </p:cNvPr>
-          <p:cNvSpPr txBox="1"/>
-          <p:nvPr/>
-        </p:nvSpPr>
-        <p:spPr>
-          <a:xfrm>
-            <a:off x="592084" y="6088617"/>
-            <a:ext cx="4505325" cy="338554"/>
-          </a:xfrm>
-          <a:prstGeom prst="rect">
-            <a:avLst/>
-          </a:prstGeom>
-          <a:noFill/>
-        </p:spPr>
-        <p:txBody>
-          <a:bodyPr wrap="square">
-            <a:spAutoFit/>
-          </a:bodyPr>
-          <a:lstStyle/>
-          <a:p>
-            <a:r>
-              <a:rPr lang="en-US" altLang="ko-KR" sz="1600" dirty="0" err="1">
-                <a:latin typeface="D2Coding" panose="020B0609020101020101" pitchFamily="49" charset="-127"/>
-                <a:ea typeface="D2Coding" panose="020B0609020101020101" pitchFamily="49" charset="-127"/>
-                <a:hlinkClick r:id="rId4"/>
-              </a:rPr>
-              <a:t>Keras</a:t>
-            </a:r>
-            <a:r>
-              <a:rPr lang="en-US" altLang="ko-KR" sz="1600" dirty="0">
-                <a:latin typeface="D2Coding" panose="020B0609020101020101" pitchFamily="49" charset="-127"/>
-                <a:ea typeface="D2Coding" panose="020B0609020101020101" pitchFamily="49" charset="-127"/>
-                <a:hlinkClick r:id="rId4"/>
-              </a:rPr>
-              <a:t> JS</a:t>
-            </a:r>
-            <a:r>
-              <a:rPr lang="en-US" altLang="ko-KR" sz="1600" dirty="0">
-                <a:latin typeface="D2Coding" panose="020B0609020101020101" pitchFamily="49" charset="-127"/>
-                <a:ea typeface="D2Coding" panose="020B0609020101020101" pitchFamily="49" charset="-127"/>
-              </a:rPr>
-              <a:t> </a:t>
-            </a:r>
-            <a:r>
-              <a:rPr lang="ko-KR" altLang="en-US" sz="1600" dirty="0">
-                <a:latin typeface="D2Coding" panose="020B0609020101020101" pitchFamily="49" charset="-127"/>
-                <a:ea typeface="D2Coding" panose="020B0609020101020101" pitchFamily="49" charset="-127"/>
-              </a:rPr>
-              <a:t>실습</a:t>
-            </a:r>
-            <a:r>
-              <a:rPr lang="en-US" altLang="ko-KR" sz="1600" dirty="0">
-                <a:latin typeface="D2Coding" panose="020B0609020101020101" pitchFamily="49" charset="-127"/>
-                <a:ea typeface="D2Coding" panose="020B0609020101020101" pitchFamily="49" charset="-127"/>
-              </a:rPr>
-              <a:t> </a:t>
-            </a:r>
-            <a:r>
-              <a:rPr lang="ko-KR" altLang="en-US" sz="1600" dirty="0">
-                <a:latin typeface="D2Coding" panose="020B0609020101020101" pitchFamily="49" charset="-127"/>
-                <a:ea typeface="D2Coding" panose="020B0609020101020101" pitchFamily="49" charset="-127"/>
-              </a:rPr>
-              <a:t>사이트 </a:t>
-            </a:r>
-            <a:r>
-              <a:rPr lang="en-US" altLang="ko-KR" sz="1600" dirty="0">
-                <a:latin typeface="D2Coding" panose="020B0609020101020101" pitchFamily="49" charset="-127"/>
-                <a:ea typeface="D2Coding" panose="020B0609020101020101" pitchFamily="49" charset="-127"/>
-              </a:rPr>
-              <a:t>click</a:t>
-            </a:r>
-          </a:p>
-        </p:txBody>
-      </p:sp>
-    </p:spTree>
-    <p:extLst>
-      <p:ext uri="{BB962C8B-B14F-4D97-AF65-F5344CB8AC3E}">
-        <p14:creationId xmlns:p14="http://schemas.microsoft.com/office/powerpoint/2010/main" val="2645627865"/>
-      </p:ext>
-    </p:extLst>
-  </p:cSld>
-  <p:clrMapOvr>
-    <a:masterClrMapping/>
-  </p:clrMapOvr>
-</p:sld>
-</file>
-
-<file path=ppt/slides/slide28.xml><?xml version="1.0" encoding="utf-8"?>
-<p:sld xmlns:a="http://schemas.openxmlformats.org/drawingml/2006/main" xmlns:r="http://schemas.openxmlformats.org/officeDocument/2006/relationships" xmlns:p="http://schemas.openxmlformats.org/presentationml/2006/main">
-  <p:cSld>
-    <p:spTree>
-      <p:nvGrpSpPr>
-        <p:cNvPr id="1" name="">
-          <a:extLst>
-            <a:ext uri="{FF2B5EF4-FFF2-40B4-BE49-F238E27FC236}">
-              <a16:creationId xmlns:a16="http://schemas.microsoft.com/office/drawing/2014/main" id="{158C9950-8B20-FB27-23EA-7F1F00CEEF5A}"/>
-            </a:ext>
-          </a:extLst>
-        </p:cNvPr>
-        <p:cNvGrpSpPr/>
-        <p:nvPr/>
-      </p:nvGrpSpPr>
-      <p:grpSpPr>
-        <a:xfrm>
-          <a:off x="0" y="0"/>
-          <a:ext cx="0" cy="0"/>
-          <a:chOff x="0" y="0"/>
-          <a:chExt cx="0" cy="0"/>
-        </a:xfrm>
-      </p:grpSpPr>
-      <p:sp>
-        <p:nvSpPr>
-          <p:cNvPr id="3" name="제목 1">
-            <a:extLst>
-              <a:ext uri="{FF2B5EF4-FFF2-40B4-BE49-F238E27FC236}">
-                <a16:creationId xmlns:a16="http://schemas.microsoft.com/office/drawing/2014/main" id="{0344EAE5-E862-E316-A22E-E0C08FAA410A}"/>
-              </a:ext>
-            </a:extLst>
-          </p:cNvPr>
-          <p:cNvSpPr txBox="1">
-            <a:spLocks/>
-          </p:cNvSpPr>
-          <p:nvPr/>
-        </p:nvSpPr>
-        <p:spPr>
-          <a:xfrm>
-            <a:off x="475645" y="481983"/>
-            <a:ext cx="10353762" cy="766439"/>
-          </a:xfrm>
-          <a:prstGeom prst="rect">
-            <a:avLst/>
-          </a:prstGeom>
-        </p:spPr>
-        <p:txBody>
-          <a:bodyPr vert="horz" lIns="91440" tIns="45720" rIns="91440" bIns="45720" rtlCol="0" anchor="ctr">
-            <a:normAutofit/>
-          </a:bodyPr>
-          <a:lstStyle>
-            <a:lvl1pPr algn="ctr" defTabSz="914400" rtl="0" eaLnBrk="1" latinLnBrk="1" hangingPunct="1">
-              <a:lnSpc>
-                <a:spcPct val="90000"/>
-              </a:lnSpc>
-              <a:spcBef>
-                <a:spcPct val="0"/>
-              </a:spcBef>
-              <a:buNone/>
-              <a:defRPr sz="3200" kern="1200" cap="all" baseline="0">
-                <a:solidFill>
-                  <a:schemeClr val="tx1"/>
-                </a:solidFill>
-                <a:effectLst/>
-                <a:latin typeface="Batang" panose="02030600000101010101" pitchFamily="18" charset="-127"/>
-                <a:ea typeface="Batang" panose="02030600000101010101" pitchFamily="18" charset="-127"/>
-                <a:cs typeface="+mj-cs"/>
-              </a:defRPr>
-            </a:lvl1pPr>
-          </a:lstStyle>
-          <a:p>
-            <a:pPr algn="l"/>
-            <a:r>
-              <a:rPr lang="en-US" altLang="ko-KR" sz="2800" cap="none" dirty="0">
-                <a:solidFill>
-                  <a:schemeClr val="bg2">
-                    <a:lumMod val="25000"/>
-                  </a:schemeClr>
-                </a:solidFill>
-                <a:latin typeface="D2Coding" panose="020B0609020101020101" pitchFamily="49" charset="-127"/>
-                <a:ea typeface="D2Coding" panose="020B0609020101020101" pitchFamily="49" charset="-127"/>
-                <a:cs typeface="Segoe UI Light" panose="020B0502040204020203" pitchFamily="34" charset="0"/>
-              </a:rPr>
               <a:t>Probability Generation</a:t>
             </a:r>
             <a:endParaRPr lang="ko-KR" altLang="en-US" sz="2800" cap="none" dirty="0">
@@ -9808,354 +10332,6 @@
     <p:extLst>
       <p:ext uri="{BB962C8B-B14F-4D97-AF65-F5344CB8AC3E}">
         <p14:creationId xmlns:p14="http://schemas.microsoft.com/office/powerpoint/2010/main" val="3202013154"/>
-      </p:ext>
-    </p:extLst>
-  </p:cSld>
-  <p:clrMapOvr>
-    <a:masterClrMapping/>
-  </p:clrMapOvr>
-</p:sld>
-</file>
-
-<file path=ppt/slides/slide29.xml><?xml version="1.0" encoding="utf-8"?>
-<p:sld xmlns:a="http://schemas.openxmlformats.org/drawingml/2006/main" xmlns:r="http://schemas.openxmlformats.org/officeDocument/2006/relationships" xmlns:p="http://schemas.openxmlformats.org/presentationml/2006/main">
-  <p:cSld>
-    <p:spTree>
-      <p:nvGrpSpPr>
-        <p:cNvPr id="1" name="">
-          <a:extLst>
-            <a:ext uri="{FF2B5EF4-FFF2-40B4-BE49-F238E27FC236}">
-              <a16:creationId xmlns:a16="http://schemas.microsoft.com/office/drawing/2014/main" id="{4353E598-0C4A-B0DD-57AD-9E78BF3BB214}"/>
-            </a:ext>
-          </a:extLst>
-        </p:cNvPr>
-        <p:cNvGrpSpPr/>
-        <p:nvPr/>
-      </p:nvGrpSpPr>
-      <p:grpSpPr>
-        <a:xfrm>
-          <a:off x="0" y="0"/>
-          <a:ext cx="0" cy="0"/>
-          <a:chOff x="0" y="0"/>
-          <a:chExt cx="0" cy="0"/>
-        </a:xfrm>
-      </p:grpSpPr>
-      <p:sp>
-        <p:nvSpPr>
-          <p:cNvPr id="3" name="제목 1">
-            <a:extLst>
-              <a:ext uri="{FF2B5EF4-FFF2-40B4-BE49-F238E27FC236}">
-                <a16:creationId xmlns:a16="http://schemas.microsoft.com/office/drawing/2014/main" id="{D8024365-8F4C-537F-00C4-68A98B80A939}"/>
-              </a:ext>
-            </a:extLst>
-          </p:cNvPr>
-          <p:cNvSpPr txBox="1">
-            <a:spLocks/>
-          </p:cNvSpPr>
-          <p:nvPr/>
-        </p:nvSpPr>
-        <p:spPr>
-          <a:xfrm>
-            <a:off x="475645" y="481983"/>
-            <a:ext cx="10353762" cy="766439"/>
-          </a:xfrm>
-          <a:prstGeom prst="rect">
-            <a:avLst/>
-          </a:prstGeom>
-        </p:spPr>
-        <p:txBody>
-          <a:bodyPr vert="horz" lIns="91440" tIns="45720" rIns="91440" bIns="45720" rtlCol="0" anchor="ctr">
-            <a:normAutofit/>
-          </a:bodyPr>
-          <a:lstStyle>
-            <a:lvl1pPr algn="ctr" defTabSz="914400" rtl="0" eaLnBrk="1" latinLnBrk="1" hangingPunct="1">
-              <a:lnSpc>
-                <a:spcPct val="90000"/>
-              </a:lnSpc>
-              <a:spcBef>
-                <a:spcPct val="0"/>
-              </a:spcBef>
-              <a:buNone/>
-              <a:defRPr sz="3200" kern="1200" cap="all" baseline="0">
-                <a:solidFill>
-                  <a:schemeClr val="tx1"/>
-                </a:solidFill>
-                <a:effectLst/>
-                <a:latin typeface="Batang" panose="02030600000101010101" pitchFamily="18" charset="-127"/>
-                <a:ea typeface="Batang" panose="02030600000101010101" pitchFamily="18" charset="-127"/>
-                <a:cs typeface="+mj-cs"/>
-              </a:defRPr>
-            </a:lvl1pPr>
-          </a:lstStyle>
-          <a:p>
-            <a:pPr algn="l"/>
-            <a:r>
-              <a:rPr lang="en-US" altLang="ko-KR" sz="2800" cap="none" dirty="0">
-                <a:solidFill>
-                  <a:schemeClr val="bg2">
-                    <a:lumMod val="25000"/>
-                  </a:schemeClr>
-                </a:solidFill>
-                <a:latin typeface="D2Coding" panose="020B0609020101020101" pitchFamily="49" charset="-127"/>
-                <a:ea typeface="D2Coding" panose="020B0609020101020101" pitchFamily="49" charset="-127"/>
-                <a:cs typeface="Segoe UI Light" panose="020B0502040204020203" pitchFamily="34" charset="0"/>
-              </a:rPr>
-              <a:t>Variational Inference </a:t>
-            </a:r>
-            <a:endParaRPr lang="ko-KR" altLang="en-US" sz="2800" cap="none" dirty="0">
-              <a:solidFill>
-                <a:schemeClr val="bg2">
-                  <a:lumMod val="25000"/>
-                </a:schemeClr>
-              </a:solidFill>
-              <a:latin typeface="D2Coding" panose="020B0609020101020101" pitchFamily="49" charset="-127"/>
-              <a:ea typeface="D2Coding" panose="020B0609020101020101" pitchFamily="49" charset="-127"/>
-              <a:cs typeface="Segoe UI Light" panose="020B0502040204020203" pitchFamily="34" charset="0"/>
-            </a:endParaRPr>
-          </a:p>
-        </p:txBody>
-      </p:sp>
-      <p:pic>
-        <p:nvPicPr>
-          <p:cNvPr id="9218" name="Picture 2">
-            <a:extLst>
-              <a:ext uri="{FF2B5EF4-FFF2-40B4-BE49-F238E27FC236}">
-                <a16:creationId xmlns:a16="http://schemas.microsoft.com/office/drawing/2014/main" id="{D5D096CE-CB85-5114-3B09-1269B7F28916}"/>
-              </a:ext>
-            </a:extLst>
-          </p:cNvPr>
-          <p:cNvPicPr>
-            <a:picLocks noChangeAspect="1" noChangeArrowheads="1"/>
-          </p:cNvPicPr>
-          <p:nvPr/>
-        </p:nvPicPr>
-        <p:blipFill>
-          <a:blip r:embed="rId2">
-            <a:extLst>
-              <a:ext uri="{28A0092B-C50C-407E-A947-70E740481C1C}">
-                <a14:useLocalDpi xmlns:a14="http://schemas.microsoft.com/office/drawing/2010/main" val="0"/>
-              </a:ext>
-            </a:extLst>
-          </a:blip>
-          <a:srcRect/>
-          <a:stretch>
-            <a:fillRect/>
-          </a:stretch>
-        </p:blipFill>
-        <p:spPr bwMode="auto">
-          <a:xfrm>
-            <a:off x="1475770" y="2491271"/>
-            <a:ext cx="8830280" cy="3639056"/>
-          </a:xfrm>
-          <a:prstGeom prst="rect">
-            <a:avLst/>
-          </a:prstGeom>
-          <a:noFill/>
-          <a:extLst>
-            <a:ext uri="{909E8E84-426E-40DD-AFC4-6F175D3DCCD1}">
-              <a14:hiddenFill xmlns:a14="http://schemas.microsoft.com/office/drawing/2010/main">
-                <a:solidFill>
-                  <a:srgbClr val="FFFFFF"/>
-                </a:solidFill>
-              </a14:hiddenFill>
-            </a:ext>
-          </a:extLst>
-        </p:spPr>
-      </p:pic>
-      <p:pic>
-        <p:nvPicPr>
-          <p:cNvPr id="10" name="그림 9">
-            <a:extLst>
-              <a:ext uri="{FF2B5EF4-FFF2-40B4-BE49-F238E27FC236}">
-                <a16:creationId xmlns:a16="http://schemas.microsoft.com/office/drawing/2014/main" id="{13DAC6B8-2E2E-2068-71DB-217A1D87D9A6}"/>
-              </a:ext>
-            </a:extLst>
-          </p:cNvPr>
-          <p:cNvPicPr>
-            <a:picLocks noChangeAspect="1"/>
-          </p:cNvPicPr>
-          <p:nvPr/>
-        </p:nvPicPr>
-        <p:blipFill>
-          <a:blip r:embed="rId3">
-            <a:extLst>
-              <a:ext uri="{BEBA8EAE-BF5A-486C-A8C5-ECC9F3942E4B}">
-                <a14:imgProps xmlns:a14="http://schemas.microsoft.com/office/drawing/2010/main">
-                  <a14:imgLayer r:embed="rId4">
-                    <a14:imgEffect>
-                      <a14:colorTemperature colorTemp="11200"/>
-                    </a14:imgEffect>
-                  </a14:imgLayer>
-                </a14:imgProps>
-              </a:ext>
-            </a:extLst>
-          </a:blip>
-          <a:stretch>
-            <a:fillRect/>
-          </a:stretch>
-        </p:blipFill>
-        <p:spPr>
-          <a:xfrm>
-            <a:off x="7311280" y="2964151"/>
-            <a:ext cx="2522439" cy="662997"/>
-          </a:xfrm>
-          <a:prstGeom prst="rect">
-            <a:avLst/>
-          </a:prstGeom>
-        </p:spPr>
-      </p:pic>
-      <p:sp>
-        <p:nvSpPr>
-          <p:cNvPr id="12" name="TextBox 11">
-            <a:extLst>
-              <a:ext uri="{FF2B5EF4-FFF2-40B4-BE49-F238E27FC236}">
-                <a16:creationId xmlns:a16="http://schemas.microsoft.com/office/drawing/2014/main" id="{CFC2300F-372F-E39F-9AED-3EFA616C4855}"/>
-              </a:ext>
-            </a:extLst>
-          </p:cNvPr>
-          <p:cNvSpPr txBox="1"/>
-          <p:nvPr/>
-        </p:nvSpPr>
-        <p:spPr>
-          <a:xfrm>
-            <a:off x="604837" y="1192090"/>
-            <a:ext cx="11377613" cy="793166"/>
-          </a:xfrm>
-          <a:prstGeom prst="rect">
-            <a:avLst/>
-          </a:prstGeom>
-          <a:noFill/>
-        </p:spPr>
-        <p:txBody>
-          <a:bodyPr wrap="square">
-            <a:spAutoFit/>
-          </a:bodyPr>
-          <a:lstStyle/>
-          <a:p>
-            <a:pPr>
-              <a:lnSpc>
-                <a:spcPct val="150000"/>
-              </a:lnSpc>
-            </a:pPr>
-            <a:r>
-              <a:rPr lang="ko-KR" altLang="en-US" sz="1600" dirty="0">
-                <a:latin typeface="D2Coding" panose="020B0609020101020101" pitchFamily="49" charset="-127"/>
-                <a:ea typeface="D2Coding" panose="020B0609020101020101" pitchFamily="49" charset="-127"/>
-              </a:rPr>
-              <a:t>복잡한</a:t>
-            </a:r>
-            <a:r>
-              <a:rPr lang="en-US" altLang="ko-KR" sz="1600" dirty="0">
-                <a:latin typeface="D2Coding" panose="020B0609020101020101" pitchFamily="49" charset="-127"/>
-                <a:ea typeface="D2Coding" panose="020B0609020101020101" pitchFamily="49" charset="-127"/>
-              </a:rPr>
-              <a:t>(</a:t>
-            </a:r>
-            <a:r>
-              <a:rPr lang="ko-KR" altLang="en-US" sz="1600" dirty="0">
-                <a:latin typeface="D2Coding" panose="020B0609020101020101" pitchFamily="49" charset="-127"/>
-                <a:ea typeface="D2Coding" panose="020B0609020101020101" pitchFamily="49" charset="-127"/>
-              </a:rPr>
-              <a:t>비대칭적</a:t>
-            </a:r>
-            <a:r>
-              <a:rPr lang="en-US" altLang="ko-KR" sz="1600" dirty="0">
-                <a:latin typeface="D2Coding" panose="020B0609020101020101" pitchFamily="49" charset="-127"/>
-                <a:ea typeface="D2Coding" panose="020B0609020101020101" pitchFamily="49" charset="-127"/>
-              </a:rPr>
-              <a:t>/</a:t>
-            </a:r>
-            <a:r>
-              <a:rPr lang="ko-KR" altLang="en-US" sz="1600" dirty="0" err="1">
-                <a:latin typeface="D2Coding" panose="020B0609020101020101" pitchFamily="49" charset="-127"/>
-                <a:ea typeface="D2Coding" panose="020B0609020101020101" pitchFamily="49" charset="-127"/>
-              </a:rPr>
-              <a:t>이봉형</a:t>
-            </a:r>
-            <a:r>
-              <a:rPr lang="en-US" altLang="ko-KR" sz="1600" dirty="0">
-                <a:latin typeface="D2Coding" panose="020B0609020101020101" pitchFamily="49" charset="-127"/>
-                <a:ea typeface="D2Coding" panose="020B0609020101020101" pitchFamily="49" charset="-127"/>
-              </a:rPr>
-              <a:t>) </a:t>
-            </a:r>
-            <a:r>
-              <a:rPr lang="ko-KR" altLang="en-US" sz="1600" dirty="0">
-                <a:latin typeface="D2Coding" panose="020B0609020101020101" pitchFamily="49" charset="-127"/>
-                <a:ea typeface="D2Coding" panose="020B0609020101020101" pitchFamily="49" charset="-127"/>
-              </a:rPr>
-              <a:t>목표 분포 </a:t>
-            </a:r>
-            <a:r>
-              <a:rPr lang="en-US" altLang="ko-KR" sz="1600" dirty="0">
-                <a:latin typeface="D2Coding" panose="020B0609020101020101" pitchFamily="49" charset="-127"/>
-                <a:ea typeface="D2Coding" panose="020B0609020101020101" pitchFamily="49" charset="-127"/>
-              </a:rPr>
-              <a:t>p(x)</a:t>
-            </a:r>
-            <a:r>
-              <a:rPr lang="ko-KR" altLang="en-US" sz="1600" dirty="0">
-                <a:latin typeface="D2Coding" panose="020B0609020101020101" pitchFamily="49" charset="-127"/>
-                <a:ea typeface="D2Coding" panose="020B0609020101020101" pitchFamily="49" charset="-127"/>
-              </a:rPr>
-              <a:t>를 다루기 쉬운 단일 </a:t>
-            </a:r>
-            <a:r>
-              <a:rPr lang="ko-KR" altLang="en-US" sz="1600" dirty="0" err="1">
-                <a:latin typeface="D2Coding" panose="020B0609020101020101" pitchFamily="49" charset="-127"/>
-                <a:ea typeface="D2Coding" panose="020B0609020101020101" pitchFamily="49" charset="-127"/>
-              </a:rPr>
-              <a:t>가우시안</a:t>
-            </a:r>
-            <a:r>
-              <a:rPr lang="ko-KR" altLang="en-US" sz="1600" dirty="0">
-                <a:latin typeface="D2Coding" panose="020B0609020101020101" pitchFamily="49" charset="-127"/>
-                <a:ea typeface="D2Coding" panose="020B0609020101020101" pitchFamily="49" charset="-127"/>
-              </a:rPr>
-              <a:t> 분포 </a:t>
-            </a:r>
-            <a:r>
-              <a:rPr lang="en-US" altLang="ko-KR" sz="1600" dirty="0">
-                <a:latin typeface="D2Coding" panose="020B0609020101020101" pitchFamily="49" charset="-127"/>
-                <a:ea typeface="D2Coding" panose="020B0609020101020101" pitchFamily="49" charset="-127"/>
-              </a:rPr>
-              <a:t>q(x)</a:t>
-            </a:r>
-            <a:r>
-              <a:rPr lang="ko-KR" altLang="en-US" sz="1600" dirty="0">
-                <a:latin typeface="D2Coding" panose="020B0609020101020101" pitchFamily="49" charset="-127"/>
-                <a:ea typeface="D2Coding" panose="020B0609020101020101" pitchFamily="49" charset="-127"/>
-              </a:rPr>
-              <a:t>로 근사하는 </a:t>
-            </a:r>
-            <a:r>
-              <a:rPr lang="ko-KR" altLang="en-US" sz="1600" dirty="0" err="1">
-                <a:latin typeface="D2Coding" panose="020B0609020101020101" pitchFamily="49" charset="-127"/>
-                <a:ea typeface="D2Coding" panose="020B0609020101020101" pitchFamily="49" charset="-127"/>
-              </a:rPr>
-              <a:t>변분추론</a:t>
-            </a:r>
-            <a:r>
-              <a:rPr lang="en-US" altLang="ko-KR" sz="1600" dirty="0">
-                <a:latin typeface="D2Coding" panose="020B0609020101020101" pitchFamily="49" charset="-127"/>
-                <a:ea typeface="D2Coding" panose="020B0609020101020101" pitchFamily="49" charset="-127"/>
-              </a:rPr>
-              <a:t>(Variational Inference)</a:t>
-            </a:r>
-            <a:r>
-              <a:rPr lang="ko-KR" altLang="en-US" sz="1600" dirty="0">
-                <a:latin typeface="D2Coding" panose="020B0609020101020101" pitchFamily="49" charset="-127"/>
-                <a:ea typeface="D2Coding" panose="020B0609020101020101" pitchFamily="49" charset="-127"/>
-              </a:rPr>
-              <a:t> 과정</a:t>
-            </a:r>
-          </a:p>
-        </p:txBody>
-      </p:sp>
-    </p:spTree>
-    <p:extLst>
-      <p:ext uri="{BB962C8B-B14F-4D97-AF65-F5344CB8AC3E}">
-        <p14:creationId xmlns:p14="http://schemas.microsoft.com/office/powerpoint/2010/main" val="983554407"/>
       </p:ext>
     </p:extLst>
   </p:cSld>
@@ -10262,7 +10438,7 @@
         <p:cNvPr id="1" name="">
           <a:extLst>
             <a:ext uri="{FF2B5EF4-FFF2-40B4-BE49-F238E27FC236}">
-              <a16:creationId xmlns:a16="http://schemas.microsoft.com/office/drawing/2014/main" id="{7A9C3C6E-4685-B978-1759-5F251A9141DD}"/>
+              <a16:creationId xmlns:a16="http://schemas.microsoft.com/office/drawing/2014/main" id="{4353E598-0C4A-B0DD-57AD-9E78BF3BB214}"/>
             </a:ext>
           </a:extLst>
         </p:cNvPr>
@@ -10277,42 +10453,12 @@
           <a:chExt cx="0" cy="0"/>
         </a:xfrm>
       </p:grpSpPr>
-      <p:pic>
-        <p:nvPicPr>
-          <p:cNvPr id="14" name="그림 13">
-            <a:extLst>
-              <a:ext uri="{FF2B5EF4-FFF2-40B4-BE49-F238E27FC236}">
-                <a16:creationId xmlns:a16="http://schemas.microsoft.com/office/drawing/2014/main" id="{0D3BCA73-BF83-0D20-F7F3-8F3E80548EB2}"/>
-              </a:ext>
-            </a:extLst>
-          </p:cNvPr>
-          <p:cNvPicPr>
-            <a:picLocks noChangeAspect="1"/>
-          </p:cNvPicPr>
-          <p:nvPr/>
-        </p:nvPicPr>
-        <p:blipFill>
-          <a:blip r:embed="rId2"/>
-          <a:stretch>
-            <a:fillRect/>
-          </a:stretch>
-        </p:blipFill>
-        <p:spPr>
-          <a:xfrm>
-            <a:off x="843299" y="2390667"/>
-            <a:ext cx="10509564" cy="3829158"/>
-          </a:xfrm>
-          <a:prstGeom prst="rect">
-            <a:avLst/>
-          </a:prstGeom>
-        </p:spPr>
-      </p:pic>
       <p:sp>
         <p:nvSpPr>
           <p:cNvPr id="3" name="제목 1">
             <a:extLst>
               <a:ext uri="{FF2B5EF4-FFF2-40B4-BE49-F238E27FC236}">
-                <a16:creationId xmlns:a16="http://schemas.microsoft.com/office/drawing/2014/main" id="{ECAE5EF4-DCF0-ABA5-8D05-DF1FA343413A}"/>
+                <a16:creationId xmlns:a16="http://schemas.microsoft.com/office/drawing/2014/main" id="{D8024365-8F4C-537F-00C4-68A98B80A939}"/>
               </a:ext>
             </a:extLst>
           </p:cNvPr>
@@ -10382,6 +10528,384 @@
           </a:p>
         </p:txBody>
       </p:sp>
+      <p:pic>
+        <p:nvPicPr>
+          <p:cNvPr id="9218" name="Picture 2">
+            <a:extLst>
+              <a:ext uri="{FF2B5EF4-FFF2-40B4-BE49-F238E27FC236}">
+                <a16:creationId xmlns:a16="http://schemas.microsoft.com/office/drawing/2014/main" id="{D5D096CE-CB85-5114-3B09-1269B7F28916}"/>
+              </a:ext>
+            </a:extLst>
+          </p:cNvPr>
+          <p:cNvPicPr>
+            <a:picLocks noChangeAspect="1" noChangeArrowheads="1"/>
+          </p:cNvPicPr>
+          <p:nvPr/>
+        </p:nvPicPr>
+        <p:blipFill>
+          <a:blip r:embed="rId2">
+            <a:extLst>
+              <a:ext uri="{28A0092B-C50C-407E-A947-70E740481C1C}">
+                <a14:useLocalDpi xmlns:a14="http://schemas.microsoft.com/office/drawing/2010/main" val="0"/>
+              </a:ext>
+            </a:extLst>
+          </a:blip>
+          <a:srcRect/>
+          <a:stretch>
+            <a:fillRect/>
+          </a:stretch>
+        </p:blipFill>
+        <p:spPr bwMode="auto">
+          <a:xfrm>
+            <a:off x="1475770" y="2491271"/>
+            <a:ext cx="8830280" cy="3639056"/>
+          </a:xfrm>
+          <a:prstGeom prst="rect">
+            <a:avLst/>
+          </a:prstGeom>
+          <a:noFill/>
+          <a:extLst>
+            <a:ext uri="{909E8E84-426E-40DD-AFC4-6F175D3DCCD1}">
+              <a14:hiddenFill xmlns:a14="http://schemas.microsoft.com/office/drawing/2010/main">
+                <a:solidFill>
+                  <a:srgbClr val="FFFFFF"/>
+                </a:solidFill>
+              </a14:hiddenFill>
+            </a:ext>
+          </a:extLst>
+        </p:spPr>
+      </p:pic>
+      <p:pic>
+        <p:nvPicPr>
+          <p:cNvPr id="10" name="그림 9">
+            <a:extLst>
+              <a:ext uri="{FF2B5EF4-FFF2-40B4-BE49-F238E27FC236}">
+                <a16:creationId xmlns:a16="http://schemas.microsoft.com/office/drawing/2014/main" id="{13DAC6B8-2E2E-2068-71DB-217A1D87D9A6}"/>
+              </a:ext>
+            </a:extLst>
+          </p:cNvPr>
+          <p:cNvPicPr>
+            <a:picLocks noChangeAspect="1"/>
+          </p:cNvPicPr>
+          <p:nvPr/>
+        </p:nvPicPr>
+        <p:blipFill>
+          <a:blip r:embed="rId3">
+            <a:extLst>
+              <a:ext uri="{BEBA8EAE-BF5A-486C-A8C5-ECC9F3942E4B}">
+                <a14:imgProps xmlns:a14="http://schemas.microsoft.com/office/drawing/2010/main">
+                  <a14:imgLayer r:embed="rId4">
+                    <a14:imgEffect>
+                      <a14:colorTemperature colorTemp="11200"/>
+                    </a14:imgEffect>
+                  </a14:imgLayer>
+                </a14:imgProps>
+              </a:ext>
+            </a:extLst>
+          </a:blip>
+          <a:stretch>
+            <a:fillRect/>
+          </a:stretch>
+        </p:blipFill>
+        <p:spPr>
+          <a:xfrm>
+            <a:off x="7311280" y="2964151"/>
+            <a:ext cx="2522439" cy="662997"/>
+          </a:xfrm>
+          <a:prstGeom prst="rect">
+            <a:avLst/>
+          </a:prstGeom>
+        </p:spPr>
+      </p:pic>
+      <p:sp>
+        <p:nvSpPr>
+          <p:cNvPr id="12" name="TextBox 11">
+            <a:extLst>
+              <a:ext uri="{FF2B5EF4-FFF2-40B4-BE49-F238E27FC236}">
+                <a16:creationId xmlns:a16="http://schemas.microsoft.com/office/drawing/2014/main" id="{CFC2300F-372F-E39F-9AED-3EFA616C4855}"/>
+              </a:ext>
+            </a:extLst>
+          </p:cNvPr>
+          <p:cNvSpPr txBox="1"/>
+          <p:nvPr/>
+        </p:nvSpPr>
+        <p:spPr>
+          <a:xfrm>
+            <a:off x="604837" y="1192090"/>
+            <a:ext cx="11377613" cy="793166"/>
+          </a:xfrm>
+          <a:prstGeom prst="rect">
+            <a:avLst/>
+          </a:prstGeom>
+          <a:noFill/>
+        </p:spPr>
+        <p:txBody>
+          <a:bodyPr wrap="square">
+            <a:spAutoFit/>
+          </a:bodyPr>
+          <a:lstStyle/>
+          <a:p>
+            <a:pPr>
+              <a:lnSpc>
+                <a:spcPct val="150000"/>
+              </a:lnSpc>
+            </a:pPr>
+            <a:r>
+              <a:rPr lang="ko-KR" altLang="en-US" sz="1600" dirty="0">
+                <a:latin typeface="D2Coding" panose="020B0609020101020101" pitchFamily="49" charset="-127"/>
+                <a:ea typeface="D2Coding" panose="020B0609020101020101" pitchFamily="49" charset="-127"/>
+              </a:rPr>
+              <a:t>복잡한</a:t>
+            </a:r>
+            <a:r>
+              <a:rPr lang="en-US" altLang="ko-KR" sz="1600" dirty="0">
+                <a:latin typeface="D2Coding" panose="020B0609020101020101" pitchFamily="49" charset="-127"/>
+                <a:ea typeface="D2Coding" panose="020B0609020101020101" pitchFamily="49" charset="-127"/>
+              </a:rPr>
+              <a:t>(</a:t>
+            </a:r>
+            <a:r>
+              <a:rPr lang="ko-KR" altLang="en-US" sz="1600" dirty="0">
+                <a:latin typeface="D2Coding" panose="020B0609020101020101" pitchFamily="49" charset="-127"/>
+                <a:ea typeface="D2Coding" panose="020B0609020101020101" pitchFamily="49" charset="-127"/>
+              </a:rPr>
+              <a:t>비대칭적</a:t>
+            </a:r>
+            <a:r>
+              <a:rPr lang="en-US" altLang="ko-KR" sz="1600" dirty="0">
+                <a:latin typeface="D2Coding" panose="020B0609020101020101" pitchFamily="49" charset="-127"/>
+                <a:ea typeface="D2Coding" panose="020B0609020101020101" pitchFamily="49" charset="-127"/>
+              </a:rPr>
+              <a:t>/</a:t>
+            </a:r>
+            <a:r>
+              <a:rPr lang="ko-KR" altLang="en-US" sz="1600" dirty="0" err="1">
+                <a:latin typeface="D2Coding" panose="020B0609020101020101" pitchFamily="49" charset="-127"/>
+                <a:ea typeface="D2Coding" panose="020B0609020101020101" pitchFamily="49" charset="-127"/>
+              </a:rPr>
+              <a:t>이봉형</a:t>
+            </a:r>
+            <a:r>
+              <a:rPr lang="en-US" altLang="ko-KR" sz="1600" dirty="0">
+                <a:latin typeface="D2Coding" panose="020B0609020101020101" pitchFamily="49" charset="-127"/>
+                <a:ea typeface="D2Coding" panose="020B0609020101020101" pitchFamily="49" charset="-127"/>
+              </a:rPr>
+              <a:t>) </a:t>
+            </a:r>
+            <a:r>
+              <a:rPr lang="ko-KR" altLang="en-US" sz="1600" dirty="0">
+                <a:latin typeface="D2Coding" panose="020B0609020101020101" pitchFamily="49" charset="-127"/>
+                <a:ea typeface="D2Coding" panose="020B0609020101020101" pitchFamily="49" charset="-127"/>
+              </a:rPr>
+              <a:t>목표 분포 </a:t>
+            </a:r>
+            <a:r>
+              <a:rPr lang="en-US" altLang="ko-KR" sz="1600" dirty="0">
+                <a:latin typeface="D2Coding" panose="020B0609020101020101" pitchFamily="49" charset="-127"/>
+                <a:ea typeface="D2Coding" panose="020B0609020101020101" pitchFamily="49" charset="-127"/>
+              </a:rPr>
+              <a:t>p(x)</a:t>
+            </a:r>
+            <a:r>
+              <a:rPr lang="ko-KR" altLang="en-US" sz="1600" dirty="0">
+                <a:latin typeface="D2Coding" panose="020B0609020101020101" pitchFamily="49" charset="-127"/>
+                <a:ea typeface="D2Coding" panose="020B0609020101020101" pitchFamily="49" charset="-127"/>
+              </a:rPr>
+              <a:t>를 다루기 쉬운 단일 </a:t>
+            </a:r>
+            <a:r>
+              <a:rPr lang="ko-KR" altLang="en-US" sz="1600" dirty="0" err="1">
+                <a:latin typeface="D2Coding" panose="020B0609020101020101" pitchFamily="49" charset="-127"/>
+                <a:ea typeface="D2Coding" panose="020B0609020101020101" pitchFamily="49" charset="-127"/>
+              </a:rPr>
+              <a:t>가우시안</a:t>
+            </a:r>
+            <a:r>
+              <a:rPr lang="ko-KR" altLang="en-US" sz="1600" dirty="0">
+                <a:latin typeface="D2Coding" panose="020B0609020101020101" pitchFamily="49" charset="-127"/>
+                <a:ea typeface="D2Coding" panose="020B0609020101020101" pitchFamily="49" charset="-127"/>
+              </a:rPr>
+              <a:t> 분포 </a:t>
+            </a:r>
+            <a:r>
+              <a:rPr lang="en-US" altLang="ko-KR" sz="1600" dirty="0">
+                <a:latin typeface="D2Coding" panose="020B0609020101020101" pitchFamily="49" charset="-127"/>
+                <a:ea typeface="D2Coding" panose="020B0609020101020101" pitchFamily="49" charset="-127"/>
+              </a:rPr>
+              <a:t>q(x)</a:t>
+            </a:r>
+            <a:r>
+              <a:rPr lang="ko-KR" altLang="en-US" sz="1600" dirty="0">
+                <a:latin typeface="D2Coding" panose="020B0609020101020101" pitchFamily="49" charset="-127"/>
+                <a:ea typeface="D2Coding" panose="020B0609020101020101" pitchFamily="49" charset="-127"/>
+              </a:rPr>
+              <a:t>로 근사하는 </a:t>
+            </a:r>
+            <a:r>
+              <a:rPr lang="ko-KR" altLang="en-US" sz="1600" dirty="0" err="1">
+                <a:latin typeface="D2Coding" panose="020B0609020101020101" pitchFamily="49" charset="-127"/>
+                <a:ea typeface="D2Coding" panose="020B0609020101020101" pitchFamily="49" charset="-127"/>
+              </a:rPr>
+              <a:t>변분추론</a:t>
+            </a:r>
+            <a:r>
+              <a:rPr lang="en-US" altLang="ko-KR" sz="1600" dirty="0">
+                <a:latin typeface="D2Coding" panose="020B0609020101020101" pitchFamily="49" charset="-127"/>
+                <a:ea typeface="D2Coding" panose="020B0609020101020101" pitchFamily="49" charset="-127"/>
+              </a:rPr>
+              <a:t>(Variational Inference)</a:t>
+            </a:r>
+            <a:r>
+              <a:rPr lang="ko-KR" altLang="en-US" sz="1600" dirty="0">
+                <a:latin typeface="D2Coding" panose="020B0609020101020101" pitchFamily="49" charset="-127"/>
+                <a:ea typeface="D2Coding" panose="020B0609020101020101" pitchFamily="49" charset="-127"/>
+              </a:rPr>
+              <a:t> 과정</a:t>
+            </a:r>
+          </a:p>
+        </p:txBody>
+      </p:sp>
+    </p:spTree>
+    <p:extLst>
+      <p:ext uri="{BB962C8B-B14F-4D97-AF65-F5344CB8AC3E}">
+        <p14:creationId xmlns:p14="http://schemas.microsoft.com/office/powerpoint/2010/main" val="983554407"/>
+      </p:ext>
+    </p:extLst>
+  </p:cSld>
+  <p:clrMapOvr>
+    <a:masterClrMapping/>
+  </p:clrMapOvr>
+</p:sld>
+</file>
+
+<file path=ppt/slides/slide31.xml><?xml version="1.0" encoding="utf-8"?>
+<p:sld xmlns:a="http://schemas.openxmlformats.org/drawingml/2006/main" xmlns:r="http://schemas.openxmlformats.org/officeDocument/2006/relationships" xmlns:p="http://schemas.openxmlformats.org/presentationml/2006/main">
+  <p:cSld>
+    <p:spTree>
+      <p:nvGrpSpPr>
+        <p:cNvPr id="1" name="">
+          <a:extLst>
+            <a:ext uri="{FF2B5EF4-FFF2-40B4-BE49-F238E27FC236}">
+              <a16:creationId xmlns:a16="http://schemas.microsoft.com/office/drawing/2014/main" id="{7A9C3C6E-4685-B978-1759-5F251A9141DD}"/>
+            </a:ext>
+          </a:extLst>
+        </p:cNvPr>
+        <p:cNvGrpSpPr/>
+        <p:nvPr/>
+      </p:nvGrpSpPr>
+      <p:grpSpPr>
+        <a:xfrm>
+          <a:off x="0" y="0"/>
+          <a:ext cx="0" cy="0"/>
+          <a:chOff x="0" y="0"/>
+          <a:chExt cx="0" cy="0"/>
+        </a:xfrm>
+      </p:grpSpPr>
+      <p:pic>
+        <p:nvPicPr>
+          <p:cNvPr id="14" name="그림 13">
+            <a:extLst>
+              <a:ext uri="{FF2B5EF4-FFF2-40B4-BE49-F238E27FC236}">
+                <a16:creationId xmlns:a16="http://schemas.microsoft.com/office/drawing/2014/main" id="{0D3BCA73-BF83-0D20-F7F3-8F3E80548EB2}"/>
+              </a:ext>
+            </a:extLst>
+          </p:cNvPr>
+          <p:cNvPicPr>
+            <a:picLocks noChangeAspect="1"/>
+          </p:cNvPicPr>
+          <p:nvPr/>
+        </p:nvPicPr>
+        <p:blipFill>
+          <a:blip r:embed="rId2"/>
+          <a:stretch>
+            <a:fillRect/>
+          </a:stretch>
+        </p:blipFill>
+        <p:spPr>
+          <a:xfrm>
+            <a:off x="843299" y="2390667"/>
+            <a:ext cx="10509564" cy="3829158"/>
+          </a:xfrm>
+          <a:prstGeom prst="rect">
+            <a:avLst/>
+          </a:prstGeom>
+        </p:spPr>
+      </p:pic>
+      <p:sp>
+        <p:nvSpPr>
+          <p:cNvPr id="3" name="제목 1">
+            <a:extLst>
+              <a:ext uri="{FF2B5EF4-FFF2-40B4-BE49-F238E27FC236}">
+                <a16:creationId xmlns:a16="http://schemas.microsoft.com/office/drawing/2014/main" id="{ECAE5EF4-DCF0-ABA5-8D05-DF1FA343413A}"/>
+              </a:ext>
+            </a:extLst>
+          </p:cNvPr>
+          <p:cNvSpPr txBox="1">
+            <a:spLocks/>
+          </p:cNvSpPr>
+          <p:nvPr/>
+        </p:nvSpPr>
+        <p:spPr>
+          <a:xfrm>
+            <a:off x="475645" y="481983"/>
+            <a:ext cx="10353762" cy="766439"/>
+          </a:xfrm>
+          <a:prstGeom prst="rect">
+            <a:avLst/>
+          </a:prstGeom>
+        </p:spPr>
+        <p:txBody>
+          <a:bodyPr vert="horz" lIns="91440" tIns="45720" rIns="91440" bIns="45720" rtlCol="0" anchor="ctr">
+            <a:normAutofit/>
+          </a:bodyPr>
+          <a:lstStyle>
+            <a:lvl1pPr algn="ctr" defTabSz="914400" rtl="0" eaLnBrk="1" latinLnBrk="1" hangingPunct="1">
+              <a:lnSpc>
+                <a:spcPct val="90000"/>
+              </a:lnSpc>
+              <a:spcBef>
+                <a:spcPct val="0"/>
+              </a:spcBef>
+              <a:buNone/>
+              <a:defRPr sz="3200" kern="1200" cap="all" baseline="0">
+                <a:solidFill>
+                  <a:schemeClr val="tx1"/>
+                </a:solidFill>
+                <a:effectLst/>
+                <a:latin typeface="Batang" panose="02030600000101010101" pitchFamily="18" charset="-127"/>
+                <a:ea typeface="Batang" panose="02030600000101010101" pitchFamily="18" charset="-127"/>
+                <a:cs typeface="+mj-cs"/>
+              </a:defRPr>
+            </a:lvl1pPr>
+          </a:lstStyle>
+          <a:p>
+            <a:pPr algn="l"/>
+            <a:r>
+              <a:rPr lang="en-US" altLang="ko-KR" sz="2800" cap="none" dirty="0">
+                <a:solidFill>
+                  <a:schemeClr val="bg2">
+                    <a:lumMod val="25000"/>
+                  </a:schemeClr>
+                </a:solidFill>
+                <a:latin typeface="D2Coding" panose="020B0609020101020101" pitchFamily="49" charset="-127"/>
+                <a:ea typeface="D2Coding" panose="020B0609020101020101" pitchFamily="49" charset="-127"/>
+                <a:cs typeface="Segoe UI Light" panose="020B0502040204020203" pitchFamily="34" charset="0"/>
+              </a:rPr>
+              <a:t>Variational Inference </a:t>
+            </a:r>
+            <a:endParaRPr lang="ko-KR" altLang="en-US" sz="2800" cap="none" dirty="0">
+              <a:solidFill>
+                <a:schemeClr val="bg2">
+                  <a:lumMod val="25000"/>
+                </a:schemeClr>
+              </a:solidFill>
+              <a:latin typeface="D2Coding" panose="020B0609020101020101" pitchFamily="49" charset="-127"/>
+              <a:ea typeface="D2Coding" panose="020B0609020101020101" pitchFamily="49" charset="-127"/>
+              <a:cs typeface="Segoe UI Light" panose="020B0502040204020203" pitchFamily="34" charset="0"/>
+            </a:endParaRPr>
+          </a:p>
+        </p:txBody>
+      </p:sp>
       <p:sp>
         <p:nvSpPr>
           <p:cNvPr id="12" name="TextBox 11">
@@ -10620,7 +11144,7 @@
 </p:sld>
 </file>
 
-<file path=ppt/slides/slide31.xml><?xml version="1.0" encoding="utf-8"?>
+<file path=ppt/slides/slide32.xml><?xml version="1.0" encoding="utf-8"?>
 <p:sld xmlns:a="http://schemas.openxmlformats.org/drawingml/2006/main" xmlns:r="http://schemas.openxmlformats.org/officeDocument/2006/relationships" xmlns:p="http://schemas.openxmlformats.org/presentationml/2006/main">
   <p:cSld>
     <p:spTree>
@@ -12094,7 +12618,7 @@
 </p:sld>
 </file>
 
-<file path=ppt/slides/slide32.xml><?xml version="1.0" encoding="utf-8"?>
+<file path=ppt/slides/slide33.xml><?xml version="1.0" encoding="utf-8"?>
 <p:sld xmlns:a="http://schemas.openxmlformats.org/drawingml/2006/main" xmlns:r="http://schemas.openxmlformats.org/officeDocument/2006/relationships" xmlns:p="http://schemas.openxmlformats.org/presentationml/2006/main">
   <p:cSld>
     <p:spTree>
@@ -12754,7 +13278,7 @@
 </p:sld>
 </file>
 
-<file path=ppt/slides/slide33.xml><?xml version="1.0" encoding="utf-8"?>
+<file path=ppt/slides/slide34.xml><?xml version="1.0" encoding="utf-8"?>
 <p:sld xmlns:a="http://schemas.openxmlformats.org/drawingml/2006/main" xmlns:r="http://schemas.openxmlformats.org/officeDocument/2006/relationships" xmlns:p="http://schemas.openxmlformats.org/presentationml/2006/main">
   <p:cSld>
     <p:spTree>
@@ -13693,7 +14217,7 @@
 </p:sld>
 </file>
 
-<file path=ppt/slides/slide34.xml><?xml version="1.0" encoding="utf-8"?>
+<file path=ppt/slides/slide35.xml><?xml version="1.0" encoding="utf-8"?>
 <p:sld xmlns:a="http://schemas.openxmlformats.org/drawingml/2006/main" xmlns:r="http://schemas.openxmlformats.org/officeDocument/2006/relationships" xmlns:p="http://schemas.openxmlformats.org/presentationml/2006/main">
   <p:cSld>
     <p:spTree>
